--- a/examples/pptx/immersion-3-2-peer-red-team.pptx
+++ b/examples/pptx/immersion-3-2-peer-red-team.pptx
@@ -554,7 +554,7 @@
           <a:lstStyle/>
           <a:p>
             <a:r>
-              <a:t>The session everyone remembers. Two teams swap prototypes and spend an hour trying to break each other's work. Set the tone early: this is a service they are performing for each other.</a:t>
+              <a:t>This is session 3.2, the Peer Red-Team Round — the session everyone remembers. Two teams swap prototypes and spend an hour trying to break each other's work.</a:t>
             </a:r>
           </a:p>
         </p:txBody>
@@ -624,7 +624,7 @@
           <a:lstStyle/>
           <a:p>
             <a:r>
-              <a:t>The last two words carry the definition. A red team is not an opponent; it is a service. Frame it this way now and the log exchange at the end goes very differently.</a:t>
+              <a:t>A red team is people trying to break it, on purpose, for you. Those last two words carry the definition — it is a service, not an opposition.</a:t>
             </a:r>
           </a:p>
         </p:txBody>
@@ -694,7 +694,7 @@
           <a:lstStyle/>
           <a:p>
             <a:r>
-              <a:t>Four rules, read out before the swap. The third stops helpful teams from quietly patching things instead of logging them, which destroys the record 3.3 depends on.</a:t>
+              <a:t>Four rules for the round. Attack the build, never the team. Everything you find gets written down. No fixing, only finding. And no defending when it is your turn.</a:t>
             </a:r>
           </a:p>
         </p:txBody>
@@ -764,7 +764,7 @@
           <a:lstStyle/>
           <a:p>
             <a:r>
-              <a:t>Step two is the discipline. The moment a builder explains their system, the tester inherits their mental model and stops being a stranger — which was the whole value they brought.</a:t>
+              <a:t>Three steps. Trade three things: the URL, the caveats, and the edge cases. Say nothing else — no walkthrough, no context, no warnings. Then start the clock with ten minutes of hands.</a:t>
             </a:r>
           </a:p>
         </p:txBody>
@@ -834,7 +834,7 @@
           <a:lstStyle/>
           <a:p>
             <a:r>
-              <a:t>Three files and a link. Handing over the caveats feels like giving away the answers and is the opposite — it tells the tester which parts are already known, so they spend their time elsewhere.</a:t>
+              <a:t>You hand over the public URL from yesterday, CAVEATS.md unedited, your edge-case file from last session, and nothing spoken out loud. Handing over the caveats feels like giving away answers and does the opposite.</a:t>
             </a:r>
           </a:p>
         </p:txBody>
@@ -904,7 +904,7 @@
           <a:lstStyle/>
           <a:p>
             <a:r>
-              <a:t>Step one is not wasted time. You cannot tell what counts as broken until you have seen it work, and the tester who skips this logs a lot of intended behaviour.</a:t>
+              <a:t>Three steps for your first ten minutes. Use it normally once, the happy path, as a real person would. Run their own list, every case in their file. Then go off-script, with whatever occurred to you while doing that.</a:t>
             </a:r>
           </a:p>
         </p:txBody>
@@ -974,7 +974,7 @@
           <a:lstStyle/>
           <a:p>
             <a:r>
-              <a:t>Four things no probe will report. An agent tests correctness; a person tests whether it makes sense. Both matter, and only one of them can be automated.</a:t>
+              <a:t>Four things no probe will report back to you: what looks wrong, what nobody wrote down, what feels slow, and which screen is confusing.</a:t>
             </a:r>
           </a:p>
         </p:txBody>
@@ -1044,7 +1044,7 @@
           <a:lstStyle/>
           <a:p>
             <a:r>
-              <a:t>Neither method dominates, which is why the syllabus asks for both. Hands find what does not make sense; agents find what nobody would think to type. Highlight the two cells where each wins outright.</a:t>
+              <a:t>Neither method wins outright. Hands find the confusing interface and are blind to almost nothing about sense; agents miss the interface entirely but find rare inputs, and they do hundreds in the time you do ten.</a:t>
             </a:r>
           </a:p>
         </p:txBody>
@@ -1114,7 +1114,7 @@
           <a:lstStyle/>
           <a:p>
             <a:r>
-              <a:t>Four openers that work on almost anything. The third and fourth exploit state and timing, which are the two areas a two-day prototype has thought about least.</a:t>
+              <a:t>Four openers that work on almost anything. Do the obvious wrong thing first. Give it the opposite of the example. Click before it finishes. And try the same thing twice.</a:t>
             </a:r>
           </a:p>
         </p:txBody>
@@ -1184,7 +1184,7 @@
           <a:lstStyle/>
           <a:p>
             <a:r>
-              <a:t>Have each tester pick one and stay in character for a few minutes. Rotating postures deliberately covers more ground than three people all attacking the same way.</a:t>
+              <a:t>Three postures, and pick one to stay in. The confused user, who does the wrong thing sincerely rather than cleverly. The impatient user, who clicks twice, refreshes, and will not wait. And the bad actor, who reads the page to work out what to abuse.</a:t>
             </a:r>
           </a:p>
         </p:txBody>
@@ -1254,7 +1254,7 @@
           <a:lstStyle/>
           <a:p>
             <a:r>
-              <a:t>The difference between a complaint and a bug report. Left-hand findings cannot be acted on in 3.3, so a tester producing them has spent the hour generously and unhelpfully.</a:t>
+              <a:t>Not useful: “it felt slow”, “the design is rough”, “it broke somehow”. Useful: the exact input used, what came back instead, and how to make it happen again.</a:t>
             </a:r>
           </a:p>
         </p:txBody>
@@ -1324,7 +1324,7 @@
           <a:lstStyle/>
           <a:p>
             <a:r>
-              <a:t>Name the deliverable, and note whose it is. They leave with a written list of their own failures, produced by people with no reason to be gentle. That list is the input to 3.3.</a:t>
+              <a:t>Fifty-five minutes, and you leave holding a written list of your own failures, produced by people with no reason to be gentle.</a:t>
             </a:r>
           </a:p>
         </p:txBody>
@@ -1394,7 +1394,7 @@
           <a:lstStyle/>
           <a:p>
             <a:r>
-              <a:t>Log in the moment, not at the end. Five lines while the failure is on screen beats a reconstruction ten minutes later, and reconstructions are where reproduction steps go wrong.</a:t>
+              <a:t>Log it while the failure is on screen, not at the end. Five lines — what you sent, what you got, the severity, and how to reproduce it.</a:t>
             </a:r>
           </a:p>
         </p:txBody>
@@ -1464,7 +1464,7 @@
           <a:lstStyle/>
           <a:p>
             <a:r>
-              <a:t>Four temptations. The last is the most common — teams find one dramatic failure, feel finished, and hand back a log with a single entry. Keep going until the clock says otherwise.</a:t>
+              <a:t>Four things not to do. Do not fix anything you find. Do not tell them mid- round. Do not test their teammates. And do not stop at the first break — that is the most common one.</a:t>
             </a:r>
           </a:p>
         </p:txBody>
@@ -1534,7 +1534,7 @@
           <a:lstStyle/>
           <a:p>
             <a:r>
-              <a:t>Second objective. A human finds the interesting failures; volume finds the ones nobody would think of. The syllabus point is that volume no longer costs anything.</a:t>
+              <a:t>Second objective: a human finds the interesting failures, and volume finds the ones nobody would think of. Volume no longer costs anything.</a:t>
             </a:r>
           </a:p>
         </p:txBody>
@@ -1604,7 +1604,7 @@
           <a:lstStyle/>
           <a:p>
             <a:r>
-              <a:t>Ask at about the twenty-minute mark. Most teams will have run ten or fifteen inputs by hand. The next twenty minutes should add a hundred, and that is a difference in kind rather than degree.</a:t>
+              <a:t>About twenty minutes in: how many inputs have you actually tried? Most of you will be at ten or fifteen. The next twenty minutes should add a hundred.</a:t>
             </a:r>
           </a:p>
         </p:txBody>
@@ -1674,7 +1674,7 @@
           <a:lstStyle/>
           <a:p>
             <a:r>
-              <a:t>Four reasons. The second is the honest one: a person testing for twenty minutes converges on a handful of patterns, while generated inputs keep wandering into places nobody chose.</a:t>
+              <a:t>Four reasons volume finds more. Rare inputs need many tries. You repeat yourself, and models vary. It pairs combinations you would not. And it never gets bored or polite.</a:t>
             </a:r>
           </a:p>
         </p:txBody>
@@ -1744,7 +1744,7 @@
           <a:lstStyle/>
           <a:p>
             <a:r>
-              <a:t>Introduce it as the enabling detail for this objective. The point is not the specific provider; it is that generating a hundred adversarial inputs is now a free operation rather than a budget decision.</a:t>
+              <a:t>Nvidia's free API is hosted models you can call in bulk at no cost. The point is not the provider — it is that a hundred adversarial inputs is now free rather than a budget decision.</a:t>
             </a:r>
           </a:p>
         </p:txBody>
@@ -1814,7 +1814,7 @@
           <a:lstStyle/>
           <a:p>
             <a:r>
-              <a:t>Five minutes end to end. Step three is where teams go wrong: they ask the model to test the prototype, which produces commentary, rather than to produce inputs, which produces ammunition.</a:t>
+              <a:t>Three steps, five minutes. Get a key, and keep it out of git. Call it like any chat model, since the interface is the familiar one. And ask for inputs rather than answers — you want ammunition, not commentary.</a:t>
             </a:r>
           </a:p>
         </p:txBody>
@@ -1884,7 +1884,7 @@
           <a:lstStyle/>
           <a:p>
             <a:r>
-              <a:t>An OpenAI-compatible interface, so existing code mostly works unchanged. Note the key comes from the environment — a key pasted into a file that gets committed is a real risk on a public repo.</a:t>
+              <a:t>An OpenAI-compatible interface, so existing code mostly works unchanged. Note the key comes from the environment, because a key pasted into a file that gets committed is a real risk on a public repo.</a:t>
             </a:r>
           </a:p>
         </p:txBody>
@@ -1954,7 +1954,7 @@
           <a:lstStyle/>
           <a:p>
             <a:r>
-              <a:t>Three moves in six lines: give it the target, name one axis, demand variety. The last line matters — without it you get a numbered list with commentary you then have to strip.</a:t>
+              <a:t>Three moves in six lines: give it the target, name one axis, and demand variety. That last line — output only the inputs, one per line — saves you stripping commentary afterwards.</a:t>
             </a:r>
           </a:p>
         </p:txBody>
@@ -2024,7 +2024,7 @@
           <a:lstStyle/>
           <a:p>
             <a:r>
-              <a:t>Batching by axis is what produces variety. Asking for a hundred mixed inputs returns eighty of whichever axis the model finds most obvious, usually adversarial.</a:t>
+              <a:t>Batch by axis: twenty empty-ish inputs, twenty malformed, twenty adversarial, twenty out of scope. Asking for a hundred mixed returns eighty of whichever axis it finds most obvious.</a:t>
             </a:r>
           </a:p>
         </p:txBody>
@@ -2094,7 +2094,7 @@
           <a:lstStyle/>
           <a:p>
             <a:r>
-              <a:t>Three syllabus objectives across four moves. The last one is a skill rather than a task, and it is the one people find hardest all week.</a:t>
+              <a:t>Four things this session. We swap builds with another team, break it by hand and then by agent, generate inputs in bulk for free, and trade logs without defending them.</a:t>
             </a:r>
           </a:p>
         </p:txBody>
@@ -2164,7 +2164,7 @@
           <a:lstStyle/>
           <a:p>
             <a:r>
-              <a:t>Four ways a batch looks big and tests one thing. Skim any twenty before running them — if you can summarise the batch in one sentence, ask again with a different framing.</a:t>
+              <a:t>Four ways a batch looks big and tests one thing. They rhyme with each other. They are all broken the same way. They are too polite to be adversarial. Or they are plausible but never weird.</a:t>
             </a:r>
           </a:p>
         </p:txBody>
@@ -2234,7 +2234,7 @@
           <a:lstStyle/>
           <a:p>
             <a:r>
-              <a:t>The five axes from 3.1, now as generation prompts. Twenty per row is a hundred inputs for about five minutes of work and no money, which is the whole point of the objective.</a:t>
+              <a:t>The five axes again, now as generation prompts. Empty: nothing, blank, whitespace. Malformed: wrong type, truncated. Adversarial: hidden instructions. Out of scope: real, but not your job. At scale: huge, repeated, parallel.</a:t>
             </a:r>
           </a:p>
         </p:txBody>
@@ -2304,7 +2304,7 @@
           <a:lstStyle/>
           <a:p>
             <a:r>
-              <a:t>This is the second half of objective one. Step three is not optional — an unattended probe against someone else's live URL is how a red-team round turns into an incident.</a:t>
+              <a:t>Three steps. Point it at their URL — your brief from last session with one line changed. Feed it the generated inputs as a starting list rather than the only one. And let it run while somebody watches, with the stopping rule armed.</a:t>
             </a:r>
           </a:p>
         </p:txBody>
@@ -2374,7 +2374,7 @@
           <a:lstStyle/>
           <a:p>
             <a:r>
-              <a:t>Four courtesies, and they are not merely polite. Two teams sharing one live URL can trivially deny each other the session, and a probe filling their storage with test rows costs them 3.3.</a:t>
+              <a:t>Four courtesies, and they are not merely polite. Tell them the probe is starting. Agree a rate you both accept. Never test during their demo. And do not leave junk they have to clear.</a:t>
             </a:r>
           </a:p>
         </p:txBody>
@@ -2444,7 +2444,7 @@
           <a:lstStyle/>
           <a:p>
             <a:r>
-              <a:t>The second rule saves 3.3. A log of a hundred entries with four real causes is harder to triage than a log of four, and the clustering work belongs to the tester.</a:t>
+              <a:t>Three rules at volume. Do not flood them — space the requests, since you share one URL. Cluster before logging, because forty crashes of one cause is one finding. And read a sample yourself, because a pass rate you never looked at is a guess.</a:t>
             </a:r>
           </a:p>
         </p:txBody>
@@ -2514,7 +2514,7 @@
           <a:lstStyle/>
           <a:p>
             <a:r>
-              <a:t>Four steps turning raw output into a usable log. The third is a courtesy with teeth — re-reporting a documented limitation wastes their triage time and rewards nobody.</a:t>
+              <a:t>Four steps to turn raw output into a usable log. Group by what actually broke. Keep the smallest example of each. Drop what their caveats already admit. Then rank what is left by severity.</a:t>
             </a:r>
           </a:p>
         </p:txBody>
@@ -2584,7 +2584,7 @@
           <a:lstStyle/>
           <a:p>
             <a:r>
-              <a:t>The counterweight to the whole section. Generating a thousand inputs costs nothing and reading a thousand results costs the session, which is why clustering matters more than raw count.</a:t>
+              <a:t>Volume is free, attention is not. Generating a thousand inputs costs nothing; reading a thousand results costs the session.</a:t>
             </a:r>
           </a:p>
         </p:txBody>
@@ -2654,7 +2654,7 @@
           <a:lstStyle/>
           <a:p>
             <a:r>
-              <a:t>Third objective. Everything found in the last forty minutes has to become something another team can act on in fifty minutes, without you sitting next to them.</a:t>
+              <a:t>Third objective: everything you found has to become something another team can act on in fifty minutes, without you sitting next to them.</a:t>
             </a:r>
           </a:p>
         </p:txBody>
@@ -2724,7 +2724,7 @@
           <a:lstStyle/>
           <a:p>
             <a:r>
-              <a:t>Define the bar precisely. Not enough for you to see it again — enough for someone who was not there. If the builder cannot reproduce it, they cannot confirm they fixed it.</a:t>
+              <a:t>Reproduction steps means enough for a stranger to see it themselves — not enough for you to find it again.</a:t>
             </a:r>
           </a:p>
         </p:txBody>
@@ -2794,7 +2794,7 @@
           <a:lstStyle/>
           <a:p>
             <a:r>
-              <a:t>Five fields, no more. Anything longer does not get written under time pressure, and anything shorter is not actionable. This table is the format for the whole round.</a:t>
+              <a:t>Five fields per entry, no more. What you sent. What came back. What should have happened. The severity. And how to reproduce it.</a:t>
             </a:r>
           </a:p>
         </p:txBody>
@@ -2864,7 +2864,7 @@
           <a:lstStyle/>
           <a:p>
             <a:r>
-              <a:t>Pair the teams now, before any explanation. Pairing takes two minutes and every minute after it is testing time. Cross-pair so nobody tests the team testing them, if the numbers allow.</a:t>
+              <a:t>First: whose build will you break? We pair now, and every minute after that is testing time.</a:t>
             </a:r>
           </a:p>
         </p:txBody>
@@ -2934,7 +2934,7 @@
           <a:lstStyle/>
           <a:p>
             <a:r>
-              <a:t>One entry, five lines, in a file rather than a chat message. A file survives the session, can be committed by the receiving team, and is what they will triage against in 3.3.</a:t>
+              <a:t>One entry, five lines, in a file rather than a chat message. A file survives the session and is what they triage against next hour.</a:t>
             </a:r>
           </a:p>
         </p:txBody>
@@ -3004,7 +3004,7 @@
           <a:lstStyle/>
           <a:p>
             <a:r>
-              <a:t>Note that critical is not the most dramatic failure — it is the quietest. Confidently wrong output outranks a crash, because a crash tells the user something is wrong.</a:t>
+              <a:t>Four levels. Critical: wrong output that looks right. High: crashes or hangs on real input. Medium: it fails, but says so. Low: ugly, confusing, slow. Notice critical is the quietest failure, not the loudest.</a:t>
             </a:r>
           </a:p>
         </p:txBody>
@@ -3074,7 +3074,7 @@
           <a:lstStyle/>
           <a:p>
             <a:r>
-              <a:t>Four calibrations. The third is the common error: testers soften severity out of sympathy for the work involved, which pushes the wrong things above 3.3's cut line.</a:t>
+              <a:t>Four calibrations. Severity is about the user. Not how clever your input was. Not how hard it looks to fix. And documented limits drop a level.</a:t>
             </a:r>
           </a:p>
         </p:txBody>
@@ -3144,7 +3144,7 @@
           <a:lstStyle/>
           <a:p>
             <a:r>
-              <a:t>Four ways to hand over an hour of work that cannot be used. Read this before the trade at 10:45 and give teams two minutes to clean up against it.</a:t>
+              <a:t>Four ways to hand over an hour of work that cannot be used: findings with no input attached, forty entries with one real cause, the same severity on everything, and opinions mixed in with failures.</a:t>
             </a:r>
           </a:p>
         </p:txBody>
@@ -3214,7 +3214,7 @@
           <a:lstStyle/>
           <a:p>
             <a:r>
-              <a:t>Three steps, and the third is the discipline. A tester talking through their log turns it into a negotiation, and the builder starts explaining instead of reading.</a:t>
+              <a:t>Three steps. Give them the file — written, not spoken, not a conversation. Say one sentence: the single thing you would fix first. Then stop talking and let them read it.</a:t>
             </a:r>
           </a:p>
         </p:txBody>
@@ -3284,7 +3284,7 @@
           <a:lstStyle/>
           <a:p>
             <a:r>
-              <a:t>The skill the syllabus asks for, stated as a rule you can follow. Not accepting every finding, not agreeing — reading all of it first. Agreement can come later; the reading has to come first.</a:t>
+              <a:t>Receiving it means reading the whole log before you say anything. Not accepting every finding, not agreeing — reading all of it first.</a:t>
             </a:r>
           </a:p>
         </p:txBody>
@@ -3354,7 +3354,7 @@
           <a:lstStyle/>
           <a:p>
             <a:r>
-              <a:t>The left column is what everyone does instinctively, including experienced engineers. Naming it in advance is most of what stops it, which is why this slide exists at all.</a:t>
+              <a:t>Defending sounds like “that is not a real input”, “you used it wrong”, “we know, it is in the caveats”. Receiving is reading all of it first, asking only how to reproduce, writing it down, and moving on.</a:t>
             </a:r>
           </a:p>
         </p:txBody>
@@ -3424,7 +3424,7 @@
           <a:lstStyle/>
           <a:p>
             <a:r>
-              <a:t>One legitimate question during the handover. Everything else is a disagreement, and disagreements about whether a finding counts belong in 3.3's triage, where there is a cut line to settle them.</a:t>
+              <a:t>There is exactly one legitimate question during the handover: how do I reproduce that? Not why they tried it, not whether it counts, not what they misunderstood.</a:t>
             </a:r>
           </a:p>
         </p:txBody>
@@ -3494,7 +3494,7 @@
           <a:lstStyle/>
           <a:p>
             <a:r>
-              <a:t>Four reasons, and the last carries it. Every failure surfaced in this room costs them nothing but pride; the same failure found in a demo costs them the demo.</a:t>
+              <a:t>Four reasons it is worth the discomfort. They had no reason to be kind. They are not going to fix it. The next tester is a judge. And this is the last free round.</a:t>
             </a:r>
           </a:p>
         </p:txBody>
@@ -3564,7 +3564,7 @@
           <a:lstStyle/>
           <a:p>
             <a:r>
-              <a:t>Read at 10:40. The order of sacrifice is the generated volume first, the hand findings last — and severity never, because 3.3 is entirely a severity-against-cost exercise.</a:t>
+              <a:t>If you are behind: trade at 10:45 regardless, because a short log on time beats a full one late. Drop the volume run — the hand findings are the ones worth having. But never skip severity, because an unranked log cannot be triaged.</a:t>
             </a:r>
           </a:p>
         </p:txBody>
@@ -3634,7 +3634,7 @@
           <a:lstStyle/>
           <a:p>
             <a:r>
-              <a:t>The bridge. Last session designed the attack against their own system in the abstract. This one runs it against someone else's, which is both easier and considerably more revealing.</a:t>
+              <a:t>Last session designed the attack in the abstract. This one runs it against real software, which is both easier and considerably more revealing.</a:t>
             </a:r>
           </a:p>
         </p:txBody>
@@ -3704,7 +3704,7 @@
           <a:lstStyle/>
           <a:p>
             <a:r>
-              <a:t>The exit checklist. All four are behavioural rather than technical, which is what makes this session unusual. A team that ticks all four is ready to triage.</a:t>
+              <a:t>You are leaving having broken someone else's build, run hands then volume, handed over a written log, and read your own without arguing.</a:t>
             </a:r>
           </a:p>
         </p:txBody>
@@ -3774,7 +3774,7 @@
           <a:lstStyle/>
           <a:p>
             <a:r>
-              <a:t>Four answers before the break. The second checks the prediction they wrote at the end of 3.1 — being wrong about your own weakest point is the most useful thing to learn today.</a:t>
+              <a:t>Four answers before the break: the worst thing they found, whether you predicted it, how many criticals you have, and what you fix first after lunch.</a:t>
             </a:r>
           </a:p>
         </p:txBody>
@@ -3844,7 +3844,7 @@
           <a:lstStyle/>
           <a:p>
             <a:r>
-              <a:t>Close on this and take two or three answers out loud. The surprises are the real product of the session, and hearing another team's surprise usually sends someone straight to check their own build.</a:t>
+              <a:t>Last question: what did you not expect? The surprises are the real product of this session.</a:t>
             </a:r>
           </a:p>
         </p:txBody>
@@ -3914,7 +3914,7 @@
           <a:lstStyle/>
           <a:p>
             <a:r>
-              <a:t>Set up 3.3, the last session of the week. Make the second line land: the cut line means deciding what they will not fix, which is harder than fixing and more useful.</a:t>
+              <a:t>Next session we triage by severity against cost, commit to a cut line out loud, fix and re-run the exact test that caught each one, and schedule checks that outlive you.</a:t>
             </a:r>
           </a:p>
         </p:txBody>
@@ -3984,7 +3984,7 @@
           <a:lstStyle/>
           <a:p>
             <a:r>
-              <a:t>The shape of the hour. The order matters — hands before agent. Ten minutes of a curious human finds the things an agent will not think to try.</a:t>
+              <a:t>Four moves: swap URLs, caveats and edge cases; ten minutes of your own hands; turn the agent loose; then trade logs back with no arguing. Hands before agent — that order matters.</a:t>
             </a:r>
           </a:p>
         </p:txBody>
@@ -4054,7 +4054,7 @@
           <a:lstStyle/>
           <a:p>
             <a:r>
-              <a:t>The gate is 10:45. Whatever state the testing is in, logs change hands then — an unshared finding helps nobody, and 3.3 needs the full ten minutes to triage.</a:t>
+              <a:t>The hour runs in four blocks, and 10:45 is the one that matters — logs change hands then, whatever state your testing is in. An unshared finding helps nobody, and the next session needs its full ten minutes.</a:t>
             </a:r>
           </a:p>
         </p:txBody>
@@ -4124,7 +4124,7 @@
           <a:lstStyle/>
           <a:p>
             <a:r>
-              <a:t>Say this before the swap and mean it. Everything found in the next hour is found by someone with no stake in being kind and no ability to hurt them. There is no cheaper place to be wrong.</a:t>
+              <a:t>A friend who breaks it is a gift. Everything found in the next hour is found by someone with no stake in being kind and no ability to hurt you.</a:t>
             </a:r>
           </a:p>
         </p:txBody>
@@ -4194,7 +4194,7 @@
           <a:lstStyle/>
           <a:p>
             <a:r>
-              <a:t>First objective, first half. Before any automation, one person clicking with intent. This is the highest-yield ten minutes of the session and teams are always surprised by that.</a:t>
+              <a:t>First objective, first half: before any automation, one person clicking with intent.</a:t>
             </a:r>
           </a:p>
         </p:txBody>

--- a/examples/pptx/immersion-3-2-peer-red-team.pptx
+++ b/examples/pptx/immersion-3-2-peer-red-team.pptx
@@ -5682,7 +5682,7 @@
             <a:r>
               <a:rPr sz="3400" b="1" i="0">
                 <a:solidFill>
-                  <a:srgbClr val="123A6B"/>
+                  <a:srgbClr val="0072CE"/>
                 </a:solidFill>
                 <a:latin typeface="Arial"/>
               </a:rPr>
@@ -5719,7 +5719,7 @@
             <a:r>
               <a:rPr sz="3400" b="1" i="0">
                 <a:solidFill>
-                  <a:srgbClr val="123A6B"/>
+                  <a:srgbClr val="0072CE"/>
                 </a:solidFill>
                 <a:latin typeface="Arial"/>
               </a:rPr>
@@ -6611,6 +6611,43 @@
         <p:spPr>
           <a:xfrm>
             <a:off x="6233160" y="1499616"/>
+            <a:ext cx="5958840" cy="609600"/>
+          </a:xfrm>
+          <a:prstGeom prst="rect">
+            <a:avLst/>
+          </a:prstGeom>
+          <a:noFill/>
+        </p:spPr>
+        <p:txBody>
+          <a:bodyPr wrap="none" lIns="0" rIns="0">
+            <a:noAutofit/>
+          </a:bodyPr>
+          <a:lstStyle/>
+          <a:p>
+            <a:pPr algn="l"/>
+            <a:r>
+              <a:rPr sz="3400" b="0" i="0">
+                <a:solidFill>
+                  <a:srgbClr val="0A2240"/>
+                </a:solidFill>
+                <a:latin typeface="Arial"/>
+              </a:rPr>
+              <a:t>Built with customers.</a:t>
+            </a:r>
+          </a:p>
+        </p:txBody>
+      </p:sp>
+      <p:sp>
+        <p:nvSpPr>
+          <p:cNvPr id="7" name="TextBox 6"/>
+          <p:cNvSpPr/>
+          <p:nvPr>
+            <p:ph type="body" idx="2"/>
+          </p:nvPr>
+        </p:nvSpPr>
+        <p:spPr>
+          <a:xfrm>
+            <a:off x="6233160" y="2383536"/>
             <a:ext cx="5501640" cy="1127760"/>
           </a:xfrm>
           <a:prstGeom prst="rect">
@@ -6632,44 +6669,7 @@
                 </a:solidFill>
                 <a:latin typeface="Arial"/>
               </a:rPr>
-              <a:t>Built with customers, not just for them.</a:t>
-            </a:r>
-          </a:p>
-        </p:txBody>
-      </p:sp>
-      <p:sp>
-        <p:nvSpPr>
-          <p:cNvPr id="7" name="TextBox 6"/>
-          <p:cNvSpPr/>
-          <p:nvPr>
-            <p:ph type="body" idx="2"/>
-          </p:nvPr>
-        </p:nvSpPr>
-        <p:spPr>
-          <a:xfrm>
-            <a:off x="6233160" y="2901696"/>
-            <a:ext cx="5501640" cy="1127760"/>
-          </a:xfrm>
-          <a:prstGeom prst="rect">
-            <a:avLst/>
-          </a:prstGeom>
-          <a:noFill/>
-        </p:spPr>
-        <p:txBody>
-          <a:bodyPr wrap="square" lIns="0" rIns="0">
-            <a:noAutofit/>
-          </a:bodyPr>
-          <a:lstStyle/>
-          <a:p>
-            <a:pPr algn="l"/>
-            <a:r>
-              <a:rPr sz="3400" b="0" i="0">
-                <a:solidFill>
-                  <a:srgbClr val="0A2240"/>
-                </a:solidFill>
-                <a:latin typeface="Arial"/>
-              </a:rPr>
-              <a:t>60% faster rollout; 50% fewer tickets.</a:t>
+              <a:t>60% faster; 50% fewer tickets</a:t>
             </a:r>
           </a:p>
         </p:txBody>
@@ -6688,405 +6688,6 @@
 </file>
 
 <file path=ppt/slideLayouts/slideLayout18.xml><?xml version="1.0" encoding="utf-8"?>
-<p:sldLayout xmlns:a="http://schemas.openxmlformats.org/drawingml/2006/main" xmlns:r="http://schemas.openxmlformats.org/officeDocument/2006/relationships" xmlns:p="http://schemas.openxmlformats.org/presentationml/2006/main" type="blank" preserve="1">
-  <p:cSld name="slidekit · Card Grid">
-    <p:bg>
-      <p:bgPr>
-        <a:solidFill>
-          <a:srgbClr val="FFFFFF"/>
-        </a:solidFill>
-        <a:effectLst/>
-      </p:bgPr>
-    </p:bg>
-    <p:spTree>
-      <p:nvGrpSpPr>
-        <p:cNvPr id="1" name=""/>
-        <p:cNvGrpSpPr/>
-        <p:nvPr/>
-      </p:nvGrpSpPr>
-      <p:grpSpPr>
-        <a:xfrm>
-          <a:off x="0" y="0"/>
-          <a:ext cx="0" cy="0"/>
-          <a:chOff x="0" y="0"/>
-          <a:chExt cx="0" cy="0"/>
-        </a:xfrm>
-      </p:grpSpPr>
-      <p:sp>
-        <p:nvSpPr>
-          <p:cNvPr id="4" name="Slide Number Placeholder 3"/>
-          <p:cNvSpPr>
-            <a:spLocks noGrp="1"/>
-          </p:cNvSpPr>
-          <p:nvPr>
-            <p:ph type="sldNum" sz="quarter" idx="12"/>
-          </p:nvPr>
-        </p:nvSpPr>
-        <p:spPr>
-          <a:xfrm>
-            <a:off x="11186160" y="6035040"/>
-            <a:ext cx="548640" cy="365760"/>
-          </a:xfrm>
-        </p:spPr>
-        <p:txBody>
-          <a:bodyPr/>
-          <a:lstStyle/>
-          <a:p>
-            <a:fld id="{C1FF6DA9-008F-8B48-92A6-B652298478BF}" type="slidenum">
-              <a:rPr lang="en-US" smtClean="0"/>
-              <a:t>‹#›</a:t>
-            </a:fld>
-            <a:endParaRPr lang="en-US"/>
-          </a:p>
-        </p:txBody>
-      </p:sp>
-      <p:sp>
-        <p:nvSpPr>
-          <p:cNvPr id="5" name="TextBox 4"/>
-          <p:cNvSpPr/>
-          <p:nvPr>
-            <p:ph type="title"/>
-          </p:nvPr>
-        </p:nvSpPr>
-        <p:spPr>
-          <a:xfrm>
-            <a:off x="457200" y="457200"/>
-            <a:ext cx="11277600" cy="768096"/>
-          </a:xfrm>
-          <a:prstGeom prst="rect">
-            <a:avLst/>
-          </a:prstGeom>
-          <a:noFill/>
-        </p:spPr>
-        <p:txBody>
-          <a:bodyPr wrap="none" lIns="0" rIns="0">
-            <a:noAutofit/>
-          </a:bodyPr>
-          <a:lstStyle/>
-          <a:p>
-            <a:pPr algn="l"/>
-            <a:r>
-              <a:rPr sz="4200" b="1" i="0">
-                <a:solidFill>
-                  <a:srgbClr val="0072CE"/>
-                </a:solidFill>
-                <a:latin typeface="Arial"/>
-              </a:rPr>
-              <a:t>What We Offer</a:t>
-            </a:r>
-          </a:p>
-        </p:txBody>
-      </p:sp>
-      <p:sp>
-        <p:nvSpPr>
-          <p:cNvPr id="6" name="TextBox 5"/>
-          <p:cNvSpPr/>
-          <p:nvPr>
-            <p:ph type="body" idx="1"/>
-          </p:nvPr>
-        </p:nvSpPr>
-        <p:spPr>
-          <a:xfrm>
-            <a:off x="457200" y="1499616"/>
-            <a:ext cx="2831366" cy="518159"/>
-          </a:xfrm>
-          <a:prstGeom prst="rect">
-            <a:avLst/>
-          </a:prstGeom>
-          <a:noFill/>
-        </p:spPr>
-        <p:txBody>
-          <a:bodyPr wrap="none" lIns="0" rIns="0">
-            <a:noAutofit/>
-          </a:bodyPr>
-          <a:lstStyle/>
-          <a:p>
-            <a:pPr algn="l"/>
-            <a:r>
-              <a:rPr sz="3400" b="1" i="0">
-                <a:solidFill>
-                  <a:srgbClr val="0A2240"/>
-                </a:solidFill>
-                <a:latin typeface="Arial"/>
-              </a:rPr>
-              <a:t>Insights</a:t>
-            </a:r>
-          </a:p>
-        </p:txBody>
-      </p:sp>
-      <p:sp>
-        <p:nvSpPr>
-          <p:cNvPr id="7" name="TextBox 6"/>
-          <p:cNvSpPr/>
-          <p:nvPr>
-            <p:ph type="body" idx="2"/>
-          </p:nvPr>
-        </p:nvSpPr>
-        <p:spPr>
-          <a:xfrm>
-            <a:off x="457200" y="2154935"/>
-            <a:ext cx="2613660" cy="3605785"/>
-          </a:xfrm>
-          <a:prstGeom prst="rect">
-            <a:avLst/>
-          </a:prstGeom>
-          <a:noFill/>
-        </p:spPr>
-        <p:txBody>
-          <a:bodyPr wrap="square" lIns="0" rIns="0">
-            <a:noAutofit/>
-          </a:bodyPr>
-          <a:lstStyle/>
-          <a:p>
-            <a:pPr algn="l"/>
-            <a:r>
-              <a:rPr sz="3400" b="0" i="0">
-                <a:solidFill>
-                  <a:srgbClr val="0A2240"/>
-                </a:solidFill>
-                <a:latin typeface="Arial"/>
-              </a:rPr>
-              <a:t>Live data and AI analytics.</a:t>
-            </a:r>
-          </a:p>
-        </p:txBody>
-      </p:sp>
-      <p:sp>
-        <p:nvSpPr>
-          <p:cNvPr id="8" name="TextBox 7"/>
-          <p:cNvSpPr/>
-          <p:nvPr>
-            <p:ph type="body" idx="3"/>
-          </p:nvPr>
-        </p:nvSpPr>
-        <p:spPr>
-          <a:xfrm>
-            <a:off x="3345180" y="1499616"/>
-            <a:ext cx="2909292" cy="518159"/>
-          </a:xfrm>
-          <a:prstGeom prst="rect">
-            <a:avLst/>
-          </a:prstGeom>
-          <a:noFill/>
-        </p:spPr>
-        <p:txBody>
-          <a:bodyPr wrap="none" lIns="0" rIns="0">
-            <a:noAutofit/>
-          </a:bodyPr>
-          <a:lstStyle/>
-          <a:p>
-            <a:pPr algn="l"/>
-            <a:r>
-              <a:rPr sz="3400" b="1" i="0">
-                <a:solidFill>
-                  <a:srgbClr val="0A2240"/>
-                </a:solidFill>
-                <a:latin typeface="Arial"/>
-              </a:rPr>
-              <a:t>Security</a:t>
-            </a:r>
-          </a:p>
-        </p:txBody>
-      </p:sp>
-      <p:sp>
-        <p:nvSpPr>
-          <p:cNvPr id="9" name="TextBox 8"/>
-          <p:cNvSpPr/>
-          <p:nvPr>
-            <p:ph type="body" idx="4"/>
-          </p:nvPr>
-        </p:nvSpPr>
-        <p:spPr>
-          <a:xfrm>
-            <a:off x="3345180" y="2154935"/>
-            <a:ext cx="2613660" cy="3605785"/>
-          </a:xfrm>
-          <a:prstGeom prst="rect">
-            <a:avLst/>
-          </a:prstGeom>
-          <a:noFill/>
-        </p:spPr>
-        <p:txBody>
-          <a:bodyPr wrap="square" lIns="0" rIns="0">
-            <a:noAutofit/>
-          </a:bodyPr>
-          <a:lstStyle/>
-          <a:p>
-            <a:pPr algn="l"/>
-            <a:r>
-              <a:rPr sz="3400" b="0" i="0">
-                <a:solidFill>
-                  <a:srgbClr val="0A2240"/>
-                </a:solidFill>
-                <a:latin typeface="Arial"/>
-              </a:rPr>
-              <a:t>Zero-trust, SOC 2 ready.</a:t>
-            </a:r>
-          </a:p>
-        </p:txBody>
-      </p:sp>
-      <p:sp>
-        <p:nvSpPr>
-          <p:cNvPr id="10" name="TextBox 9"/>
-          <p:cNvSpPr/>
-          <p:nvPr>
-            <p:ph type="body" idx="5"/>
-          </p:nvPr>
-        </p:nvSpPr>
-        <p:spPr>
-          <a:xfrm>
-            <a:off x="6233160" y="1499616"/>
-            <a:ext cx="2613660" cy="518159"/>
-          </a:xfrm>
-          <a:prstGeom prst="rect">
-            <a:avLst/>
-          </a:prstGeom>
-          <a:noFill/>
-        </p:spPr>
-        <p:txBody>
-          <a:bodyPr wrap="none" lIns="0" rIns="0">
-            <a:noAutofit/>
-          </a:bodyPr>
-          <a:lstStyle/>
-          <a:p>
-            <a:pPr algn="l"/>
-            <a:r>
-              <a:rPr sz="3400" b="1" i="0">
-                <a:solidFill>
-                  <a:srgbClr val="0A2240"/>
-                </a:solidFill>
-                <a:latin typeface="Arial"/>
-              </a:rPr>
-              <a:t>Speed</a:t>
-            </a:r>
-          </a:p>
-        </p:txBody>
-      </p:sp>
-      <p:sp>
-        <p:nvSpPr>
-          <p:cNvPr id="11" name="TextBox 10"/>
-          <p:cNvSpPr/>
-          <p:nvPr>
-            <p:ph type="body" idx="6"/>
-          </p:nvPr>
-        </p:nvSpPr>
-        <p:spPr>
-          <a:xfrm>
-            <a:off x="6233160" y="2154935"/>
-            <a:ext cx="2613660" cy="3605785"/>
-          </a:xfrm>
-          <a:prstGeom prst="rect">
-            <a:avLst/>
-          </a:prstGeom>
-          <a:noFill/>
-        </p:spPr>
-        <p:txBody>
-          <a:bodyPr wrap="square" lIns="0" rIns="0">
-            <a:noAutofit/>
-          </a:bodyPr>
-          <a:lstStyle/>
-          <a:p>
-            <a:pPr algn="l"/>
-            <a:r>
-              <a:rPr sz="3400" b="0" i="0">
-                <a:solidFill>
-                  <a:srgbClr val="0A2240"/>
-                </a:solidFill>
-                <a:latin typeface="Arial"/>
-              </a:rPr>
-              <a:t>Sub-100ms p99 latency.</a:t>
-            </a:r>
-          </a:p>
-        </p:txBody>
-      </p:sp>
-      <p:sp>
-        <p:nvSpPr>
-          <p:cNvPr id="12" name="TextBox 11"/>
-          <p:cNvSpPr/>
-          <p:nvPr>
-            <p:ph type="body" idx="7"/>
-          </p:nvPr>
-        </p:nvSpPr>
-        <p:spPr>
-          <a:xfrm>
-            <a:off x="9121140" y="1499616"/>
-            <a:ext cx="2613660" cy="518159"/>
-          </a:xfrm>
-          <a:prstGeom prst="rect">
-            <a:avLst/>
-          </a:prstGeom>
-          <a:noFill/>
-        </p:spPr>
-        <p:txBody>
-          <a:bodyPr wrap="none" lIns="0" rIns="0">
-            <a:noAutofit/>
-          </a:bodyPr>
-          <a:lstStyle/>
-          <a:p>
-            <a:pPr algn="l"/>
-            <a:r>
-              <a:rPr sz="3400" b="1" i="0">
-                <a:solidFill>
-                  <a:srgbClr val="0A2240"/>
-                </a:solidFill>
-                <a:latin typeface="Arial"/>
-              </a:rPr>
-              <a:t>APIs</a:t>
-            </a:r>
-          </a:p>
-        </p:txBody>
-      </p:sp>
-      <p:sp>
-        <p:nvSpPr>
-          <p:cNvPr id="13" name="TextBox 12"/>
-          <p:cNvSpPr/>
-          <p:nvPr>
-            <p:ph type="body" idx="8"/>
-          </p:nvPr>
-        </p:nvSpPr>
-        <p:spPr>
-          <a:xfrm>
-            <a:off x="9121140" y="2154935"/>
-            <a:ext cx="2613660" cy="3605785"/>
-          </a:xfrm>
-          <a:prstGeom prst="rect">
-            <a:avLst/>
-          </a:prstGeom>
-          <a:noFill/>
-        </p:spPr>
-        <p:txBody>
-          <a:bodyPr wrap="square" lIns="0" rIns="0">
-            <a:noAutofit/>
-          </a:bodyPr>
-          <a:lstStyle/>
-          <a:p>
-            <a:pPr algn="l"/>
-            <a:r>
-              <a:rPr sz="3400" b="0" i="0">
-                <a:solidFill>
-                  <a:srgbClr val="0A2240"/>
-                </a:solidFill>
-                <a:latin typeface="Arial"/>
-              </a:rPr>
-              <a:t>300+ open connectors.</a:t>
-            </a:r>
-          </a:p>
-        </p:txBody>
-      </p:sp>
-    </p:spTree>
-    <p:extLst>
-      <p:ext uri="{BB962C8B-B14F-4D97-AF65-F5344CB8AC3E}">
-        <p14:creationId xmlns:p14="http://schemas.microsoft.com/office/powerpoint/2010/main" val="1212999818"/>
-      </p:ext>
-    </p:extLst>
-  </p:cSld>
-  <p:clrMapOvr>
-    <a:masterClrMapping/>
-  </p:clrMapOvr>
-</p:sldLayout>
-</file>
-
-<file path=ppt/slideLayouts/slideLayout19.xml><?xml version="1.0" encoding="utf-8"?>
 <p:sldLayout xmlns:a="http://schemas.openxmlformats.org/drawingml/2006/main" xmlns:r="http://schemas.openxmlformats.org/officeDocument/2006/relationships" xmlns:p="http://schemas.openxmlformats.org/presentationml/2006/main" type="blank" preserve="1">
   <p:cSld name="slidekit · Section Divider">
     <p:bg>
@@ -7241,6 +6842,511 @@
                 <a:latin typeface="Arial"/>
               </a:rPr>
               <a:t>Where We Stand Today</a:t>
+            </a:r>
+          </a:p>
+        </p:txBody>
+      </p:sp>
+    </p:spTree>
+    <p:extLst>
+      <p:ext uri="{BB962C8B-B14F-4D97-AF65-F5344CB8AC3E}">
+        <p14:creationId xmlns:p14="http://schemas.microsoft.com/office/powerpoint/2010/main" val="1212999818"/>
+      </p:ext>
+    </p:extLst>
+  </p:cSld>
+  <p:clrMapOvr>
+    <a:masterClrMapping/>
+  </p:clrMapOvr>
+</p:sldLayout>
+</file>
+
+<file path=ppt/slideLayouts/slideLayout19.xml><?xml version="1.0" encoding="utf-8"?>
+<p:sldLayout xmlns:a="http://schemas.openxmlformats.org/drawingml/2006/main" xmlns:r="http://schemas.openxmlformats.org/officeDocument/2006/relationships" xmlns:p="http://schemas.openxmlformats.org/presentationml/2006/main" type="blank" preserve="1">
+  <p:cSld name="slidekit · Agenda">
+    <p:bg>
+      <p:bgPr>
+        <a:solidFill>
+          <a:srgbClr val="FFFFFF"/>
+        </a:solidFill>
+        <a:effectLst/>
+      </p:bgPr>
+    </p:bg>
+    <p:spTree>
+      <p:nvGrpSpPr>
+        <p:cNvPr id="1" name=""/>
+        <p:cNvGrpSpPr/>
+        <p:nvPr/>
+      </p:nvGrpSpPr>
+      <p:grpSpPr>
+        <a:xfrm>
+          <a:off x="0" y="0"/>
+          <a:ext cx="0" cy="0"/>
+          <a:chOff x="0" y="0"/>
+          <a:chExt cx="0" cy="0"/>
+        </a:xfrm>
+      </p:grpSpPr>
+      <p:sp>
+        <p:nvSpPr>
+          <p:cNvPr id="4" name="Slide Number Placeholder 3"/>
+          <p:cNvSpPr>
+            <a:spLocks noGrp="1"/>
+          </p:cNvSpPr>
+          <p:nvPr>
+            <p:ph type="sldNum" sz="quarter" idx="12"/>
+          </p:nvPr>
+        </p:nvSpPr>
+        <p:spPr>
+          <a:xfrm>
+            <a:off x="11186160" y="6035040"/>
+            <a:ext cx="548640" cy="365760"/>
+          </a:xfrm>
+        </p:spPr>
+        <p:txBody>
+          <a:bodyPr/>
+          <a:lstStyle/>
+          <a:p>
+            <a:fld id="{C1FF6DA9-008F-8B48-92A6-B652298478BF}" type="slidenum">
+              <a:rPr lang="en-US" smtClean="0"/>
+              <a:t>‹#›</a:t>
+            </a:fld>
+            <a:endParaRPr lang="en-US"/>
+          </a:p>
+        </p:txBody>
+      </p:sp>
+      <p:sp>
+        <p:nvSpPr>
+          <p:cNvPr id="5" name="TextBox 4"/>
+          <p:cNvSpPr/>
+          <p:nvPr>
+            <p:ph type="title"/>
+          </p:nvPr>
+        </p:nvSpPr>
+        <p:spPr>
+          <a:xfrm>
+            <a:off x="457200" y="457200"/>
+            <a:ext cx="11277600" cy="768096"/>
+          </a:xfrm>
+          <a:prstGeom prst="rect">
+            <a:avLst/>
+          </a:prstGeom>
+          <a:noFill/>
+        </p:spPr>
+        <p:txBody>
+          <a:bodyPr wrap="none" lIns="0" rIns="0">
+            <a:noAutofit/>
+          </a:bodyPr>
+          <a:lstStyle/>
+          <a:p>
+            <a:pPr algn="l"/>
+            <a:r>
+              <a:rPr sz="4200" b="1" i="0">
+                <a:solidFill>
+                  <a:srgbClr val="0072CE"/>
+                </a:solidFill>
+                <a:latin typeface="Arial"/>
+              </a:rPr>
+              <a:t>What We Will Cover</a:t>
+            </a:r>
+          </a:p>
+        </p:txBody>
+      </p:sp>
+      <p:sp>
+        <p:nvSpPr>
+          <p:cNvPr id="6" name="Rectangle 5"/>
+          <p:cNvSpPr/>
+          <p:nvPr>
+            <p:ph type="body" idx="1"/>
+          </p:nvPr>
+        </p:nvSpPr>
+        <p:spPr>
+          <a:xfrm>
+            <a:off x="457200" y="1280160"/>
+            <a:ext cx="11277600" cy="64008"/>
+          </a:xfrm>
+          <a:prstGeom prst="rect">
+            <a:avLst/>
+          </a:prstGeom>
+          <a:solidFill>
+            <a:srgbClr val="0072CE"/>
+          </a:solidFill>
+          <a:ln>
+            <a:noFill/>
+          </a:ln>
+          <a:effectLst/>
+        </p:spPr>
+        <p:txBody>
+          <a:bodyPr rtlCol="0" anchor="ctr"/>
+          <a:lstStyle/>
+          <a:p>
+            <a:pPr algn="ctr"/>
+          </a:p>
+        </p:txBody>
+      </p:sp>
+      <p:sp>
+        <p:nvSpPr>
+          <p:cNvPr id="7" name="TextBox 6"/>
+          <p:cNvSpPr/>
+          <p:nvPr>
+            <p:ph type="body" idx="2"/>
+          </p:nvPr>
+        </p:nvSpPr>
+        <p:spPr>
+          <a:xfrm>
+            <a:off x="457200" y="1618488"/>
+            <a:ext cx="951348" cy="518159"/>
+          </a:xfrm>
+          <a:prstGeom prst="rect">
+            <a:avLst/>
+          </a:prstGeom>
+          <a:noFill/>
+        </p:spPr>
+        <p:txBody>
+          <a:bodyPr wrap="none" lIns="0" rIns="0">
+            <a:noAutofit/>
+          </a:bodyPr>
+          <a:lstStyle/>
+          <a:p>
+            <a:pPr algn="l"/>
+            <a:r>
+              <a:rPr sz="3400" b="1" i="0">
+                <a:solidFill>
+                  <a:srgbClr val="0072CE"/>
+                </a:solidFill>
+                <a:latin typeface="Arial"/>
+              </a:rPr>
+              <a:t>01</a:t>
+            </a:r>
+          </a:p>
+        </p:txBody>
+      </p:sp>
+      <p:sp>
+        <p:nvSpPr>
+          <p:cNvPr id="8" name="TextBox 7"/>
+          <p:cNvSpPr/>
+          <p:nvPr>
+            <p:ph type="body" idx="3"/>
+          </p:nvPr>
+        </p:nvSpPr>
+        <p:spPr>
+          <a:xfrm>
+            <a:off x="1371600" y="1618488"/>
+            <a:ext cx="10363200" cy="518159"/>
+          </a:xfrm>
+          <a:prstGeom prst="rect">
+            <a:avLst/>
+          </a:prstGeom>
+          <a:noFill/>
+        </p:spPr>
+        <p:txBody>
+          <a:bodyPr wrap="none" lIns="0" rIns="0">
+            <a:noAutofit/>
+          </a:bodyPr>
+          <a:lstStyle/>
+          <a:p>
+            <a:pPr algn="l"/>
+            <a:r>
+              <a:rPr sz="3400" b="0" i="0">
+                <a:solidFill>
+                  <a:srgbClr val="0A2240"/>
+                </a:solidFill>
+                <a:latin typeface="Arial"/>
+              </a:rPr>
+              <a:t>Performance against targets</a:t>
+            </a:r>
+          </a:p>
+        </p:txBody>
+      </p:sp>
+      <p:sp>
+        <p:nvSpPr>
+          <p:cNvPr id="9" name="TextBox 8"/>
+          <p:cNvSpPr/>
+          <p:nvPr>
+            <p:ph type="body" idx="4"/>
+          </p:nvPr>
+        </p:nvSpPr>
+        <p:spPr>
+          <a:xfrm>
+            <a:off x="457200" y="2501798"/>
+            <a:ext cx="951348" cy="518159"/>
+          </a:xfrm>
+          <a:prstGeom prst="rect">
+            <a:avLst/>
+          </a:prstGeom>
+          <a:noFill/>
+        </p:spPr>
+        <p:txBody>
+          <a:bodyPr wrap="none" lIns="0" rIns="0">
+            <a:noAutofit/>
+          </a:bodyPr>
+          <a:lstStyle/>
+          <a:p>
+            <a:pPr algn="l"/>
+            <a:r>
+              <a:rPr sz="3400" b="1" i="0">
+                <a:solidFill>
+                  <a:srgbClr val="0072CE"/>
+                </a:solidFill>
+                <a:latin typeface="Arial"/>
+              </a:rPr>
+              <a:t>02</a:t>
+            </a:r>
+          </a:p>
+        </p:txBody>
+      </p:sp>
+      <p:sp>
+        <p:nvSpPr>
+          <p:cNvPr id="10" name="TextBox 9"/>
+          <p:cNvSpPr/>
+          <p:nvPr>
+            <p:ph type="body" idx="5"/>
+          </p:nvPr>
+        </p:nvSpPr>
+        <p:spPr>
+          <a:xfrm>
+            <a:off x="1371600" y="2501798"/>
+            <a:ext cx="10363200" cy="518159"/>
+          </a:xfrm>
+          <a:prstGeom prst="rect">
+            <a:avLst/>
+          </a:prstGeom>
+          <a:noFill/>
+        </p:spPr>
+        <p:txBody>
+          <a:bodyPr wrap="none" lIns="0" rIns="0">
+            <a:noAutofit/>
+          </a:bodyPr>
+          <a:lstStyle/>
+          <a:p>
+            <a:pPr algn="l"/>
+            <a:r>
+              <a:rPr sz="3400" b="0" i="0">
+                <a:solidFill>
+                  <a:srgbClr val="0A2240"/>
+                </a:solidFill>
+                <a:latin typeface="Arial"/>
+              </a:rPr>
+              <a:t>Customer and market signals</a:t>
+            </a:r>
+          </a:p>
+        </p:txBody>
+      </p:sp>
+      <p:sp>
+        <p:nvSpPr>
+          <p:cNvPr id="11" name="TextBox 10"/>
+          <p:cNvSpPr/>
+          <p:nvPr>
+            <p:ph type="body" idx="6"/>
+          </p:nvPr>
+        </p:nvSpPr>
+        <p:spPr>
+          <a:xfrm>
+            <a:off x="457200" y="3385108"/>
+            <a:ext cx="951348" cy="518159"/>
+          </a:xfrm>
+          <a:prstGeom prst="rect">
+            <a:avLst/>
+          </a:prstGeom>
+          <a:noFill/>
+        </p:spPr>
+        <p:txBody>
+          <a:bodyPr wrap="none" lIns="0" rIns="0">
+            <a:noAutofit/>
+          </a:bodyPr>
+          <a:lstStyle/>
+          <a:p>
+            <a:pPr algn="l"/>
+            <a:r>
+              <a:rPr sz="3400" b="1" i="0">
+                <a:solidFill>
+                  <a:srgbClr val="0072CE"/>
+                </a:solidFill>
+                <a:latin typeface="Arial"/>
+              </a:rPr>
+              <a:t>03</a:t>
+            </a:r>
+          </a:p>
+        </p:txBody>
+      </p:sp>
+      <p:sp>
+        <p:nvSpPr>
+          <p:cNvPr id="12" name="TextBox 11"/>
+          <p:cNvSpPr/>
+          <p:nvPr>
+            <p:ph type="body" idx="7"/>
+          </p:nvPr>
+        </p:nvSpPr>
+        <p:spPr>
+          <a:xfrm>
+            <a:off x="1371600" y="3385108"/>
+            <a:ext cx="10363200" cy="518159"/>
+          </a:xfrm>
+          <a:prstGeom prst="rect">
+            <a:avLst/>
+          </a:prstGeom>
+          <a:noFill/>
+        </p:spPr>
+        <p:txBody>
+          <a:bodyPr wrap="none" lIns="0" rIns="0">
+            <a:noAutofit/>
+          </a:bodyPr>
+          <a:lstStyle/>
+          <a:p>
+            <a:pPr algn="l"/>
+            <a:r>
+              <a:rPr sz="3400" b="0" i="0">
+                <a:solidFill>
+                  <a:srgbClr val="0A2240"/>
+                </a:solidFill>
+                <a:latin typeface="Arial"/>
+              </a:rPr>
+              <a:t>Operational health and risks</a:t>
+            </a:r>
+          </a:p>
+        </p:txBody>
+      </p:sp>
+      <p:sp>
+        <p:nvSpPr>
+          <p:cNvPr id="13" name="TextBox 12"/>
+          <p:cNvSpPr/>
+          <p:nvPr>
+            <p:ph type="body" idx="8"/>
+          </p:nvPr>
+        </p:nvSpPr>
+        <p:spPr>
+          <a:xfrm>
+            <a:off x="457200" y="4268418"/>
+            <a:ext cx="951348" cy="518159"/>
+          </a:xfrm>
+          <a:prstGeom prst="rect">
+            <a:avLst/>
+          </a:prstGeom>
+          <a:noFill/>
+        </p:spPr>
+        <p:txBody>
+          <a:bodyPr wrap="none" lIns="0" rIns="0">
+            <a:noAutofit/>
+          </a:bodyPr>
+          <a:lstStyle/>
+          <a:p>
+            <a:pPr algn="l"/>
+            <a:r>
+              <a:rPr sz="3400" b="1" i="0">
+                <a:solidFill>
+                  <a:srgbClr val="0072CE"/>
+                </a:solidFill>
+                <a:latin typeface="Arial"/>
+              </a:rPr>
+              <a:t>04</a:t>
+            </a:r>
+          </a:p>
+        </p:txBody>
+      </p:sp>
+      <p:sp>
+        <p:nvSpPr>
+          <p:cNvPr id="14" name="TextBox 13"/>
+          <p:cNvSpPr/>
+          <p:nvPr>
+            <p:ph type="body" idx="9"/>
+          </p:nvPr>
+        </p:nvSpPr>
+        <p:spPr>
+          <a:xfrm>
+            <a:off x="1371600" y="4268418"/>
+            <a:ext cx="10363200" cy="518159"/>
+          </a:xfrm>
+          <a:prstGeom prst="rect">
+            <a:avLst/>
+          </a:prstGeom>
+          <a:noFill/>
+        </p:spPr>
+        <p:txBody>
+          <a:bodyPr wrap="none" lIns="0" rIns="0">
+            <a:noAutofit/>
+          </a:bodyPr>
+          <a:lstStyle/>
+          <a:p>
+            <a:pPr algn="l"/>
+            <a:r>
+              <a:rPr sz="3400" b="0" i="0">
+                <a:solidFill>
+                  <a:srgbClr val="0A2240"/>
+                </a:solidFill>
+                <a:latin typeface="Arial"/>
+              </a:rPr>
+              <a:t>Roadmap for next quarter</a:t>
+            </a:r>
+          </a:p>
+        </p:txBody>
+      </p:sp>
+      <p:sp>
+        <p:nvSpPr>
+          <p:cNvPr id="15" name="TextBox 14"/>
+          <p:cNvSpPr/>
+          <p:nvPr>
+            <p:ph type="body" idx="13"/>
+          </p:nvPr>
+        </p:nvSpPr>
+        <p:spPr>
+          <a:xfrm>
+            <a:off x="457200" y="5151728"/>
+            <a:ext cx="951348" cy="518159"/>
+          </a:xfrm>
+          <a:prstGeom prst="rect">
+            <a:avLst/>
+          </a:prstGeom>
+          <a:noFill/>
+        </p:spPr>
+        <p:txBody>
+          <a:bodyPr wrap="none" lIns="0" rIns="0">
+            <a:noAutofit/>
+          </a:bodyPr>
+          <a:lstStyle/>
+          <a:p>
+            <a:pPr algn="l"/>
+            <a:r>
+              <a:rPr sz="3400" b="1" i="0">
+                <a:solidFill>
+                  <a:srgbClr val="0072CE"/>
+                </a:solidFill>
+                <a:latin typeface="Arial"/>
+              </a:rPr>
+              <a:t>05</a:t>
+            </a:r>
+          </a:p>
+        </p:txBody>
+      </p:sp>
+      <p:sp>
+        <p:nvSpPr>
+          <p:cNvPr id="16" name="TextBox 15"/>
+          <p:cNvSpPr/>
+          <p:nvPr>
+            <p:ph type="body" idx="14"/>
+          </p:nvPr>
+        </p:nvSpPr>
+        <p:spPr>
+          <a:xfrm>
+            <a:off x="1371600" y="5151728"/>
+            <a:ext cx="10363200" cy="518159"/>
+          </a:xfrm>
+          <a:prstGeom prst="rect">
+            <a:avLst/>
+          </a:prstGeom>
+          <a:noFill/>
+        </p:spPr>
+        <p:txBody>
+          <a:bodyPr wrap="none" lIns="0" rIns="0">
+            <a:noAutofit/>
+          </a:bodyPr>
+          <a:lstStyle/>
+          <a:p>
+            <a:pPr algn="l"/>
+            <a:r>
+              <a:rPr sz="3400" b="0" i="0">
+                <a:solidFill>
+                  <a:srgbClr val="0A2240"/>
+                </a:solidFill>
+                <a:latin typeface="Arial"/>
+              </a:rPr>
+              <a:t>Decisions we need today</a:t>
             </a:r>
           </a:p>
         </p:txBody>
@@ -7430,511 +7536,6 @@
 
 <file path=ppt/slideLayouts/slideLayout20.xml><?xml version="1.0" encoding="utf-8"?>
 <p:sldLayout xmlns:a="http://schemas.openxmlformats.org/drawingml/2006/main" xmlns:r="http://schemas.openxmlformats.org/officeDocument/2006/relationships" xmlns:p="http://schemas.openxmlformats.org/presentationml/2006/main" type="blank" preserve="1">
-  <p:cSld name="slidekit · Agenda">
-    <p:bg>
-      <p:bgPr>
-        <a:solidFill>
-          <a:srgbClr val="FFFFFF"/>
-        </a:solidFill>
-        <a:effectLst/>
-      </p:bgPr>
-    </p:bg>
-    <p:spTree>
-      <p:nvGrpSpPr>
-        <p:cNvPr id="1" name=""/>
-        <p:cNvGrpSpPr/>
-        <p:nvPr/>
-      </p:nvGrpSpPr>
-      <p:grpSpPr>
-        <a:xfrm>
-          <a:off x="0" y="0"/>
-          <a:ext cx="0" cy="0"/>
-          <a:chOff x="0" y="0"/>
-          <a:chExt cx="0" cy="0"/>
-        </a:xfrm>
-      </p:grpSpPr>
-      <p:sp>
-        <p:nvSpPr>
-          <p:cNvPr id="4" name="Slide Number Placeholder 3"/>
-          <p:cNvSpPr>
-            <a:spLocks noGrp="1"/>
-          </p:cNvSpPr>
-          <p:nvPr>
-            <p:ph type="sldNum" sz="quarter" idx="12"/>
-          </p:nvPr>
-        </p:nvSpPr>
-        <p:spPr>
-          <a:xfrm>
-            <a:off x="11186160" y="6035040"/>
-            <a:ext cx="548640" cy="365760"/>
-          </a:xfrm>
-        </p:spPr>
-        <p:txBody>
-          <a:bodyPr/>
-          <a:lstStyle/>
-          <a:p>
-            <a:fld id="{C1FF6DA9-008F-8B48-92A6-B652298478BF}" type="slidenum">
-              <a:rPr lang="en-US" smtClean="0"/>
-              <a:t>‹#›</a:t>
-            </a:fld>
-            <a:endParaRPr lang="en-US"/>
-          </a:p>
-        </p:txBody>
-      </p:sp>
-      <p:sp>
-        <p:nvSpPr>
-          <p:cNvPr id="5" name="TextBox 4"/>
-          <p:cNvSpPr/>
-          <p:nvPr>
-            <p:ph type="title"/>
-          </p:nvPr>
-        </p:nvSpPr>
-        <p:spPr>
-          <a:xfrm>
-            <a:off x="457200" y="457200"/>
-            <a:ext cx="11277600" cy="768096"/>
-          </a:xfrm>
-          <a:prstGeom prst="rect">
-            <a:avLst/>
-          </a:prstGeom>
-          <a:noFill/>
-        </p:spPr>
-        <p:txBody>
-          <a:bodyPr wrap="none" lIns="0" rIns="0">
-            <a:noAutofit/>
-          </a:bodyPr>
-          <a:lstStyle/>
-          <a:p>
-            <a:pPr algn="l"/>
-            <a:r>
-              <a:rPr sz="4200" b="1" i="0">
-                <a:solidFill>
-                  <a:srgbClr val="0072CE"/>
-                </a:solidFill>
-                <a:latin typeface="Arial"/>
-              </a:rPr>
-              <a:t>What We Will Cover</a:t>
-            </a:r>
-          </a:p>
-        </p:txBody>
-      </p:sp>
-      <p:sp>
-        <p:nvSpPr>
-          <p:cNvPr id="6" name="Rectangle 5"/>
-          <p:cNvSpPr/>
-          <p:nvPr>
-            <p:ph type="body" idx="1"/>
-          </p:nvPr>
-        </p:nvSpPr>
-        <p:spPr>
-          <a:xfrm>
-            <a:off x="457200" y="1280160"/>
-            <a:ext cx="11277600" cy="64008"/>
-          </a:xfrm>
-          <a:prstGeom prst="rect">
-            <a:avLst/>
-          </a:prstGeom>
-          <a:solidFill>
-            <a:srgbClr val="0072CE"/>
-          </a:solidFill>
-          <a:ln>
-            <a:noFill/>
-          </a:ln>
-          <a:effectLst/>
-        </p:spPr>
-        <p:txBody>
-          <a:bodyPr rtlCol="0" anchor="ctr"/>
-          <a:lstStyle/>
-          <a:p>
-            <a:pPr algn="ctr"/>
-          </a:p>
-        </p:txBody>
-      </p:sp>
-      <p:sp>
-        <p:nvSpPr>
-          <p:cNvPr id="7" name="TextBox 6"/>
-          <p:cNvSpPr/>
-          <p:nvPr>
-            <p:ph type="body" idx="2"/>
-          </p:nvPr>
-        </p:nvSpPr>
-        <p:spPr>
-          <a:xfrm>
-            <a:off x="457200" y="1618488"/>
-            <a:ext cx="951348" cy="518159"/>
-          </a:xfrm>
-          <a:prstGeom prst="rect">
-            <a:avLst/>
-          </a:prstGeom>
-          <a:noFill/>
-        </p:spPr>
-        <p:txBody>
-          <a:bodyPr wrap="none" lIns="0" rIns="0">
-            <a:noAutofit/>
-          </a:bodyPr>
-          <a:lstStyle/>
-          <a:p>
-            <a:pPr algn="l"/>
-            <a:r>
-              <a:rPr sz="3400" b="1" i="0">
-                <a:solidFill>
-                  <a:srgbClr val="0072CE"/>
-                </a:solidFill>
-                <a:latin typeface="Arial"/>
-              </a:rPr>
-              <a:t>01</a:t>
-            </a:r>
-          </a:p>
-        </p:txBody>
-      </p:sp>
-      <p:sp>
-        <p:nvSpPr>
-          <p:cNvPr id="8" name="TextBox 7"/>
-          <p:cNvSpPr/>
-          <p:nvPr>
-            <p:ph type="body" idx="3"/>
-          </p:nvPr>
-        </p:nvSpPr>
-        <p:spPr>
-          <a:xfrm>
-            <a:off x="1371600" y="1618488"/>
-            <a:ext cx="10363200" cy="518159"/>
-          </a:xfrm>
-          <a:prstGeom prst="rect">
-            <a:avLst/>
-          </a:prstGeom>
-          <a:noFill/>
-        </p:spPr>
-        <p:txBody>
-          <a:bodyPr wrap="none" lIns="0" rIns="0">
-            <a:noAutofit/>
-          </a:bodyPr>
-          <a:lstStyle/>
-          <a:p>
-            <a:pPr algn="l"/>
-            <a:r>
-              <a:rPr sz="3400" b="0" i="0">
-                <a:solidFill>
-                  <a:srgbClr val="0A2240"/>
-                </a:solidFill>
-                <a:latin typeface="Arial"/>
-              </a:rPr>
-              <a:t>Performance against targets</a:t>
-            </a:r>
-          </a:p>
-        </p:txBody>
-      </p:sp>
-      <p:sp>
-        <p:nvSpPr>
-          <p:cNvPr id="9" name="TextBox 8"/>
-          <p:cNvSpPr/>
-          <p:nvPr>
-            <p:ph type="body" idx="4"/>
-          </p:nvPr>
-        </p:nvSpPr>
-        <p:spPr>
-          <a:xfrm>
-            <a:off x="457200" y="2501798"/>
-            <a:ext cx="951348" cy="518159"/>
-          </a:xfrm>
-          <a:prstGeom prst="rect">
-            <a:avLst/>
-          </a:prstGeom>
-          <a:noFill/>
-        </p:spPr>
-        <p:txBody>
-          <a:bodyPr wrap="none" lIns="0" rIns="0">
-            <a:noAutofit/>
-          </a:bodyPr>
-          <a:lstStyle/>
-          <a:p>
-            <a:pPr algn="l"/>
-            <a:r>
-              <a:rPr sz="3400" b="1" i="0">
-                <a:solidFill>
-                  <a:srgbClr val="0072CE"/>
-                </a:solidFill>
-                <a:latin typeface="Arial"/>
-              </a:rPr>
-              <a:t>02</a:t>
-            </a:r>
-          </a:p>
-        </p:txBody>
-      </p:sp>
-      <p:sp>
-        <p:nvSpPr>
-          <p:cNvPr id="10" name="TextBox 9"/>
-          <p:cNvSpPr/>
-          <p:nvPr>
-            <p:ph type="body" idx="5"/>
-          </p:nvPr>
-        </p:nvSpPr>
-        <p:spPr>
-          <a:xfrm>
-            <a:off x="1371600" y="2501798"/>
-            <a:ext cx="10363200" cy="518159"/>
-          </a:xfrm>
-          <a:prstGeom prst="rect">
-            <a:avLst/>
-          </a:prstGeom>
-          <a:noFill/>
-        </p:spPr>
-        <p:txBody>
-          <a:bodyPr wrap="none" lIns="0" rIns="0">
-            <a:noAutofit/>
-          </a:bodyPr>
-          <a:lstStyle/>
-          <a:p>
-            <a:pPr algn="l"/>
-            <a:r>
-              <a:rPr sz="3400" b="0" i="0">
-                <a:solidFill>
-                  <a:srgbClr val="0A2240"/>
-                </a:solidFill>
-                <a:latin typeface="Arial"/>
-              </a:rPr>
-              <a:t>Customer and market signals</a:t>
-            </a:r>
-          </a:p>
-        </p:txBody>
-      </p:sp>
-      <p:sp>
-        <p:nvSpPr>
-          <p:cNvPr id="11" name="TextBox 10"/>
-          <p:cNvSpPr/>
-          <p:nvPr>
-            <p:ph type="body" idx="6"/>
-          </p:nvPr>
-        </p:nvSpPr>
-        <p:spPr>
-          <a:xfrm>
-            <a:off x="457200" y="3385108"/>
-            <a:ext cx="951348" cy="518159"/>
-          </a:xfrm>
-          <a:prstGeom prst="rect">
-            <a:avLst/>
-          </a:prstGeom>
-          <a:noFill/>
-        </p:spPr>
-        <p:txBody>
-          <a:bodyPr wrap="none" lIns="0" rIns="0">
-            <a:noAutofit/>
-          </a:bodyPr>
-          <a:lstStyle/>
-          <a:p>
-            <a:pPr algn="l"/>
-            <a:r>
-              <a:rPr sz="3400" b="1" i="0">
-                <a:solidFill>
-                  <a:srgbClr val="0072CE"/>
-                </a:solidFill>
-                <a:latin typeface="Arial"/>
-              </a:rPr>
-              <a:t>03</a:t>
-            </a:r>
-          </a:p>
-        </p:txBody>
-      </p:sp>
-      <p:sp>
-        <p:nvSpPr>
-          <p:cNvPr id="12" name="TextBox 11"/>
-          <p:cNvSpPr/>
-          <p:nvPr>
-            <p:ph type="body" idx="7"/>
-          </p:nvPr>
-        </p:nvSpPr>
-        <p:spPr>
-          <a:xfrm>
-            <a:off x="1371600" y="3385108"/>
-            <a:ext cx="10363200" cy="518159"/>
-          </a:xfrm>
-          <a:prstGeom prst="rect">
-            <a:avLst/>
-          </a:prstGeom>
-          <a:noFill/>
-        </p:spPr>
-        <p:txBody>
-          <a:bodyPr wrap="none" lIns="0" rIns="0">
-            <a:noAutofit/>
-          </a:bodyPr>
-          <a:lstStyle/>
-          <a:p>
-            <a:pPr algn="l"/>
-            <a:r>
-              <a:rPr sz="3400" b="0" i="0">
-                <a:solidFill>
-                  <a:srgbClr val="0A2240"/>
-                </a:solidFill>
-                <a:latin typeface="Arial"/>
-              </a:rPr>
-              <a:t>Operational health and risks</a:t>
-            </a:r>
-          </a:p>
-        </p:txBody>
-      </p:sp>
-      <p:sp>
-        <p:nvSpPr>
-          <p:cNvPr id="13" name="TextBox 12"/>
-          <p:cNvSpPr/>
-          <p:nvPr>
-            <p:ph type="body" idx="8"/>
-          </p:nvPr>
-        </p:nvSpPr>
-        <p:spPr>
-          <a:xfrm>
-            <a:off x="457200" y="4268418"/>
-            <a:ext cx="951348" cy="518159"/>
-          </a:xfrm>
-          <a:prstGeom prst="rect">
-            <a:avLst/>
-          </a:prstGeom>
-          <a:noFill/>
-        </p:spPr>
-        <p:txBody>
-          <a:bodyPr wrap="none" lIns="0" rIns="0">
-            <a:noAutofit/>
-          </a:bodyPr>
-          <a:lstStyle/>
-          <a:p>
-            <a:pPr algn="l"/>
-            <a:r>
-              <a:rPr sz="3400" b="1" i="0">
-                <a:solidFill>
-                  <a:srgbClr val="0072CE"/>
-                </a:solidFill>
-                <a:latin typeface="Arial"/>
-              </a:rPr>
-              <a:t>04</a:t>
-            </a:r>
-          </a:p>
-        </p:txBody>
-      </p:sp>
-      <p:sp>
-        <p:nvSpPr>
-          <p:cNvPr id="14" name="TextBox 13"/>
-          <p:cNvSpPr/>
-          <p:nvPr>
-            <p:ph type="body" idx="9"/>
-          </p:nvPr>
-        </p:nvSpPr>
-        <p:spPr>
-          <a:xfrm>
-            <a:off x="1371600" y="4268418"/>
-            <a:ext cx="10363200" cy="518159"/>
-          </a:xfrm>
-          <a:prstGeom prst="rect">
-            <a:avLst/>
-          </a:prstGeom>
-          <a:noFill/>
-        </p:spPr>
-        <p:txBody>
-          <a:bodyPr wrap="none" lIns="0" rIns="0">
-            <a:noAutofit/>
-          </a:bodyPr>
-          <a:lstStyle/>
-          <a:p>
-            <a:pPr algn="l"/>
-            <a:r>
-              <a:rPr sz="3400" b="0" i="0">
-                <a:solidFill>
-                  <a:srgbClr val="0A2240"/>
-                </a:solidFill>
-                <a:latin typeface="Arial"/>
-              </a:rPr>
-              <a:t>Roadmap for next quarter</a:t>
-            </a:r>
-          </a:p>
-        </p:txBody>
-      </p:sp>
-      <p:sp>
-        <p:nvSpPr>
-          <p:cNvPr id="15" name="TextBox 14"/>
-          <p:cNvSpPr/>
-          <p:nvPr>
-            <p:ph type="body" idx="13"/>
-          </p:nvPr>
-        </p:nvSpPr>
-        <p:spPr>
-          <a:xfrm>
-            <a:off x="457200" y="5151728"/>
-            <a:ext cx="951348" cy="518159"/>
-          </a:xfrm>
-          <a:prstGeom prst="rect">
-            <a:avLst/>
-          </a:prstGeom>
-          <a:noFill/>
-        </p:spPr>
-        <p:txBody>
-          <a:bodyPr wrap="none" lIns="0" rIns="0">
-            <a:noAutofit/>
-          </a:bodyPr>
-          <a:lstStyle/>
-          <a:p>
-            <a:pPr algn="l"/>
-            <a:r>
-              <a:rPr sz="3400" b="1" i="0">
-                <a:solidFill>
-                  <a:srgbClr val="0072CE"/>
-                </a:solidFill>
-                <a:latin typeface="Arial"/>
-              </a:rPr>
-              <a:t>05</a:t>
-            </a:r>
-          </a:p>
-        </p:txBody>
-      </p:sp>
-      <p:sp>
-        <p:nvSpPr>
-          <p:cNvPr id="16" name="TextBox 15"/>
-          <p:cNvSpPr/>
-          <p:nvPr>
-            <p:ph type="body" idx="14"/>
-          </p:nvPr>
-        </p:nvSpPr>
-        <p:spPr>
-          <a:xfrm>
-            <a:off x="1371600" y="5151728"/>
-            <a:ext cx="10363200" cy="518159"/>
-          </a:xfrm>
-          <a:prstGeom prst="rect">
-            <a:avLst/>
-          </a:prstGeom>
-          <a:noFill/>
-        </p:spPr>
-        <p:txBody>
-          <a:bodyPr wrap="none" lIns="0" rIns="0">
-            <a:noAutofit/>
-          </a:bodyPr>
-          <a:lstStyle/>
-          <a:p>
-            <a:pPr algn="l"/>
-            <a:r>
-              <a:rPr sz="3400" b="0" i="0">
-                <a:solidFill>
-                  <a:srgbClr val="0A2240"/>
-                </a:solidFill>
-                <a:latin typeface="Arial"/>
-              </a:rPr>
-              <a:t>Decisions we need today</a:t>
-            </a:r>
-          </a:p>
-        </p:txBody>
-      </p:sp>
-    </p:spTree>
-    <p:extLst>
-      <p:ext uri="{BB962C8B-B14F-4D97-AF65-F5344CB8AC3E}">
-        <p14:creationId xmlns:p14="http://schemas.microsoft.com/office/powerpoint/2010/main" val="1212999818"/>
-      </p:ext>
-    </p:extLst>
-  </p:cSld>
-  <p:clrMapOvr>
-    <a:masterClrMapping/>
-  </p:clrMapOvr>
-</p:sldLayout>
-</file>
-
-<file path=ppt/slideLayouts/slideLayout21.xml><?xml version="1.0" encoding="utf-8"?>
-<p:sldLayout xmlns:a="http://schemas.openxmlformats.org/drawingml/2006/main" xmlns:r="http://schemas.openxmlformats.org/officeDocument/2006/relationships" xmlns:p="http://schemas.openxmlformats.org/presentationml/2006/main" type="blank" preserve="1">
   <p:cSld name="slidekit · Big Number">
     <p:bg>
       <p:bgPr>
@@ -8105,7 +7706,7 @@
 </p:sldLayout>
 </file>
 
-<file path=ppt/slideLayouts/slideLayout22.xml><?xml version="1.0" encoding="utf-8"?>
+<file path=ppt/slideLayouts/slideLayout21.xml><?xml version="1.0" encoding="utf-8"?>
 <p:sldLayout xmlns:a="http://schemas.openxmlformats.org/drawingml/2006/main" xmlns:r="http://schemas.openxmlformats.org/officeDocument/2006/relationships" xmlns:p="http://schemas.openxmlformats.org/presentationml/2006/main" type="blank" preserve="1">
   <p:cSld name="slidekit · Pull Quote">
     <p:bg>
@@ -8168,8 +7769,8 @@
         </p:nvSpPr>
         <p:spPr>
           <a:xfrm>
-            <a:off x="457200" y="2301240"/>
-            <a:ext cx="128016" cy="2255520"/>
+            <a:off x="457200" y="2621280"/>
+            <a:ext cx="128016" cy="1615440"/>
           </a:xfrm>
           <a:prstGeom prst="rect">
             <a:avLst/>
@@ -8200,16 +7801,16 @@
         </p:nvSpPr>
         <p:spPr>
           <a:xfrm>
-            <a:off x="996696" y="2301240"/>
-            <a:ext cx="10738104" cy="1371600"/>
-          </a:xfrm>
-          <a:prstGeom prst="rect">
-            <a:avLst/>
-          </a:prstGeom>
-          <a:noFill/>
-        </p:spPr>
-        <p:txBody>
-          <a:bodyPr wrap="square" lIns="0" rIns="0">
+            <a:off x="996696" y="2621280"/>
+            <a:ext cx="11195304" cy="731520"/>
+          </a:xfrm>
+          <a:prstGeom prst="rect">
+            <a:avLst/>
+          </a:prstGeom>
+          <a:noFill/>
+        </p:spPr>
+        <p:txBody>
+          <a:bodyPr wrap="none" lIns="0" rIns="0">
             <a:noAutofit/>
           </a:bodyPr>
           <a:lstStyle/>
@@ -8222,7 +7823,7 @@
                 </a:solidFill>
                 <a:latin typeface="Arial"/>
               </a:rPr>
-              <a:t>"We stopped buying tools and started buying outcomes."</a:t>
+              <a:t>"We buy outcomes, not tools."</a:t>
             </a:r>
           </a:p>
         </p:txBody>
@@ -8237,7 +7838,7 @@
         </p:nvSpPr>
         <p:spPr>
           <a:xfrm>
-            <a:off x="996696" y="3947160"/>
+            <a:off x="996696" y="3627120"/>
             <a:ext cx="11195304" cy="609600"/>
           </a:xfrm>
           <a:prstGeom prst="rect">
@@ -8255,7 +7856,7 @@
             <a:r>
               <a:rPr sz="3400" b="0" i="0">
                 <a:solidFill>
-                  <a:srgbClr val="5B6B82"/>
+                  <a:srgbClr val="0A2240"/>
                 </a:solidFill>
                 <a:latin typeface="Arial"/>
               </a:rPr>
@@ -8277,7 +7878,7 @@
 </p:sldLayout>
 </file>
 
-<file path=ppt/slideLayouts/slideLayout23.xml><?xml version="1.0" encoding="utf-8"?>
+<file path=ppt/slideLayouts/slideLayout22.xml><?xml version="1.0" encoding="utf-8"?>
 <p:sldLayout xmlns:a="http://schemas.openxmlformats.org/drawingml/2006/main" xmlns:r="http://schemas.openxmlformats.org/officeDocument/2006/relationships" xmlns:p="http://schemas.openxmlformats.org/presentationml/2006/main" type="blank" preserve="1">
   <p:cSld name="slidekit · Definition">
     <p:bg>
@@ -8340,8 +7941,8 @@
         </p:nvSpPr>
         <p:spPr>
           <a:xfrm>
-            <a:off x="457200" y="1965960"/>
-            <a:ext cx="128016" cy="2926080"/>
+            <a:off x="457200" y="2484120"/>
+            <a:ext cx="128016" cy="1889760"/>
           </a:xfrm>
           <a:prstGeom prst="rect">
             <a:avLst/>
@@ -8372,7 +7973,7 @@
         </p:nvSpPr>
         <p:spPr>
           <a:xfrm>
-            <a:off x="996696" y="1965960"/>
+            <a:off x="996696" y="2484120"/>
             <a:ext cx="11195304" cy="1005840"/>
           </a:xfrm>
           <a:prstGeom prst="rect">
@@ -8409,16 +8010,16 @@
         </p:nvSpPr>
         <p:spPr>
           <a:xfrm>
-            <a:off x="996696" y="3246120"/>
-            <a:ext cx="10738104" cy="1645920"/>
-          </a:xfrm>
-          <a:prstGeom prst="rect">
-            <a:avLst/>
-          </a:prstGeom>
-          <a:noFill/>
-        </p:spPr>
-        <p:txBody>
-          <a:bodyPr wrap="square" lIns="0" rIns="0">
+            <a:off x="996696" y="3764280"/>
+            <a:ext cx="11195304" cy="609600"/>
+          </a:xfrm>
+          <a:prstGeom prst="rect">
+            <a:avLst/>
+          </a:prstGeom>
+          <a:noFill/>
+        </p:spPr>
+        <p:txBody>
+          <a:bodyPr wrap="none" lIns="0" rIns="0">
             <a:noAutofit/>
           </a:bodyPr>
           <a:lstStyle/>
@@ -8431,7 +8032,7 @@
                 </a:solidFill>
                 <a:latin typeface="Arial"/>
               </a:rPr>
-              <a:t>The percentage of recurring revenue retained from existing customers over a period, including expansion and after churn.</a:t>
+              <a:t>Revenue kept from existing customers.</a:t>
             </a:r>
           </a:p>
         </p:txBody>
@@ -8449,7 +8050,7 @@
 </p:sldLayout>
 </file>
 
-<file path=ppt/slideLayouts/slideLayout24.xml><?xml version="1.0" encoding="utf-8"?>
+<file path=ppt/slideLayouts/slideLayout23.xml><?xml version="1.0" encoding="utf-8"?>
 <p:sldLayout xmlns:a="http://schemas.openxmlformats.org/drawingml/2006/main" xmlns:r="http://schemas.openxmlformats.org/officeDocument/2006/relationships" xmlns:p="http://schemas.openxmlformats.org/presentationml/2006/main" type="blank" preserve="1">
   <p:cSld name="slidekit · Question">
     <p:bg>
@@ -8512,8 +8113,8 @@
         </p:nvSpPr>
         <p:spPr>
           <a:xfrm>
-            <a:off x="457200" y="2011680"/>
-            <a:ext cx="128016" cy="2834640"/>
+            <a:off x="457200" y="2926080"/>
+            <a:ext cx="128016" cy="1005840"/>
           </a:xfrm>
           <a:prstGeom prst="rect">
             <a:avLst/>
@@ -8544,16 +8145,16 @@
         </p:nvSpPr>
         <p:spPr>
           <a:xfrm>
-            <a:off x="996696" y="2011680"/>
-            <a:ext cx="10738104" cy="2834640"/>
-          </a:xfrm>
-          <a:prstGeom prst="rect">
-            <a:avLst/>
-          </a:prstGeom>
-          <a:noFill/>
-        </p:spPr>
-        <p:txBody>
-          <a:bodyPr wrap="square" lIns="0" rIns="0">
+            <a:off x="996696" y="2926080"/>
+            <a:ext cx="11195304" cy="1005840"/>
+          </a:xfrm>
+          <a:prstGeom prst="rect">
+            <a:avLst/>
+          </a:prstGeom>
+          <a:noFill/>
+        </p:spPr>
+        <p:txBody>
+          <a:bodyPr wrap="none" lIns="0" rIns="0">
             <a:noAutofit/>
           </a:bodyPr>
           <a:lstStyle/>
@@ -8566,7 +8167,7 @@
                 </a:solidFill>
                 <a:latin typeface="Arial"/>
               </a:rPr>
-              <a:t>What would we build if we trusted our customers completely?</a:t>
+              <a:t>What if we trusted users?</a:t>
             </a:r>
           </a:p>
         </p:txBody>
@@ -8584,7 +8185,7 @@
 </p:sldLayout>
 </file>
 
-<file path=ppt/slideLayouts/slideLayout25.xml><?xml version="1.0" encoding="utf-8"?>
+<file path=ppt/slideLayouts/slideLayout24.xml><?xml version="1.0" encoding="utf-8"?>
 <p:sldLayout xmlns:a="http://schemas.openxmlformats.org/drawingml/2006/main" xmlns:r="http://schemas.openxmlformats.org/officeDocument/2006/relationships" xmlns:p="http://schemas.openxmlformats.org/presentationml/2006/main" type="blank" preserve="1">
   <p:cSld name="slidekit · Bullet List">
     <p:bg>
@@ -8798,7 +8399,7 @@
 </p:sldLayout>
 </file>
 
-<file path=ppt/slideLayouts/slideLayout26.xml><?xml version="1.0" encoding="utf-8"?>
+<file path=ppt/slideLayouts/slideLayout25.xml><?xml version="1.0" encoding="utf-8"?>
 <p:sldLayout xmlns:a="http://schemas.openxmlformats.org/drawingml/2006/main" xmlns:r="http://schemas.openxmlformats.org/officeDocument/2006/relationships" xmlns:p="http://schemas.openxmlformats.org/presentationml/2006/main" type="blank" preserve="1">
   <p:cSld name="slidekit · Code Block">
     <p:bg>
@@ -8868,7 +8469,7 @@
             <a:avLst/>
           </a:prstGeom>
           <a:solidFill>
-            <a:srgbClr val="FF5F56"/>
+            <a:srgbClr val="FFFFFF"/>
           </a:solidFill>
           <a:ln>
             <a:noFill/>
@@ -8900,7 +8501,7 @@
             <a:avLst/>
           </a:prstGeom>
           <a:solidFill>
-            <a:srgbClr val="FFBD2E"/>
+            <a:srgbClr val="FFFFFF"/>
           </a:solidFill>
           <a:ln>
             <a:noFill/>
@@ -8932,7 +8533,7 @@
             <a:avLst/>
           </a:prstGeom>
           <a:solidFill>
-            <a:srgbClr val="27C93F"/>
+            <a:srgbClr val="FFFFFF"/>
           </a:solidFill>
           <a:ln>
             <a:noFill/>
@@ -8975,7 +8576,7 @@
             <a:r>
               <a:rPr sz="4200" b="0" i="0">
                 <a:solidFill>
-                  <a:srgbClr val="D4D4D4"/>
+                  <a:srgbClr val="FFFFFF"/>
                 </a:solidFill>
                 <a:latin typeface="Arial"/>
               </a:rPr>
@@ -9012,7 +8613,7 @@
             <a:r>
               <a:rPr sz="3400" b="0" i="0">
                 <a:solidFill>
-                  <a:srgbClr val="6A9955"/>
+                  <a:srgbClr val="FFFFFF"/>
                 </a:solidFill>
                 <a:latin typeface="Arial"/>
               </a:rPr>
@@ -9069,7 +8670,7 @@
         <p:spPr>
           <a:xfrm>
             <a:off x="1057461" y="2356103"/>
-            <a:ext cx="302848" cy="518159"/>
+            <a:ext cx="2524382" cy="518159"/>
           </a:xfrm>
           <a:prstGeom prst="rect">
             <a:avLst/>
@@ -9086,11 +8687,11 @@
             <a:r>
               <a:rPr sz="3400" b="0" i="0">
                 <a:solidFill>
-                  <a:srgbClr val="D4D4D4"/>
-                </a:solidFill>
-                <a:latin typeface="Arial"/>
-              </a:rPr>
-              <a:t> </a:t>
+                  <a:srgbClr val="FFFFFF"/>
+                </a:solidFill>
+                <a:latin typeface="Arial"/>
+              </a:rPr>
+              <a:t> main():</a:t>
             </a:r>
           </a:p>
         </p:txBody>
@@ -9105,8 +8706,8 @@
         </p:nvSpPr>
         <p:spPr>
           <a:xfrm>
-            <a:off x="1177429" y="2356103"/>
-            <a:ext cx="1680348" cy="518159"/>
+            <a:off x="457200" y="2874262"/>
+            <a:ext cx="7046475" cy="518159"/>
           </a:xfrm>
           <a:prstGeom prst="rect">
             <a:avLst/>
@@ -9123,11 +8724,11 @@
             <a:r>
               <a:rPr sz="3400" b="0" i="0">
                 <a:solidFill>
-                  <a:srgbClr val="DCDCAA"/>
-                </a:solidFill>
-                <a:latin typeface="Arial"/>
-              </a:rPr>
-              <a:t>main</a:t>
+                  <a:srgbClr val="FFFFFF"/>
+                </a:solidFill>
+                <a:latin typeface="Arial"/>
+              </a:rPr>
+              <a:t>    print("Hello, world!")</a:t>
             </a:r>
           </a:p>
         </p:txBody>
@@ -9142,8 +8743,8 @@
         </p:nvSpPr>
         <p:spPr>
           <a:xfrm>
-            <a:off x="2113347" y="2356103"/>
-            <a:ext cx="834964" cy="518159"/>
+            <a:off x="457200" y="3910580"/>
+            <a:ext cx="2140486" cy="518159"/>
           </a:xfrm>
           <a:prstGeom prst="rect">
             <a:avLst/>
@@ -9160,11 +8761,11 @@
             <a:r>
               <a:rPr sz="3400" b="0" i="0">
                 <a:solidFill>
-                  <a:srgbClr val="D4D4D4"/>
-                </a:solidFill>
-                <a:latin typeface="Arial"/>
-              </a:rPr>
-              <a:t>():</a:t>
+                  <a:srgbClr val="FFFFFF"/>
+                </a:solidFill>
+                <a:latin typeface="Arial"/>
+              </a:rPr>
+              <a:t>main()</a:t>
             </a:r>
           </a:p>
         </p:txBody>
@@ -9175,265 +8776,6 @@
           <p:cNvSpPr/>
           <p:nvPr>
             <p:ph type="body" idx="13"/>
-          </p:nvPr>
-        </p:nvSpPr>
-        <p:spPr>
-          <a:xfrm>
-            <a:off x="457200" y="2874262"/>
-            <a:ext cx="662751" cy="518159"/>
-          </a:xfrm>
-          <a:prstGeom prst="rect">
-            <a:avLst/>
-          </a:prstGeom>
-          <a:noFill/>
-        </p:spPr>
-        <p:txBody>
-          <a:bodyPr wrap="none" lIns="0" rIns="0">
-            <a:noAutofit/>
-          </a:bodyPr>
-          <a:lstStyle/>
-          <a:p>
-            <a:pPr algn="l"/>
-            <a:r>
-              <a:rPr sz="3400" b="0" i="0">
-                <a:solidFill>
-                  <a:srgbClr val="D4D4D4"/>
-                </a:solidFill>
-                <a:latin typeface="Arial"/>
-              </a:rPr>
-              <a:t>    </a:t>
-            </a:r>
-          </a:p>
-        </p:txBody>
-      </p:sp>
-      <p:sp>
-        <p:nvSpPr>
-          <p:cNvPr id="15" name="TextBox 14"/>
-          <p:cNvSpPr/>
-          <p:nvPr>
-            <p:ph type="body" idx="14"/>
-          </p:nvPr>
-        </p:nvSpPr>
-        <p:spPr>
-          <a:xfrm>
-            <a:off x="937071" y="2874262"/>
-            <a:ext cx="1526857" cy="518159"/>
-          </a:xfrm>
-          <a:prstGeom prst="rect">
-            <a:avLst/>
-          </a:prstGeom>
-          <a:noFill/>
-        </p:spPr>
-        <p:txBody>
-          <a:bodyPr wrap="none" lIns="0" rIns="0">
-            <a:noAutofit/>
-          </a:bodyPr>
-          <a:lstStyle/>
-          <a:p>
-            <a:pPr algn="l"/>
-            <a:r>
-              <a:rPr sz="3400" b="0" i="0">
-                <a:solidFill>
-                  <a:srgbClr val="DCDCAA"/>
-                </a:solidFill>
-                <a:latin typeface="Arial"/>
-              </a:rPr>
-              <a:t>print</a:t>
-            </a:r>
-          </a:p>
-        </p:txBody>
-      </p:sp>
-      <p:sp>
-        <p:nvSpPr>
-          <p:cNvPr id="16" name="TextBox 15"/>
-          <p:cNvSpPr/>
-          <p:nvPr>
-            <p:ph type="body" idx="15"/>
-          </p:nvPr>
-        </p:nvSpPr>
-        <p:spPr>
-          <a:xfrm>
-            <a:off x="1777057" y="2874262"/>
-            <a:ext cx="412948" cy="518159"/>
-          </a:xfrm>
-          <a:prstGeom prst="rect">
-            <a:avLst/>
-          </a:prstGeom>
-          <a:noFill/>
-        </p:spPr>
-        <p:txBody>
-          <a:bodyPr wrap="none" lIns="0" rIns="0">
-            <a:noAutofit/>
-          </a:bodyPr>
-          <a:lstStyle/>
-          <a:p>
-            <a:pPr algn="l"/>
-            <a:r>
-              <a:rPr sz="3400" b="0" i="0">
-                <a:solidFill>
-                  <a:srgbClr val="D4D4D4"/>
-                </a:solidFill>
-                <a:latin typeface="Arial"/>
-              </a:rPr>
-              <a:t>(</a:t>
-            </a:r>
-          </a:p>
-        </p:txBody>
-      </p:sp>
-      <p:sp>
-        <p:nvSpPr>
-          <p:cNvPr id="17" name="TextBox 16"/>
-          <p:cNvSpPr/>
-          <p:nvPr>
-            <p:ph type="body" idx="16"/>
-          </p:nvPr>
-        </p:nvSpPr>
-        <p:spPr>
-          <a:xfrm>
-            <a:off x="1920850" y="2874262"/>
-            <a:ext cx="4474566" cy="518159"/>
-          </a:xfrm>
-          <a:prstGeom prst="rect">
-            <a:avLst/>
-          </a:prstGeom>
-          <a:noFill/>
-        </p:spPr>
-        <p:txBody>
-          <a:bodyPr wrap="none" lIns="0" rIns="0">
-            <a:noAutofit/>
-          </a:bodyPr>
-          <a:lstStyle/>
-          <a:p>
-            <a:pPr algn="l"/>
-            <a:r>
-              <a:rPr sz="3400" b="0" i="0">
-                <a:solidFill>
-                  <a:srgbClr val="CE9178"/>
-                </a:solidFill>
-                <a:latin typeface="Arial"/>
-              </a:rPr>
-              <a:t>"Hello, world!"</a:t>
-            </a:r>
-          </a:p>
-        </p:txBody>
-      </p:sp>
-      <p:sp>
-        <p:nvSpPr>
-          <p:cNvPr id="18" name="TextBox 17"/>
-          <p:cNvSpPr/>
-          <p:nvPr>
-            <p:ph type="body" idx="17"/>
-          </p:nvPr>
-        </p:nvSpPr>
-        <p:spPr>
-          <a:xfrm>
-            <a:off x="4603155" y="2874262"/>
-            <a:ext cx="412948" cy="518159"/>
-          </a:xfrm>
-          <a:prstGeom prst="rect">
-            <a:avLst/>
-          </a:prstGeom>
-          <a:noFill/>
-        </p:spPr>
-        <p:txBody>
-          <a:bodyPr wrap="none" lIns="0" rIns="0">
-            <a:noAutofit/>
-          </a:bodyPr>
-          <a:lstStyle/>
-          <a:p>
-            <a:pPr algn="l"/>
-            <a:r>
-              <a:rPr sz="3400" b="0" i="0">
-                <a:solidFill>
-                  <a:srgbClr val="D4D4D4"/>
-                </a:solidFill>
-                <a:latin typeface="Arial"/>
-              </a:rPr>
-              <a:t>)</a:t>
-            </a:r>
-          </a:p>
-        </p:txBody>
-      </p:sp>
-      <p:sp>
-        <p:nvSpPr>
-          <p:cNvPr id="19" name="TextBox 18"/>
-          <p:cNvSpPr/>
-          <p:nvPr>
-            <p:ph type="body" idx="18"/>
-          </p:nvPr>
-        </p:nvSpPr>
-        <p:spPr>
-          <a:xfrm>
-            <a:off x="457200" y="3910580"/>
-            <a:ext cx="1680348" cy="518159"/>
-          </a:xfrm>
-          <a:prstGeom prst="rect">
-            <a:avLst/>
-          </a:prstGeom>
-          <a:noFill/>
-        </p:spPr>
-        <p:txBody>
-          <a:bodyPr wrap="none" lIns="0" rIns="0">
-            <a:noAutofit/>
-          </a:bodyPr>
-          <a:lstStyle/>
-          <a:p>
-            <a:pPr algn="l"/>
-            <a:r>
-              <a:rPr sz="3400" b="0" i="0">
-                <a:solidFill>
-                  <a:srgbClr val="DCDCAA"/>
-                </a:solidFill>
-                <a:latin typeface="Arial"/>
-              </a:rPr>
-              <a:t>main</a:t>
-            </a:r>
-          </a:p>
-        </p:txBody>
-      </p:sp>
-      <p:sp>
-        <p:nvSpPr>
-          <p:cNvPr id="20" name="TextBox 19"/>
-          <p:cNvSpPr/>
-          <p:nvPr>
-            <p:ph type="body" idx="19"/>
-          </p:nvPr>
-        </p:nvSpPr>
-        <p:spPr>
-          <a:xfrm>
-            <a:off x="1393118" y="3910580"/>
-            <a:ext cx="643017" cy="518159"/>
-          </a:xfrm>
-          <a:prstGeom prst="rect">
-            <a:avLst/>
-          </a:prstGeom>
-          <a:noFill/>
-        </p:spPr>
-        <p:txBody>
-          <a:bodyPr wrap="none" lIns="0" rIns="0">
-            <a:noAutofit/>
-          </a:bodyPr>
-          <a:lstStyle/>
-          <a:p>
-            <a:pPr algn="l"/>
-            <a:r>
-              <a:rPr sz="3400" b="0" i="0">
-                <a:solidFill>
-                  <a:srgbClr val="D4D4D4"/>
-                </a:solidFill>
-                <a:latin typeface="Arial"/>
-              </a:rPr>
-              <a:t>()</a:t>
-            </a:r>
-          </a:p>
-        </p:txBody>
-      </p:sp>
-      <p:sp>
-        <p:nvSpPr>
-          <p:cNvPr id="21" name="TextBox 20"/>
-          <p:cNvSpPr/>
-          <p:nvPr>
-            <p:ph type="body" idx="20"/>
           </p:nvPr>
         </p:nvSpPr>
         <p:spPr>
@@ -9456,7 +8798,7 @@
             <a:r>
               <a:rPr sz="3400" b="0" i="0">
                 <a:solidFill>
-                  <a:srgbClr val="4EC9B0"/>
+                  <a:srgbClr val="569CD6"/>
                 </a:solidFill>
                 <a:latin typeface="Arial"/>
               </a:rPr>
@@ -9467,10 +8809,10 @@
       </p:sp>
       <p:sp>
         <p:nvSpPr>
-          <p:cNvPr id="22" name="TextBox 21"/>
-          <p:cNvSpPr/>
-          <p:nvPr>
-            <p:ph type="body" idx="21"/>
+          <p:cNvPr id="15" name="TextBox 14"/>
+          <p:cNvSpPr/>
+          <p:nvPr>
+            <p:ph type="body" idx="14"/>
           </p:nvPr>
         </p:nvSpPr>
         <p:spPr>
@@ -9493,7 +8835,7 @@
             <a:r>
               <a:rPr sz="3400" b="0" i="0">
                 <a:solidFill>
-                  <a:srgbClr val="D4D4D4"/>
+                  <a:srgbClr val="FFFFFF"/>
                 </a:solidFill>
                 <a:latin typeface="Arial"/>
               </a:rPr>
@@ -9504,10 +8846,10 @@
       </p:sp>
       <p:sp>
         <p:nvSpPr>
-          <p:cNvPr id="23" name="TextBox 22"/>
-          <p:cNvSpPr/>
-          <p:nvPr>
-            <p:ph type="body" idx="22"/>
+          <p:cNvPr id="16" name="TextBox 15"/>
+          <p:cNvSpPr/>
+          <p:nvPr>
+            <p:ph type="body" idx="15"/>
           </p:nvPr>
         </p:nvSpPr>
         <p:spPr>
@@ -9530,7 +8872,7 @@
             <a:r>
               <a:rPr sz="3400" b="0" i="0">
                 <a:solidFill>
-                  <a:srgbClr val="D4D4D4"/>
+                  <a:srgbClr val="FFFFFF"/>
                 </a:solidFill>
                 <a:latin typeface="Arial"/>
               </a:rPr>
@@ -9552,7 +8894,7 @@
 </p:sldLayout>
 </file>
 
-<file path=ppt/slideLayouts/slideLayout27.xml><?xml version="1.0" encoding="utf-8"?>
+<file path=ppt/slideLayouts/slideLayout26.xml><?xml version="1.0" encoding="utf-8"?>
 <p:sldLayout xmlns:a="http://schemas.openxmlformats.org/drawingml/2006/main" xmlns:r="http://schemas.openxmlformats.org/officeDocument/2006/relationships" xmlns:p="http://schemas.openxmlformats.org/presentationml/2006/main" type="blank" preserve="1">
   <p:cSld name="slidekit · File Tree">
     <p:bg>
@@ -9661,7 +9003,7 @@
             </a:avLst>
           </a:prstGeom>
           <a:solidFill>
-            <a:srgbClr val="0C1A1C"/>
+            <a:srgbClr val="0A2240"/>
           </a:solidFill>
           <a:ln>
             <a:noFill/>
@@ -9704,7 +9046,7 @@
             <a:r>
               <a:rPr sz="2600" b="1" i="0">
                 <a:solidFill>
-                  <a:srgbClr val="569CD6"/>
+                  <a:srgbClr val="0072CE"/>
                 </a:solidFill>
                 <a:latin typeface="Courier New"/>
               </a:rPr>
@@ -9741,7 +9083,7 @@
             <a:r>
               <a:rPr sz="2600" b="0" i="0">
                 <a:solidFill>
-                  <a:srgbClr val="55707A"/>
+                  <a:srgbClr val="0072CE"/>
                 </a:solidFill>
                 <a:latin typeface="Courier New"/>
               </a:rPr>
@@ -9778,7 +9120,7 @@
             <a:r>
               <a:rPr sz="2600" b="1" i="0">
                 <a:solidFill>
-                  <a:srgbClr val="569CD6"/>
+                  <a:srgbClr val="0072CE"/>
                 </a:solidFill>
                 <a:latin typeface="Courier New"/>
               </a:rPr>
@@ -9815,7 +9157,7 @@
             <a:r>
               <a:rPr sz="2600" b="0" i="0">
                 <a:solidFill>
-                  <a:srgbClr val="55707A"/>
+                  <a:srgbClr val="0072CE"/>
                 </a:solidFill>
                 <a:latin typeface="Courier New"/>
               </a:rPr>
@@ -9852,7 +9194,7 @@
             <a:r>
               <a:rPr sz="2600" b="1" i="0">
                 <a:solidFill>
-                  <a:srgbClr val="569CD6"/>
+                  <a:srgbClr val="0072CE"/>
                 </a:solidFill>
                 <a:latin typeface="Courier New"/>
               </a:rPr>
@@ -9889,7 +9231,7 @@
             <a:r>
               <a:rPr sz="2600" b="0" i="0">
                 <a:solidFill>
-                  <a:srgbClr val="55707A"/>
+                  <a:srgbClr val="0072CE"/>
                 </a:solidFill>
                 <a:latin typeface="Courier New"/>
               </a:rPr>
@@ -9926,7 +9268,7 @@
             <a:r>
               <a:rPr sz="2600" b="0" i="0">
                 <a:solidFill>
-                  <a:srgbClr val="D4D4D4"/>
+                  <a:srgbClr val="FFFFFF"/>
                 </a:solidFill>
                 <a:latin typeface="Courier New"/>
               </a:rPr>
@@ -9963,7 +9305,7 @@
             <a:r>
               <a:rPr sz="2600" b="0" i="0">
                 <a:solidFill>
-                  <a:srgbClr val="55707A"/>
+                  <a:srgbClr val="0072CE"/>
                 </a:solidFill>
                 <a:latin typeface="Courier New"/>
               </a:rPr>
@@ -10000,7 +9342,7 @@
             <a:r>
               <a:rPr sz="2600" b="0" i="0">
                 <a:solidFill>
-                  <a:srgbClr val="D4D4D4"/>
+                  <a:srgbClr val="FFFFFF"/>
                 </a:solidFill>
                 <a:latin typeface="Courier New"/>
               </a:rPr>
@@ -10037,7 +9379,7 @@
             <a:r>
               <a:rPr sz="2600" b="0" i="0">
                 <a:solidFill>
-                  <a:srgbClr val="55707A"/>
+                  <a:srgbClr val="0072CE"/>
                 </a:solidFill>
                 <a:latin typeface="Courier New"/>
               </a:rPr>
@@ -10074,7 +9416,7 @@
             <a:r>
               <a:rPr sz="2600" b="0" i="0">
                 <a:solidFill>
-                  <a:srgbClr val="D4D4D4"/>
+                  <a:srgbClr val="FFFFFF"/>
                 </a:solidFill>
                 <a:latin typeface="Courier New"/>
               </a:rPr>
@@ -10111,7 +9453,7 @@
             <a:r>
               <a:rPr sz="2600" b="0" i="0">
                 <a:solidFill>
-                  <a:srgbClr val="55707A"/>
+                  <a:srgbClr val="0072CE"/>
                 </a:solidFill>
                 <a:latin typeface="Courier New"/>
               </a:rPr>
@@ -10148,7 +9490,7 @@
             <a:r>
               <a:rPr sz="2600" b="0" i="0">
                 <a:solidFill>
-                  <a:srgbClr val="D4D4D4"/>
+                  <a:srgbClr val="FFFFFF"/>
                 </a:solidFill>
                 <a:latin typeface="Courier New"/>
               </a:rPr>
@@ -10185,7 +9527,7 @@
             <a:r>
               <a:rPr sz="2600" b="0" i="0">
                 <a:solidFill>
-                  <a:srgbClr val="55707A"/>
+                  <a:srgbClr val="0072CE"/>
                 </a:solidFill>
                 <a:latin typeface="Courier New"/>
               </a:rPr>
@@ -10222,7 +9564,7 @@
             <a:r>
               <a:rPr sz="2600" b="0" i="0">
                 <a:solidFill>
-                  <a:srgbClr val="D4D4D4"/>
+                  <a:srgbClr val="FFFFFF"/>
                 </a:solidFill>
                 <a:latin typeface="Courier New"/>
               </a:rPr>
@@ -10244,7 +9586,7 @@
 </p:sldLayout>
 </file>
 
-<file path=ppt/slideLayouts/slideLayout28.xml><?xml version="1.0" encoding="utf-8"?>
+<file path=ppt/slideLayouts/slideLayout27.xml><?xml version="1.0" encoding="utf-8"?>
 <p:sldLayout xmlns:a="http://schemas.openxmlformats.org/drawingml/2006/main" xmlns:r="http://schemas.openxmlformats.org/officeDocument/2006/relationships" xmlns:p="http://schemas.openxmlformats.org/presentationml/2006/main" type="blank" preserve="1">
   <p:cSld name="slidekit · Numbered Steps">
     <p:bg>
@@ -10362,7 +9704,7 @@
             <a:r>
               <a:rPr sz="4200" b="1" i="0">
                 <a:solidFill>
-                  <a:srgbClr val="123A6B"/>
+                  <a:srgbClr val="0072CE"/>
                 </a:solidFill>
                 <a:latin typeface="Arial"/>
               </a:rPr>
@@ -10399,7 +9741,7 @@
             <a:r>
               <a:rPr sz="4200" b="1" i="0">
                 <a:solidFill>
-                  <a:srgbClr val="123A6B"/>
+                  <a:srgbClr val="0072CE"/>
                 </a:solidFill>
                 <a:latin typeface="Arial"/>
               </a:rPr>
@@ -10473,7 +9815,7 @@
             <a:r>
               <a:rPr sz="4200" b="1" i="0">
                 <a:solidFill>
-                  <a:srgbClr val="123A6B"/>
+                  <a:srgbClr val="0072CE"/>
                 </a:solidFill>
                 <a:latin typeface="Arial"/>
               </a:rPr>
@@ -10510,7 +9852,7 @@
             <a:r>
               <a:rPr sz="4200" b="1" i="0">
                 <a:solidFill>
-                  <a:srgbClr val="123A6B"/>
+                  <a:srgbClr val="0072CE"/>
                 </a:solidFill>
                 <a:latin typeface="Arial"/>
               </a:rPr>
@@ -10584,7 +9926,7 @@
             <a:r>
               <a:rPr sz="4200" b="1" i="0">
                 <a:solidFill>
-                  <a:srgbClr val="123A6B"/>
+                  <a:srgbClr val="0072CE"/>
                 </a:solidFill>
                 <a:latin typeface="Arial"/>
               </a:rPr>
@@ -10621,7 +9963,7 @@
             <a:r>
               <a:rPr sz="4200" b="1" i="0">
                 <a:solidFill>
-                  <a:srgbClr val="123A6B"/>
+                  <a:srgbClr val="0072CE"/>
                 </a:solidFill>
                 <a:latin typeface="Arial"/>
               </a:rPr>
@@ -10680,7 +10022,7 @@
 </p:sldLayout>
 </file>
 
-<file path=ppt/slideLayouts/slideLayout29.xml><?xml version="1.0" encoding="utf-8"?>
+<file path=ppt/slideLayouts/slideLayout28.xml><?xml version="1.0" encoding="utf-8"?>
 <p:sldLayout xmlns:a="http://schemas.openxmlformats.org/drawingml/2006/main" xmlns:r="http://schemas.openxmlformats.org/officeDocument/2006/relationships" xmlns:p="http://schemas.openxmlformats.org/presentationml/2006/main" type="blank" preserve="1">
   <p:cSld name="slidekit · Two Panel List">
     <p:bg>
@@ -10798,7 +10140,7 @@
             <a:r>
               <a:rPr sz="3400" b="1" i="0">
                 <a:solidFill>
-                  <a:srgbClr val="123A6B"/>
+                  <a:srgbClr val="0072CE"/>
                 </a:solidFill>
                 <a:latin typeface="Arial"/>
               </a:rPr>
@@ -10817,14 +10159,14 @@
         </p:nvSpPr>
         <p:spPr>
           <a:xfrm>
-            <a:off x="548640" y="2176271"/>
-            <a:ext cx="1650492" cy="54864"/>
+            <a:off x="457200" y="2176271"/>
+            <a:ext cx="1367718" cy="54864"/>
           </a:xfrm>
           <a:prstGeom prst="rect">
             <a:avLst/>
           </a:prstGeom>
           <a:solidFill>
-            <a:srgbClr val="123A6B"/>
+            <a:srgbClr val="0072CE"/>
           </a:solidFill>
           <a:ln>
             <a:noFill/>
@@ -10867,7 +10209,7 @@
             <a:r>
               <a:rPr sz="3400" b="1" i="0">
                 <a:solidFill>
-                  <a:srgbClr val="5B6B82"/>
+                  <a:srgbClr val="0A2240"/>
                 </a:solidFill>
                 <a:latin typeface="Arial"/>
               </a:rPr>
@@ -10886,14 +10228,14 @@
         </p:nvSpPr>
         <p:spPr>
           <a:xfrm>
-            <a:off x="6324600" y="2176271"/>
-            <a:ext cx="1650492" cy="54864"/>
+            <a:off x="6233160" y="2176271"/>
+            <a:ext cx="1007604" cy="54864"/>
           </a:xfrm>
           <a:prstGeom prst="rect">
             <a:avLst/>
           </a:prstGeom>
           <a:solidFill>
-            <a:srgbClr val="5B6B82"/>
+            <a:srgbClr val="0A2240"/>
           </a:solidFill>
           <a:ln>
             <a:noFill/>
@@ -11126,6 +10468,294 @@
                 <a:latin typeface="Arial"/>
               </a:rPr>
               <a:t>In-product live chat</a:t>
+            </a:r>
+          </a:p>
+        </p:txBody>
+      </p:sp>
+    </p:spTree>
+    <p:extLst>
+      <p:ext uri="{BB962C8B-B14F-4D97-AF65-F5344CB8AC3E}">
+        <p14:creationId xmlns:p14="http://schemas.microsoft.com/office/powerpoint/2010/main" val="1212999818"/>
+      </p:ext>
+    </p:extLst>
+  </p:cSld>
+  <p:clrMapOvr>
+    <a:masterClrMapping/>
+  </p:clrMapOvr>
+</p:sldLayout>
+</file>
+
+<file path=ppt/slideLayouts/slideLayout29.xml><?xml version="1.0" encoding="utf-8"?>
+<p:sldLayout xmlns:a="http://schemas.openxmlformats.org/drawingml/2006/main" xmlns:r="http://schemas.openxmlformats.org/officeDocument/2006/relationships" xmlns:p="http://schemas.openxmlformats.org/presentationml/2006/main" type="blank" preserve="1">
+  <p:cSld name="slidekit · This vs That">
+    <p:bg>
+      <p:bgPr>
+        <a:solidFill>
+          <a:srgbClr val="FFFFFF"/>
+        </a:solidFill>
+        <a:effectLst/>
+      </p:bgPr>
+    </p:bg>
+    <p:spTree>
+      <p:nvGrpSpPr>
+        <p:cNvPr id="1" name=""/>
+        <p:cNvGrpSpPr/>
+        <p:nvPr/>
+      </p:nvGrpSpPr>
+      <p:grpSpPr>
+        <a:xfrm>
+          <a:off x="0" y="0"/>
+          <a:ext cx="0" cy="0"/>
+          <a:chOff x="0" y="0"/>
+          <a:chExt cx="0" cy="0"/>
+        </a:xfrm>
+      </p:grpSpPr>
+      <p:sp>
+        <p:nvSpPr>
+          <p:cNvPr id="4" name="Slide Number Placeholder 3"/>
+          <p:cNvSpPr>
+            <a:spLocks noGrp="1"/>
+          </p:cNvSpPr>
+          <p:nvPr>
+            <p:ph type="sldNum" sz="quarter" idx="12"/>
+          </p:nvPr>
+        </p:nvSpPr>
+        <p:spPr>
+          <a:xfrm>
+            <a:off x="11186160" y="6035040"/>
+            <a:ext cx="548640" cy="365760"/>
+          </a:xfrm>
+        </p:spPr>
+        <p:txBody>
+          <a:bodyPr/>
+          <a:lstStyle/>
+          <a:p>
+            <a:fld id="{C1FF6DA9-008F-8B48-92A6-B652298478BF}" type="slidenum">
+              <a:rPr lang="en-US" smtClean="0"/>
+              <a:t>‹#›</a:t>
+            </a:fld>
+            <a:endParaRPr lang="en-US"/>
+          </a:p>
+        </p:txBody>
+      </p:sp>
+      <p:sp>
+        <p:nvSpPr>
+          <p:cNvPr id="5" name="TextBox 4"/>
+          <p:cNvSpPr/>
+          <p:nvPr>
+            <p:ph type="title"/>
+          </p:nvPr>
+        </p:nvSpPr>
+        <p:spPr>
+          <a:xfrm>
+            <a:off x="457200" y="457200"/>
+            <a:ext cx="11277600" cy="768096"/>
+          </a:xfrm>
+          <a:prstGeom prst="rect">
+            <a:avLst/>
+          </a:prstGeom>
+          <a:noFill/>
+        </p:spPr>
+        <p:txBody>
+          <a:bodyPr wrap="none" lIns="0" rIns="0">
+            <a:noAutofit/>
+          </a:bodyPr>
+          <a:lstStyle/>
+          <a:p>
+            <a:pPr algn="l"/>
+            <a:r>
+              <a:rPr sz="4200" b="1" i="0">
+                <a:solidFill>
+                  <a:srgbClr val="0072CE"/>
+                </a:solidFill>
+                <a:latin typeface="Arial"/>
+              </a:rPr>
+              <a:t>Cloud or On-Prem</a:t>
+            </a:r>
+          </a:p>
+        </p:txBody>
+      </p:sp>
+      <p:sp>
+        <p:nvSpPr>
+          <p:cNvPr id="6" name="TextBox 5"/>
+          <p:cNvSpPr/>
+          <p:nvPr>
+            <p:ph type="body" idx="1"/>
+          </p:nvPr>
+        </p:nvSpPr>
+        <p:spPr>
+          <a:xfrm>
+            <a:off x="457200" y="2776728"/>
+            <a:ext cx="4792980" cy="914400"/>
+          </a:xfrm>
+          <a:prstGeom prst="rect">
+            <a:avLst/>
+          </a:prstGeom>
+          <a:noFill/>
+        </p:spPr>
+        <p:txBody>
+          <a:bodyPr wrap="none" lIns="0" rIns="0">
+            <a:noAutofit/>
+          </a:bodyPr>
+          <a:lstStyle/>
+          <a:p>
+            <a:pPr algn="ctr"/>
+            <a:r>
+              <a:rPr sz="6000" b="1" i="0">
+                <a:solidFill>
+                  <a:srgbClr val="0A2240"/>
+                </a:solidFill>
+                <a:latin typeface="Arial"/>
+              </a:rPr>
+              <a:t>3 wks</a:t>
+            </a:r>
+          </a:p>
+        </p:txBody>
+      </p:sp>
+      <p:sp>
+        <p:nvSpPr>
+          <p:cNvPr id="7" name="TextBox 6"/>
+          <p:cNvSpPr/>
+          <p:nvPr>
+            <p:ph type="body" idx="2"/>
+          </p:nvPr>
+        </p:nvSpPr>
+        <p:spPr>
+          <a:xfrm>
+            <a:off x="0" y="3965448"/>
+            <a:ext cx="5707380" cy="518159"/>
+          </a:xfrm>
+          <a:prstGeom prst="rect">
+            <a:avLst/>
+          </a:prstGeom>
+          <a:noFill/>
+        </p:spPr>
+        <p:txBody>
+          <a:bodyPr wrap="none" lIns="0" rIns="0">
+            <a:noAutofit/>
+          </a:bodyPr>
+          <a:lstStyle/>
+          <a:p>
+            <a:pPr algn="ctr"/>
+            <a:r>
+              <a:rPr sz="3400" b="0" i="0">
+                <a:solidFill>
+                  <a:srgbClr val="0A2240"/>
+                </a:solidFill>
+                <a:latin typeface="Arial"/>
+              </a:rPr>
+              <a:t>Cloud time-to-launch</a:t>
+            </a:r>
+          </a:p>
+        </p:txBody>
+      </p:sp>
+      <p:sp>
+        <p:nvSpPr>
+          <p:cNvPr id="8" name="TextBox 7"/>
+          <p:cNvSpPr/>
+          <p:nvPr>
+            <p:ph type="body" idx="3"/>
+          </p:nvPr>
+        </p:nvSpPr>
+        <p:spPr>
+          <a:xfrm>
+            <a:off x="6941820" y="2776728"/>
+            <a:ext cx="4792980" cy="914400"/>
+          </a:xfrm>
+          <a:prstGeom prst="rect">
+            <a:avLst/>
+          </a:prstGeom>
+          <a:noFill/>
+        </p:spPr>
+        <p:txBody>
+          <a:bodyPr wrap="none" lIns="0" rIns="0">
+            <a:noAutofit/>
+          </a:bodyPr>
+          <a:lstStyle/>
+          <a:p>
+            <a:pPr algn="ctr"/>
+            <a:r>
+              <a:rPr sz="6000" b="1" i="0">
+                <a:solidFill>
+                  <a:srgbClr val="0A2240"/>
+                </a:solidFill>
+                <a:latin typeface="Arial"/>
+              </a:rPr>
+              <a:t>6 mo</a:t>
+            </a:r>
+          </a:p>
+        </p:txBody>
+      </p:sp>
+      <p:sp>
+        <p:nvSpPr>
+          <p:cNvPr id="9" name="TextBox 8"/>
+          <p:cNvSpPr/>
+          <p:nvPr>
+            <p:ph type="body" idx="4"/>
+          </p:nvPr>
+        </p:nvSpPr>
+        <p:spPr>
+          <a:xfrm>
+            <a:off x="6484620" y="3965448"/>
+            <a:ext cx="5707380" cy="518159"/>
+          </a:xfrm>
+          <a:prstGeom prst="rect">
+            <a:avLst/>
+          </a:prstGeom>
+          <a:noFill/>
+        </p:spPr>
+        <p:txBody>
+          <a:bodyPr wrap="none" lIns="0" rIns="0">
+            <a:noAutofit/>
+          </a:bodyPr>
+          <a:lstStyle/>
+          <a:p>
+            <a:pPr algn="ctr"/>
+            <a:r>
+              <a:rPr sz="3400" b="0" i="0">
+                <a:solidFill>
+                  <a:srgbClr val="0A2240"/>
+                </a:solidFill>
+                <a:latin typeface="Arial"/>
+              </a:rPr>
+              <a:t>On-prem time-to-launch</a:t>
+            </a:r>
+          </a:p>
+        </p:txBody>
+      </p:sp>
+      <p:sp>
+        <p:nvSpPr>
+          <p:cNvPr id="10" name="TextBox 9"/>
+          <p:cNvSpPr/>
+          <p:nvPr>
+            <p:ph type="body" idx="5"/>
+          </p:nvPr>
+        </p:nvSpPr>
+        <p:spPr>
+          <a:xfrm>
+            <a:off x="5435323" y="3310127"/>
+            <a:ext cx="1321354" cy="640080"/>
+          </a:xfrm>
+          <a:prstGeom prst="rect">
+            <a:avLst/>
+          </a:prstGeom>
+          <a:noFill/>
+        </p:spPr>
+        <p:txBody>
+          <a:bodyPr wrap="none" lIns="0" rIns="0">
+            <a:noAutofit/>
+          </a:bodyPr>
+          <a:lstStyle/>
+          <a:p>
+            <a:pPr algn="ctr"/>
+            <a:r>
+              <a:rPr sz="4200" b="1" i="0">
+                <a:solidFill>
+                  <a:srgbClr val="0A2240"/>
+                </a:solidFill>
+                <a:latin typeface="Arial"/>
+              </a:rPr>
+              <a:t>VS</a:t>
             </a:r>
           </a:p>
         </p:txBody>
@@ -11391,294 +11021,6 @@
 
 <file path=ppt/slideLayouts/slideLayout30.xml><?xml version="1.0" encoding="utf-8"?>
 <p:sldLayout xmlns:a="http://schemas.openxmlformats.org/drawingml/2006/main" xmlns:r="http://schemas.openxmlformats.org/officeDocument/2006/relationships" xmlns:p="http://schemas.openxmlformats.org/presentationml/2006/main" type="blank" preserve="1">
-  <p:cSld name="slidekit · This vs That">
-    <p:bg>
-      <p:bgPr>
-        <a:solidFill>
-          <a:srgbClr val="FFFFFF"/>
-        </a:solidFill>
-        <a:effectLst/>
-      </p:bgPr>
-    </p:bg>
-    <p:spTree>
-      <p:nvGrpSpPr>
-        <p:cNvPr id="1" name=""/>
-        <p:cNvGrpSpPr/>
-        <p:nvPr/>
-      </p:nvGrpSpPr>
-      <p:grpSpPr>
-        <a:xfrm>
-          <a:off x="0" y="0"/>
-          <a:ext cx="0" cy="0"/>
-          <a:chOff x="0" y="0"/>
-          <a:chExt cx="0" cy="0"/>
-        </a:xfrm>
-      </p:grpSpPr>
-      <p:sp>
-        <p:nvSpPr>
-          <p:cNvPr id="4" name="Slide Number Placeholder 3"/>
-          <p:cNvSpPr>
-            <a:spLocks noGrp="1"/>
-          </p:cNvSpPr>
-          <p:nvPr>
-            <p:ph type="sldNum" sz="quarter" idx="12"/>
-          </p:nvPr>
-        </p:nvSpPr>
-        <p:spPr>
-          <a:xfrm>
-            <a:off x="11186160" y="6035040"/>
-            <a:ext cx="548640" cy="365760"/>
-          </a:xfrm>
-        </p:spPr>
-        <p:txBody>
-          <a:bodyPr/>
-          <a:lstStyle/>
-          <a:p>
-            <a:fld id="{C1FF6DA9-008F-8B48-92A6-B652298478BF}" type="slidenum">
-              <a:rPr lang="en-US" smtClean="0"/>
-              <a:t>‹#›</a:t>
-            </a:fld>
-            <a:endParaRPr lang="en-US"/>
-          </a:p>
-        </p:txBody>
-      </p:sp>
-      <p:sp>
-        <p:nvSpPr>
-          <p:cNvPr id="5" name="TextBox 4"/>
-          <p:cNvSpPr/>
-          <p:nvPr>
-            <p:ph type="title"/>
-          </p:nvPr>
-        </p:nvSpPr>
-        <p:spPr>
-          <a:xfrm>
-            <a:off x="457200" y="457200"/>
-            <a:ext cx="11277600" cy="768096"/>
-          </a:xfrm>
-          <a:prstGeom prst="rect">
-            <a:avLst/>
-          </a:prstGeom>
-          <a:noFill/>
-        </p:spPr>
-        <p:txBody>
-          <a:bodyPr wrap="none" lIns="0" rIns="0">
-            <a:noAutofit/>
-          </a:bodyPr>
-          <a:lstStyle/>
-          <a:p>
-            <a:pPr algn="l"/>
-            <a:r>
-              <a:rPr sz="4200" b="1" i="0">
-                <a:solidFill>
-                  <a:srgbClr val="0072CE"/>
-                </a:solidFill>
-                <a:latin typeface="Arial"/>
-              </a:rPr>
-              <a:t>Cloud or On-Prem</a:t>
-            </a:r>
-          </a:p>
-        </p:txBody>
-      </p:sp>
-      <p:sp>
-        <p:nvSpPr>
-          <p:cNvPr id="6" name="TextBox 5"/>
-          <p:cNvSpPr/>
-          <p:nvPr>
-            <p:ph type="body" idx="1"/>
-          </p:nvPr>
-        </p:nvSpPr>
-        <p:spPr>
-          <a:xfrm>
-            <a:off x="457200" y="2776728"/>
-            <a:ext cx="4792980" cy="914400"/>
-          </a:xfrm>
-          <a:prstGeom prst="rect">
-            <a:avLst/>
-          </a:prstGeom>
-          <a:noFill/>
-        </p:spPr>
-        <p:txBody>
-          <a:bodyPr wrap="none" lIns="0" rIns="0">
-            <a:noAutofit/>
-          </a:bodyPr>
-          <a:lstStyle/>
-          <a:p>
-            <a:pPr algn="ctr"/>
-            <a:r>
-              <a:rPr sz="6000" b="1" i="0">
-                <a:solidFill>
-                  <a:srgbClr val="0A2240"/>
-                </a:solidFill>
-                <a:latin typeface="Arial"/>
-              </a:rPr>
-              <a:t>3 wks</a:t>
-            </a:r>
-          </a:p>
-        </p:txBody>
-      </p:sp>
-      <p:sp>
-        <p:nvSpPr>
-          <p:cNvPr id="7" name="TextBox 6"/>
-          <p:cNvSpPr/>
-          <p:nvPr>
-            <p:ph type="body" idx="2"/>
-          </p:nvPr>
-        </p:nvSpPr>
-        <p:spPr>
-          <a:xfrm>
-            <a:off x="0" y="3965448"/>
-            <a:ext cx="5707380" cy="518159"/>
-          </a:xfrm>
-          <a:prstGeom prst="rect">
-            <a:avLst/>
-          </a:prstGeom>
-          <a:noFill/>
-        </p:spPr>
-        <p:txBody>
-          <a:bodyPr wrap="none" lIns="0" rIns="0">
-            <a:noAutofit/>
-          </a:bodyPr>
-          <a:lstStyle/>
-          <a:p>
-            <a:pPr algn="ctr"/>
-            <a:r>
-              <a:rPr sz="3400" b="0" i="0">
-                <a:solidFill>
-                  <a:srgbClr val="0A2240"/>
-                </a:solidFill>
-                <a:latin typeface="Arial"/>
-              </a:rPr>
-              <a:t>Cloud time-to-launch</a:t>
-            </a:r>
-          </a:p>
-        </p:txBody>
-      </p:sp>
-      <p:sp>
-        <p:nvSpPr>
-          <p:cNvPr id="8" name="TextBox 7"/>
-          <p:cNvSpPr/>
-          <p:nvPr>
-            <p:ph type="body" idx="3"/>
-          </p:nvPr>
-        </p:nvSpPr>
-        <p:spPr>
-          <a:xfrm>
-            <a:off x="6941820" y="2776728"/>
-            <a:ext cx="4792980" cy="914400"/>
-          </a:xfrm>
-          <a:prstGeom prst="rect">
-            <a:avLst/>
-          </a:prstGeom>
-          <a:noFill/>
-        </p:spPr>
-        <p:txBody>
-          <a:bodyPr wrap="none" lIns="0" rIns="0">
-            <a:noAutofit/>
-          </a:bodyPr>
-          <a:lstStyle/>
-          <a:p>
-            <a:pPr algn="ctr"/>
-            <a:r>
-              <a:rPr sz="6000" b="1" i="0">
-                <a:solidFill>
-                  <a:srgbClr val="0A2240"/>
-                </a:solidFill>
-                <a:latin typeface="Arial"/>
-              </a:rPr>
-              <a:t>6 mo</a:t>
-            </a:r>
-          </a:p>
-        </p:txBody>
-      </p:sp>
-      <p:sp>
-        <p:nvSpPr>
-          <p:cNvPr id="9" name="TextBox 8"/>
-          <p:cNvSpPr/>
-          <p:nvPr>
-            <p:ph type="body" idx="4"/>
-          </p:nvPr>
-        </p:nvSpPr>
-        <p:spPr>
-          <a:xfrm>
-            <a:off x="6484620" y="3965448"/>
-            <a:ext cx="5707380" cy="518159"/>
-          </a:xfrm>
-          <a:prstGeom prst="rect">
-            <a:avLst/>
-          </a:prstGeom>
-          <a:noFill/>
-        </p:spPr>
-        <p:txBody>
-          <a:bodyPr wrap="none" lIns="0" rIns="0">
-            <a:noAutofit/>
-          </a:bodyPr>
-          <a:lstStyle/>
-          <a:p>
-            <a:pPr algn="ctr"/>
-            <a:r>
-              <a:rPr sz="3400" b="0" i="0">
-                <a:solidFill>
-                  <a:srgbClr val="0A2240"/>
-                </a:solidFill>
-                <a:latin typeface="Arial"/>
-              </a:rPr>
-              <a:t>On-prem time-to-launch</a:t>
-            </a:r>
-          </a:p>
-        </p:txBody>
-      </p:sp>
-      <p:sp>
-        <p:nvSpPr>
-          <p:cNvPr id="10" name="TextBox 9"/>
-          <p:cNvSpPr/>
-          <p:nvPr>
-            <p:ph type="body" idx="5"/>
-          </p:nvPr>
-        </p:nvSpPr>
-        <p:spPr>
-          <a:xfrm>
-            <a:off x="5435323" y="3310127"/>
-            <a:ext cx="1321354" cy="640080"/>
-          </a:xfrm>
-          <a:prstGeom prst="rect">
-            <a:avLst/>
-          </a:prstGeom>
-          <a:noFill/>
-        </p:spPr>
-        <p:txBody>
-          <a:bodyPr wrap="none" lIns="0" rIns="0">
-            <a:noAutofit/>
-          </a:bodyPr>
-          <a:lstStyle/>
-          <a:p>
-            <a:pPr algn="ctr"/>
-            <a:r>
-              <a:rPr sz="4200" b="1" i="0">
-                <a:solidFill>
-                  <a:srgbClr val="5B6B82"/>
-                </a:solidFill>
-                <a:latin typeface="Arial"/>
-              </a:rPr>
-              <a:t>VS</a:t>
-            </a:r>
-          </a:p>
-        </p:txBody>
-      </p:sp>
-    </p:spTree>
-    <p:extLst>
-      <p:ext uri="{BB962C8B-B14F-4D97-AF65-F5344CB8AC3E}">
-        <p14:creationId xmlns:p14="http://schemas.microsoft.com/office/powerpoint/2010/main" val="1212999818"/>
-      </p:ext>
-    </p:extLst>
-  </p:cSld>
-  <p:clrMapOvr>
-    <a:masterClrMapping/>
-  </p:clrMapOvr>
-</p:sldLayout>
-</file>
-
-<file path=ppt/slideLayouts/slideLayout31.xml><?xml version="1.0" encoding="utf-8"?>
-<p:sldLayout xmlns:a="http://schemas.openxmlformats.org/drawingml/2006/main" xmlns:r="http://schemas.openxmlformats.org/officeDocument/2006/relationships" xmlns:p="http://schemas.openxmlformats.org/presentationml/2006/main" type="blank" preserve="1">
   <p:cSld name="slidekit · KPI Grid">
     <p:bg>
       <p:bgPr>
@@ -12201,7 +11543,7 @@
         </p:nvSpPr>
         <p:spPr>
           <a:xfrm>
-            <a:off x="4307840" y="3797808"/>
+            <a:off x="4307840" y="4056888"/>
             <a:ext cx="3576320" cy="640080"/>
           </a:xfrm>
           <a:prstGeom prst="rect">
@@ -12238,7 +11580,7 @@
         </p:nvSpPr>
         <p:spPr>
           <a:xfrm>
-            <a:off x="5559552" y="4492752"/>
+            <a:off x="5559552" y="4751832"/>
             <a:ext cx="1072896" cy="54864"/>
           </a:xfrm>
           <a:prstGeom prst="rect">
@@ -12270,16 +11612,16 @@
         </p:nvSpPr>
         <p:spPr>
           <a:xfrm>
-            <a:off x="4307840" y="4602480"/>
-            <a:ext cx="3576320" cy="1127760"/>
-          </a:xfrm>
-          <a:prstGeom prst="rect">
-            <a:avLst/>
-          </a:prstGeom>
-          <a:noFill/>
-        </p:spPr>
-        <p:txBody>
-          <a:bodyPr wrap="square" lIns="0" rIns="0">
+            <a:off x="3943896" y="4861560"/>
+            <a:ext cx="4304208" cy="609600"/>
+          </a:xfrm>
+          <a:prstGeom prst="rect">
+            <a:avLst/>
+          </a:prstGeom>
+          <a:noFill/>
+        </p:spPr>
+        <p:txBody>
+          <a:bodyPr wrap="none" lIns="0" rIns="0">
             <a:noAutofit/>
           </a:bodyPr>
           <a:lstStyle/>
@@ -12292,7 +11634,7 @@
                 </a:solidFill>
                 <a:latin typeface="Arial"/>
               </a:rPr>
-              <a:t>Avg. time to value</a:t>
+              <a:t>Time to value</a:t>
             </a:r>
           </a:p>
         </p:txBody>
@@ -12416,7 +11758,7 @@
 </p:sldLayout>
 </file>
 
-<file path=ppt/slideLayouts/slideLayout32.xml><?xml version="1.0" encoding="utf-8"?>
+<file path=ppt/slideLayouts/slideLayout31.xml><?xml version="1.0" encoding="utf-8"?>
 <p:sldLayout xmlns:a="http://schemas.openxmlformats.org/drawingml/2006/main" xmlns:r="http://schemas.openxmlformats.org/officeDocument/2006/relationships" xmlns:p="http://schemas.openxmlformats.org/presentationml/2006/main" type="blank" preserve="1">
   <p:cSld name="slidekit · Chart With Insight">
     <p:bg>
@@ -12603,7 +11945,7 @@
             <a:r>
               <a:rPr sz="2500" b="0" i="0">
                 <a:solidFill>
-                  <a:srgbClr val="5B6B82"/>
+                  <a:srgbClr val="0A2240"/>
                 </a:solidFill>
                 <a:latin typeface="Arial"/>
               </a:rPr>
@@ -12709,7 +12051,7 @@
             <a:r>
               <a:rPr sz="2500" b="0" i="0">
                 <a:solidFill>
-                  <a:srgbClr val="5B6B82"/>
+                  <a:srgbClr val="0A2240"/>
                 </a:solidFill>
                 <a:latin typeface="Arial"/>
               </a:rPr>
@@ -12815,7 +12157,7 @@
             <a:r>
               <a:rPr sz="2500" b="0" i="0">
                 <a:solidFill>
-                  <a:srgbClr val="5B6B82"/>
+                  <a:srgbClr val="0A2240"/>
                 </a:solidFill>
                 <a:latin typeface="Arial"/>
               </a:rPr>
@@ -12921,7 +12263,7 @@
             <a:r>
               <a:rPr sz="2500" b="0" i="0">
                 <a:solidFill>
-                  <a:srgbClr val="5B6B82"/>
+                  <a:srgbClr val="0A2240"/>
                 </a:solidFill>
                 <a:latin typeface="Arial"/>
               </a:rPr>
@@ -12940,8 +12282,8 @@
         </p:nvSpPr>
         <p:spPr>
           <a:xfrm>
-            <a:off x="7498080" y="1770888"/>
-            <a:ext cx="128016" cy="3718560"/>
+            <a:off x="7498080" y="3325368"/>
+            <a:ext cx="128016" cy="609600"/>
           </a:xfrm>
           <a:prstGeom prst="rect">
             <a:avLst/>
@@ -12972,16 +12314,16 @@
         </p:nvSpPr>
         <p:spPr>
           <a:xfrm>
-            <a:off x="8037576" y="1770888"/>
-            <a:ext cx="3697224" cy="3718560"/>
-          </a:xfrm>
-          <a:prstGeom prst="rect">
-            <a:avLst/>
-          </a:prstGeom>
-          <a:noFill/>
-        </p:spPr>
-        <p:txBody>
-          <a:bodyPr wrap="square" lIns="0" rIns="0">
+            <a:off x="8037576" y="3325368"/>
+            <a:ext cx="4154424" cy="609600"/>
+          </a:xfrm>
+          <a:prstGeom prst="rect">
+            <a:avLst/>
+          </a:prstGeom>
+          <a:noFill/>
+        </p:spPr>
+        <p:txBody>
+          <a:bodyPr wrap="none" lIns="0" rIns="0">
             <a:noAutofit/>
           </a:bodyPr>
           <a:lstStyle/>
@@ -12994,7 +12336,7 @@
                 </a:solidFill>
                 <a:latin typeface="Arial"/>
               </a:rPr>
-              <a:t>Activations nearly quadrupled once self-serve onboarding shipped in February.</a:t>
+              <a:t>Activations 4x.</a:t>
             </a:r>
           </a:p>
         </p:txBody>
@@ -13012,7 +12354,7 @@
 </p:sldLayout>
 </file>
 
-<file path=ppt/slideLayouts/slideLayout33.xml><?xml version="1.0" encoding="utf-8"?>
+<file path=ppt/slideLayouts/slideLayout32.xml><?xml version="1.0" encoding="utf-8"?>
 <p:sldLayout xmlns:a="http://schemas.openxmlformats.org/drawingml/2006/main" xmlns:r="http://schemas.openxmlformats.org/officeDocument/2006/relationships" xmlns:p="http://schemas.openxmlformats.org/presentationml/2006/main" type="blank" preserve="1">
   <p:cSld name="slidekit · Table">
     <p:bg>
@@ -13130,7 +12472,7 @@
             <a:r>
               <a:rPr sz="3400" b="1" i="0">
                 <a:solidFill>
-                  <a:srgbClr val="123A6B"/>
+                  <a:srgbClr val="0072CE"/>
                 </a:solidFill>
                 <a:latin typeface="Arial"/>
               </a:rPr>
@@ -13167,7 +12509,7 @@
             <a:r>
               <a:rPr sz="3400" b="1" i="0">
                 <a:solidFill>
-                  <a:srgbClr val="123A6B"/>
+                  <a:srgbClr val="0072CE"/>
                 </a:solidFill>
                 <a:latin typeface="Arial"/>
               </a:rPr>
@@ -13204,7 +12546,7 @@
             <a:r>
               <a:rPr sz="3400" b="1" i="0">
                 <a:solidFill>
-                  <a:srgbClr val="123A6B"/>
+                  <a:srgbClr val="0072CE"/>
                 </a:solidFill>
                 <a:latin typeface="Arial"/>
               </a:rPr>
@@ -13702,7 +13044,7 @@
 </p:sldLayout>
 </file>
 
-<file path=ppt/slideLayouts/slideLayout34.xml><?xml version="1.0" encoding="utf-8"?>
+<file path=ppt/slideLayouts/slideLayout33.xml><?xml version="1.0" encoding="utf-8"?>
 <p:sldLayout xmlns:a="http://schemas.openxmlformats.org/drawingml/2006/main" xmlns:r="http://schemas.openxmlformats.org/officeDocument/2006/relationships" xmlns:p="http://schemas.openxmlformats.org/presentationml/2006/main" type="blank" preserve="1">
   <p:cSld name="slidekit · Metric Comparison">
     <p:bg>
@@ -13802,7 +13144,7 @@
         </p:nvSpPr>
         <p:spPr>
           <a:xfrm>
-            <a:off x="457200" y="2075688"/>
+            <a:off x="457200" y="2334768"/>
             <a:ext cx="3576320" cy="914400"/>
           </a:xfrm>
           <a:prstGeom prst="rect">
@@ -13839,16 +13181,16 @@
         </p:nvSpPr>
         <p:spPr>
           <a:xfrm>
-            <a:off x="457200" y="3264408"/>
-            <a:ext cx="3576320" cy="1127760"/>
-          </a:xfrm>
-          <a:prstGeom prst="rect">
-            <a:avLst/>
-          </a:prstGeom>
-          <a:noFill/>
-        </p:spPr>
-        <p:txBody>
-          <a:bodyPr wrap="square" lIns="0" rIns="0">
+            <a:off x="457200" y="3523488"/>
+            <a:ext cx="3576320" cy="609600"/>
+          </a:xfrm>
+          <a:prstGeom prst="rect">
+            <a:avLst/>
+          </a:prstGeom>
+          <a:noFill/>
+        </p:spPr>
+        <p:txBody>
+          <a:bodyPr wrap="none" lIns="0" rIns="0">
             <a:noAutofit/>
           </a:bodyPr>
           <a:lstStyle/>
@@ -13861,7 +13203,7 @@
                 </a:solidFill>
                 <a:latin typeface="Arial"/>
               </a:rPr>
-              <a:t>Annual recurring revenue</a:t>
+              <a:t>Revenue</a:t>
             </a:r>
           </a:p>
         </p:txBody>
@@ -13876,7 +13218,7 @@
         </p:nvSpPr>
         <p:spPr>
           <a:xfrm>
-            <a:off x="1522569" y="4666488"/>
+            <a:off x="1522569" y="4407408"/>
             <a:ext cx="1445581" cy="518159"/>
           </a:xfrm>
           <a:prstGeom prst="rect">
@@ -13908,7 +13250,7 @@
         </p:nvSpPr>
         <p:spPr>
           <a:xfrm>
-            <a:off x="1260802" y="4666488"/>
+            <a:off x="1260802" y="4407408"/>
             <a:ext cx="1969115" cy="518159"/>
           </a:xfrm>
           <a:prstGeom prst="rect">
@@ -13945,7 +13287,7 @@
         </p:nvSpPr>
         <p:spPr>
           <a:xfrm>
-            <a:off x="4307840" y="2075688"/>
+            <a:off x="4307840" y="2334768"/>
             <a:ext cx="3576320" cy="914400"/>
           </a:xfrm>
           <a:prstGeom prst="rect">
@@ -13982,8 +13324,8 @@
         </p:nvSpPr>
         <p:spPr>
           <a:xfrm>
-            <a:off x="3834934" y="3264408"/>
-            <a:ext cx="4522132" cy="1127760"/>
+            <a:off x="3834934" y="3523488"/>
+            <a:ext cx="4522132" cy="609600"/>
           </a:xfrm>
           <a:prstGeom prst="rect">
             <a:avLst/>
@@ -14019,7 +13361,7 @@
         </p:nvSpPr>
         <p:spPr>
           <a:xfrm>
-            <a:off x="5175547" y="4666488"/>
+            <a:off x="5175547" y="4407408"/>
             <a:ext cx="1840906" cy="518159"/>
           </a:xfrm>
           <a:prstGeom prst="rect">
@@ -14051,7 +13393,7 @@
         </p:nvSpPr>
         <p:spPr>
           <a:xfrm>
-            <a:off x="4795183" y="4666488"/>
+            <a:off x="4795183" y="4407408"/>
             <a:ext cx="2601634" cy="518159"/>
           </a:xfrm>
           <a:prstGeom prst="rect">
@@ -14088,7 +13430,7 @@
         </p:nvSpPr>
         <p:spPr>
           <a:xfrm>
-            <a:off x="8158480" y="2075688"/>
+            <a:off x="8158480" y="2334768"/>
             <a:ext cx="3576320" cy="914400"/>
           </a:xfrm>
           <a:prstGeom prst="rect">
@@ -14125,16 +13467,16 @@
         </p:nvSpPr>
         <p:spPr>
           <a:xfrm>
-            <a:off x="8158480" y="3264408"/>
-            <a:ext cx="3576320" cy="1127760"/>
-          </a:xfrm>
-          <a:prstGeom prst="rect">
-            <a:avLst/>
-          </a:prstGeom>
-          <a:noFill/>
-        </p:spPr>
-        <p:txBody>
-          <a:bodyPr wrap="square" lIns="0" rIns="0">
+            <a:off x="7701280" y="3523488"/>
+            <a:ext cx="4490720" cy="609600"/>
+          </a:xfrm>
+          <a:prstGeom prst="rect">
+            <a:avLst/>
+          </a:prstGeom>
+          <a:noFill/>
+        </p:spPr>
+        <p:txBody>
+          <a:bodyPr wrap="none" lIns="0" rIns="0">
             <a:noAutofit/>
           </a:bodyPr>
           <a:lstStyle/>
@@ -14147,7 +13489,7 @@
                 </a:solidFill>
                 <a:latin typeface="Arial"/>
               </a:rPr>
-              <a:t>Net promoter score</a:t>
+              <a:t>Promoter score</a:t>
             </a:r>
           </a:p>
         </p:txBody>
@@ -14162,7 +13504,7 @@
         </p:nvSpPr>
         <p:spPr>
           <a:xfrm>
-            <a:off x="9427731" y="4666488"/>
+            <a:off x="9427731" y="4407408"/>
             <a:ext cx="1037817" cy="518159"/>
           </a:xfrm>
           <a:prstGeom prst="rect">
@@ -14194,7 +13536,7 @@
         </p:nvSpPr>
         <p:spPr>
           <a:xfrm>
-            <a:off x="9288294" y="4666488"/>
+            <a:off x="9288294" y="4407408"/>
             <a:ext cx="1316691" cy="518159"/>
           </a:xfrm>
           <a:prstGeom prst="rect">
@@ -14234,7 +13576,7 @@
 </p:sldLayout>
 </file>
 
-<file path=ppt/slideLayouts/slideLayout35.xml><?xml version="1.0" encoding="utf-8"?>
+<file path=ppt/slideLayouts/slideLayout34.xml><?xml version="1.0" encoding="utf-8"?>
 <p:sldLayout xmlns:a="http://schemas.openxmlformats.org/drawingml/2006/main" xmlns:r="http://schemas.openxmlformats.org/officeDocument/2006/relationships" xmlns:p="http://schemas.openxmlformats.org/presentationml/2006/main" type="blank" preserve="1">
   <p:cSld name="slidekit · Process Steps">
     <p:bg>
@@ -14352,7 +13694,7 @@
             <a:r>
               <a:rPr sz="4200" b="1" i="0">
                 <a:solidFill>
-                  <a:srgbClr val="123A6B"/>
+                  <a:srgbClr val="0072CE"/>
                 </a:solidFill>
                 <a:latin typeface="Arial"/>
               </a:rPr>
@@ -14372,13 +13714,13 @@
         <p:spPr>
           <a:xfrm>
             <a:off x="457200" y="2194560"/>
-            <a:ext cx="784098" cy="54864"/>
+            <a:ext cx="593303" cy="54864"/>
           </a:xfrm>
           <a:prstGeom prst="rect">
             <a:avLst/>
           </a:prstGeom>
           <a:solidFill>
-            <a:srgbClr val="123A6B"/>
+            <a:srgbClr val="0072CE"/>
           </a:solidFill>
           <a:ln>
             <a:noFill/>
@@ -14421,7 +13763,7 @@
             <a:r>
               <a:rPr sz="3400" b="1" i="0">
                 <a:solidFill>
-                  <a:srgbClr val="123A6B"/>
+                  <a:srgbClr val="0072CE"/>
                 </a:solidFill>
                 <a:latin typeface="Arial"/>
               </a:rPr>
@@ -14495,7 +13837,7 @@
             <a:r>
               <a:rPr sz="4200" b="1" i="0">
                 <a:solidFill>
-                  <a:srgbClr val="123A6B"/>
+                  <a:srgbClr val="0072CE"/>
                 </a:solidFill>
                 <a:latin typeface="Arial"/>
               </a:rPr>
@@ -14515,13 +13857,13 @@
         <p:spPr>
           <a:xfrm>
             <a:off x="3345180" y="2194560"/>
-            <a:ext cx="784098" cy="54864"/>
+            <a:ext cx="593303" cy="54864"/>
           </a:xfrm>
           <a:prstGeom prst="rect">
             <a:avLst/>
           </a:prstGeom>
           <a:solidFill>
-            <a:srgbClr val="123A6B"/>
+            <a:srgbClr val="0072CE"/>
           </a:solidFill>
           <a:ln>
             <a:noFill/>
@@ -14564,7 +13906,7 @@
             <a:r>
               <a:rPr sz="3400" b="1" i="0">
                 <a:solidFill>
-                  <a:srgbClr val="123A6B"/>
+                  <a:srgbClr val="0072CE"/>
                 </a:solidFill>
                 <a:latin typeface="Arial"/>
               </a:rPr>
@@ -14638,7 +13980,7 @@
             <a:r>
               <a:rPr sz="4200" b="1" i="0">
                 <a:solidFill>
-                  <a:srgbClr val="123A6B"/>
+                  <a:srgbClr val="0072CE"/>
                 </a:solidFill>
                 <a:latin typeface="Arial"/>
               </a:rPr>
@@ -14658,13 +14000,13 @@
         <p:spPr>
           <a:xfrm>
             <a:off x="6233160" y="2194560"/>
-            <a:ext cx="784098" cy="54864"/>
+            <a:ext cx="593303" cy="54864"/>
           </a:xfrm>
           <a:prstGeom prst="rect">
             <a:avLst/>
           </a:prstGeom>
           <a:solidFill>
-            <a:srgbClr val="123A6B"/>
+            <a:srgbClr val="0072CE"/>
           </a:solidFill>
           <a:ln>
             <a:noFill/>
@@ -14707,7 +14049,7 @@
             <a:r>
               <a:rPr sz="3400" b="1" i="0">
                 <a:solidFill>
-                  <a:srgbClr val="123A6B"/>
+                  <a:srgbClr val="0072CE"/>
                 </a:solidFill>
                 <a:latin typeface="Arial"/>
               </a:rPr>
@@ -14781,7 +14123,7 @@
             <a:r>
               <a:rPr sz="4200" b="1" i="0">
                 <a:solidFill>
-                  <a:srgbClr val="123A6B"/>
+                  <a:srgbClr val="0072CE"/>
                 </a:solidFill>
                 <a:latin typeface="Arial"/>
               </a:rPr>
@@ -14801,13 +14143,13 @@
         <p:spPr>
           <a:xfrm>
             <a:off x="9121140" y="2194560"/>
-            <a:ext cx="784098" cy="54864"/>
+            <a:ext cx="593303" cy="54864"/>
           </a:xfrm>
           <a:prstGeom prst="rect">
             <a:avLst/>
           </a:prstGeom>
           <a:solidFill>
-            <a:srgbClr val="123A6B"/>
+            <a:srgbClr val="0072CE"/>
           </a:solidFill>
           <a:ln>
             <a:noFill/>
@@ -14850,7 +14192,7 @@
             <a:r>
               <a:rPr sz="3400" b="1" i="0">
                 <a:solidFill>
-                  <a:srgbClr val="123A6B"/>
+                  <a:srgbClr val="0072CE"/>
                 </a:solidFill>
                 <a:latin typeface="Arial"/>
               </a:rPr>
@@ -14909,7 +14251,7 @@
 </p:sldLayout>
 </file>
 
-<file path=ppt/slideLayouts/slideLayout36.xml><?xml version="1.0" encoding="utf-8"?>
+<file path=ppt/slideLayouts/slideLayout35.xml><?xml version="1.0" encoding="utf-8"?>
 <p:sldLayout xmlns:a="http://schemas.openxmlformats.org/drawingml/2006/main" xmlns:r="http://schemas.openxmlformats.org/officeDocument/2006/relationships" xmlns:p="http://schemas.openxmlformats.org/presentationml/2006/main" type="blank" preserve="1">
   <p:cSld name="slidekit · Roadmap">
     <p:bg>
@@ -15441,7 +14783,7 @@
 </p:sldLayout>
 </file>
 
-<file path=ppt/slideLayouts/slideLayout37.xml><?xml version="1.0" encoding="utf-8"?>
+<file path=ppt/slideLayouts/slideLayout36.xml><?xml version="1.0" encoding="utf-8"?>
 <p:sldLayout xmlns:a="http://schemas.openxmlformats.org/drawingml/2006/main" xmlns:r="http://schemas.openxmlformats.org/officeDocument/2006/relationships" xmlns:p="http://schemas.openxmlformats.org/presentationml/2006/main" type="blank" preserve="1">
   <p:cSld name="slidekit · Funnel">
     <p:bg>
@@ -15820,7 +15162,7 @@
 </p:sldLayout>
 </file>
 
-<file path=ppt/slideLayouts/slideLayout38.xml><?xml version="1.0" encoding="utf-8"?>
+<file path=ppt/slideLayouts/slideLayout37.xml><?xml version="1.0" encoding="utf-8"?>
 <p:sldLayout xmlns:a="http://schemas.openxmlformats.org/drawingml/2006/main" xmlns:r="http://schemas.openxmlformats.org/officeDocument/2006/relationships" xmlns:p="http://schemas.openxmlformats.org/presentationml/2006/main" type="blank" preserve="1">
   <p:cSld name="slidekit · Nested Circles">
     <p:bg>
@@ -15927,7 +15269,7 @@
             <a:avLst/>
           </a:prstGeom>
           <a:solidFill>
-            <a:srgbClr val="5B6B82"/>
+            <a:srgbClr val="0A2240"/>
           </a:solidFill>
           <a:ln>
             <a:noFill/>
@@ -15991,7 +15333,7 @@
             <a:avLst/>
           </a:prstGeom>
           <a:solidFill>
-            <a:srgbClr val="123A6B"/>
+            <a:srgbClr val="0A2240"/>
           </a:solidFill>
           <a:ln>
             <a:noFill/>
@@ -16241,7 +15583,7 @@
 </p:sldLayout>
 </file>
 
-<file path=ppt/slideLayouts/slideLayout39.xml><?xml version="1.0" encoding="utf-8"?>
+<file path=ppt/slideLayouts/slideLayout38.xml><?xml version="1.0" encoding="utf-8"?>
 <p:sldLayout xmlns:a="http://schemas.openxmlformats.org/drawingml/2006/main" xmlns:r="http://schemas.openxmlformats.org/officeDocument/2006/relationships" xmlns:p="http://schemas.openxmlformats.org/presentationml/2006/main" type="blank" preserve="1">
   <p:cSld name="slidekit · Pyramid">
     <p:bg>
@@ -16348,7 +15690,7 @@
             <a:avLst/>
           </a:prstGeom>
           <a:solidFill>
-            <a:srgbClr val="123A6B"/>
+            <a:srgbClr val="0072CE"/>
           </a:solidFill>
           <a:ln>
             <a:noFill/>
@@ -16486,7 +15828,7 @@
             <a:avLst/>
           </a:prstGeom>
           <a:solidFill>
-            <a:srgbClr val="123A6B"/>
+            <a:srgbClr val="0072CE"/>
           </a:solidFill>
           <a:ln>
             <a:noFill/>
@@ -16603,6 +15945,533 @@
                 <a:latin typeface="Arial"/>
               </a:rPr>
               <a:t>Tactics</a:t>
+            </a:r>
+          </a:p>
+        </p:txBody>
+      </p:sp>
+    </p:spTree>
+    <p:extLst>
+      <p:ext uri="{BB962C8B-B14F-4D97-AF65-F5344CB8AC3E}">
+        <p14:creationId xmlns:p14="http://schemas.microsoft.com/office/powerpoint/2010/main" val="1212999818"/>
+      </p:ext>
+    </p:extLst>
+  </p:cSld>
+  <p:clrMapOvr>
+    <a:masterClrMapping/>
+  </p:clrMapOvr>
+</p:sldLayout>
+</file>
+
+<file path=ppt/slideLayouts/slideLayout39.xml><?xml version="1.0" encoding="utf-8"?>
+<p:sldLayout xmlns:a="http://schemas.openxmlformats.org/drawingml/2006/main" xmlns:r="http://schemas.openxmlformats.org/officeDocument/2006/relationships" xmlns:p="http://schemas.openxmlformats.org/presentationml/2006/main" type="blank" preserve="1">
+  <p:cSld name="slidekit · SWOT">
+    <p:bg>
+      <p:bgPr>
+        <a:solidFill>
+          <a:srgbClr val="FFFFFF"/>
+        </a:solidFill>
+        <a:effectLst/>
+      </p:bgPr>
+    </p:bg>
+    <p:spTree>
+      <p:nvGrpSpPr>
+        <p:cNvPr id="1" name=""/>
+        <p:cNvGrpSpPr/>
+        <p:nvPr/>
+      </p:nvGrpSpPr>
+      <p:grpSpPr>
+        <a:xfrm>
+          <a:off x="0" y="0"/>
+          <a:ext cx="0" cy="0"/>
+          <a:chOff x="0" y="0"/>
+          <a:chExt cx="0" cy="0"/>
+        </a:xfrm>
+      </p:grpSpPr>
+      <p:sp>
+        <p:nvSpPr>
+          <p:cNvPr id="4" name="Slide Number Placeholder 3"/>
+          <p:cNvSpPr>
+            <a:spLocks noGrp="1"/>
+          </p:cNvSpPr>
+          <p:nvPr>
+            <p:ph type="sldNum" sz="quarter" idx="12"/>
+          </p:nvPr>
+        </p:nvSpPr>
+        <p:spPr>
+          <a:xfrm>
+            <a:off x="11186160" y="6035040"/>
+            <a:ext cx="548640" cy="365760"/>
+          </a:xfrm>
+        </p:spPr>
+        <p:txBody>
+          <a:bodyPr/>
+          <a:lstStyle/>
+          <a:p>
+            <a:fld id="{C1FF6DA9-008F-8B48-92A6-B652298478BF}" type="slidenum">
+              <a:rPr lang="en-US" smtClean="0"/>
+              <a:t>‹#›</a:t>
+            </a:fld>
+            <a:endParaRPr lang="en-US"/>
+          </a:p>
+        </p:txBody>
+      </p:sp>
+      <p:sp>
+        <p:nvSpPr>
+          <p:cNvPr id="5" name="TextBox 4"/>
+          <p:cNvSpPr/>
+          <p:nvPr>
+            <p:ph type="title"/>
+          </p:nvPr>
+        </p:nvSpPr>
+        <p:spPr>
+          <a:xfrm>
+            <a:off x="457200" y="457200"/>
+            <a:ext cx="11277600" cy="768096"/>
+          </a:xfrm>
+          <a:prstGeom prst="rect">
+            <a:avLst/>
+          </a:prstGeom>
+          <a:noFill/>
+        </p:spPr>
+        <p:txBody>
+          <a:bodyPr wrap="none" lIns="0" rIns="0">
+            <a:noAutofit/>
+          </a:bodyPr>
+          <a:lstStyle/>
+          <a:p>
+            <a:pPr algn="l"/>
+            <a:r>
+              <a:rPr sz="4200" b="1" i="0">
+                <a:solidFill>
+                  <a:srgbClr val="0072CE"/>
+                </a:solidFill>
+                <a:latin typeface="Arial"/>
+              </a:rPr>
+              <a:t>SWOT Analysis</a:t>
+            </a:r>
+          </a:p>
+        </p:txBody>
+      </p:sp>
+      <p:sp>
+        <p:nvSpPr>
+          <p:cNvPr id="6" name="TextBox 5"/>
+          <p:cNvSpPr/>
+          <p:nvPr>
+            <p:ph type="body" idx="1"/>
+          </p:nvPr>
+        </p:nvSpPr>
+        <p:spPr>
+          <a:xfrm>
+            <a:off x="457200" y="1499616"/>
+            <a:ext cx="5501640" cy="621791"/>
+          </a:xfrm>
+          <a:prstGeom prst="rect">
+            <a:avLst/>
+          </a:prstGeom>
+          <a:noFill/>
+        </p:spPr>
+        <p:txBody>
+          <a:bodyPr wrap="none" lIns="0" rIns="0">
+            <a:noAutofit/>
+          </a:bodyPr>
+          <a:lstStyle/>
+          <a:p>
+            <a:pPr algn="l"/>
+            <a:r>
+              <a:rPr sz="3400" b="1" i="0">
+                <a:solidFill>
+                  <a:srgbClr val="0072CE"/>
+                </a:solidFill>
+                <a:latin typeface="Arial"/>
+              </a:rPr>
+              <a:t>Strengths</a:t>
+            </a:r>
+          </a:p>
+        </p:txBody>
+      </p:sp>
+      <p:sp>
+        <p:nvSpPr>
+          <p:cNvPr id="7" name="Rectangle 6"/>
+          <p:cNvSpPr/>
+          <p:nvPr>
+            <p:ph type="body" idx="2"/>
+          </p:nvPr>
+        </p:nvSpPr>
+        <p:spPr>
+          <a:xfrm>
+            <a:off x="457200" y="2176271"/>
+            <a:ext cx="2015207" cy="54864"/>
+          </a:xfrm>
+          <a:prstGeom prst="rect">
+            <a:avLst/>
+          </a:prstGeom>
+          <a:solidFill>
+            <a:srgbClr val="0072CE"/>
+          </a:solidFill>
+          <a:ln>
+            <a:noFill/>
+          </a:ln>
+          <a:effectLst/>
+        </p:spPr>
+        <p:txBody>
+          <a:bodyPr rtlCol="0" anchor="ctr"/>
+          <a:lstStyle/>
+          <a:p>
+            <a:pPr algn="ctr"/>
+          </a:p>
+        </p:txBody>
+      </p:sp>
+      <p:sp>
+        <p:nvSpPr>
+          <p:cNvPr id="8" name="TextBox 7"/>
+          <p:cNvSpPr/>
+          <p:nvPr>
+            <p:ph type="body" idx="3"/>
+          </p:nvPr>
+        </p:nvSpPr>
+        <p:spPr>
+          <a:xfrm>
+            <a:off x="457200" y="2395727"/>
+            <a:ext cx="7863523" cy="609600"/>
+          </a:xfrm>
+          <a:prstGeom prst="rect">
+            <a:avLst/>
+          </a:prstGeom>
+          <a:noFill/>
+        </p:spPr>
+        <p:txBody>
+          <a:bodyPr wrap="none" lIns="0" rIns="0">
+            <a:noAutofit/>
+          </a:bodyPr>
+          <a:lstStyle/>
+          <a:p>
+            <a:pPr algn="l"/>
+            <a:r>
+              <a:rPr sz="3400" b="0" i="0">
+                <a:solidFill>
+                  <a:srgbClr val="0A2240"/>
+                </a:solidFill>
+                <a:latin typeface="Arial"/>
+              </a:rPr>
+              <a:t>Strong brand, loyal users</a:t>
+            </a:r>
+          </a:p>
+        </p:txBody>
+      </p:sp>
+      <p:sp>
+        <p:nvSpPr>
+          <p:cNvPr id="9" name="TextBox 8"/>
+          <p:cNvSpPr/>
+          <p:nvPr>
+            <p:ph type="body" idx="4"/>
+          </p:nvPr>
+        </p:nvSpPr>
+        <p:spPr>
+          <a:xfrm>
+            <a:off x="6233160" y="1499616"/>
+            <a:ext cx="5501640" cy="621791"/>
+          </a:xfrm>
+          <a:prstGeom prst="rect">
+            <a:avLst/>
+          </a:prstGeom>
+          <a:noFill/>
+        </p:spPr>
+        <p:txBody>
+          <a:bodyPr wrap="none" lIns="0" rIns="0">
+            <a:noAutofit/>
+          </a:bodyPr>
+          <a:lstStyle/>
+          <a:p>
+            <a:pPr algn="l"/>
+            <a:r>
+              <a:rPr sz="3400" b="1" i="0">
+                <a:solidFill>
+                  <a:srgbClr val="0A2240"/>
+                </a:solidFill>
+                <a:latin typeface="Arial"/>
+              </a:rPr>
+              <a:t>Weaknesses</a:t>
+            </a:r>
+          </a:p>
+        </p:txBody>
+      </p:sp>
+      <p:sp>
+        <p:nvSpPr>
+          <p:cNvPr id="10" name="Rectangle 9"/>
+          <p:cNvSpPr/>
+          <p:nvPr>
+            <p:ph type="body" idx="5"/>
+          </p:nvPr>
+        </p:nvSpPr>
+        <p:spPr>
+          <a:xfrm>
+            <a:off x="6233160" y="2176271"/>
+            <a:ext cx="2584686" cy="54864"/>
+          </a:xfrm>
+          <a:prstGeom prst="rect">
+            <a:avLst/>
+          </a:prstGeom>
+          <a:solidFill>
+            <a:srgbClr val="0A2240"/>
+          </a:solidFill>
+          <a:ln>
+            <a:noFill/>
+          </a:ln>
+          <a:effectLst/>
+        </p:spPr>
+        <p:txBody>
+          <a:bodyPr rtlCol="0" anchor="ctr"/>
+          <a:lstStyle/>
+          <a:p>
+            <a:pPr algn="ctr"/>
+          </a:p>
+        </p:txBody>
+      </p:sp>
+      <p:sp>
+        <p:nvSpPr>
+          <p:cNvPr id="11" name="TextBox 10"/>
+          <p:cNvSpPr/>
+          <p:nvPr>
+            <p:ph type="body" idx="6"/>
+          </p:nvPr>
+        </p:nvSpPr>
+        <p:spPr>
+          <a:xfrm>
+            <a:off x="6233160" y="2395727"/>
+            <a:ext cx="5958840" cy="609600"/>
+          </a:xfrm>
+          <a:prstGeom prst="rect">
+            <a:avLst/>
+          </a:prstGeom>
+          <a:noFill/>
+        </p:spPr>
+        <p:txBody>
+          <a:bodyPr wrap="none" lIns="0" rIns="0">
+            <a:noAutofit/>
+          </a:bodyPr>
+          <a:lstStyle/>
+          <a:p>
+            <a:pPr algn="l"/>
+            <a:r>
+              <a:rPr sz="3400" b="0" i="0">
+                <a:solidFill>
+                  <a:srgbClr val="0A2240"/>
+                </a:solidFill>
+                <a:latin typeface="Arial"/>
+              </a:rPr>
+              <a:t>Thin margins, small team</a:t>
+            </a:r>
+          </a:p>
+        </p:txBody>
+      </p:sp>
+      <p:sp>
+        <p:nvSpPr>
+          <p:cNvPr id="12" name="TextBox 11"/>
+          <p:cNvSpPr/>
+          <p:nvPr>
+            <p:ph type="body" idx="7"/>
+          </p:nvPr>
+        </p:nvSpPr>
+        <p:spPr>
+          <a:xfrm>
+            <a:off x="457200" y="3767328"/>
+            <a:ext cx="5501640" cy="621791"/>
+          </a:xfrm>
+          <a:prstGeom prst="rect">
+            <a:avLst/>
+          </a:prstGeom>
+          <a:noFill/>
+        </p:spPr>
+        <p:txBody>
+          <a:bodyPr wrap="none" lIns="0" rIns="0">
+            <a:noAutofit/>
+          </a:bodyPr>
+          <a:lstStyle/>
+          <a:p>
+            <a:pPr algn="l"/>
+            <a:r>
+              <a:rPr sz="3400" b="1" i="0">
+                <a:solidFill>
+                  <a:srgbClr val="0072CE"/>
+                </a:solidFill>
+                <a:latin typeface="Arial"/>
+              </a:rPr>
+              <a:t>Opportunities</a:t>
+            </a:r>
+          </a:p>
+        </p:txBody>
+      </p:sp>
+      <p:sp>
+        <p:nvSpPr>
+          <p:cNvPr id="13" name="Rectangle 12"/>
+          <p:cNvSpPr/>
+          <p:nvPr>
+            <p:ph type="body" idx="8"/>
+          </p:nvPr>
+        </p:nvSpPr>
+        <p:spPr>
+          <a:xfrm>
+            <a:off x="457200" y="4443983"/>
+            <a:ext cx="2830525" cy="54864"/>
+          </a:xfrm>
+          <a:prstGeom prst="rect">
+            <a:avLst/>
+          </a:prstGeom>
+          <a:solidFill>
+            <a:srgbClr val="0072CE"/>
+          </a:solidFill>
+          <a:ln>
+            <a:noFill/>
+          </a:ln>
+          <a:effectLst/>
+        </p:spPr>
+        <p:txBody>
+          <a:bodyPr rtlCol="0" anchor="ctr"/>
+          <a:lstStyle/>
+          <a:p>
+            <a:pPr algn="ctr"/>
+          </a:p>
+        </p:txBody>
+      </p:sp>
+      <p:sp>
+        <p:nvSpPr>
+          <p:cNvPr id="14" name="TextBox 13"/>
+          <p:cNvSpPr/>
+          <p:nvPr>
+            <p:ph type="body" idx="9"/>
+          </p:nvPr>
+        </p:nvSpPr>
+        <p:spPr>
+          <a:xfrm>
+            <a:off x="457200" y="4663439"/>
+            <a:ext cx="8015326" cy="609600"/>
+          </a:xfrm>
+          <a:prstGeom prst="rect">
+            <a:avLst/>
+          </a:prstGeom>
+          <a:noFill/>
+        </p:spPr>
+        <p:txBody>
+          <a:bodyPr wrap="none" lIns="0" rIns="0">
+            <a:noAutofit/>
+          </a:bodyPr>
+          <a:lstStyle/>
+          <a:p>
+            <a:pPr algn="l"/>
+            <a:r>
+              <a:rPr sz="3400" b="0" i="0">
+                <a:solidFill>
+                  <a:srgbClr val="0A2240"/>
+                </a:solidFill>
+                <a:latin typeface="Arial"/>
+              </a:rPr>
+              <a:t>New markets via partners</a:t>
+            </a:r>
+          </a:p>
+        </p:txBody>
+      </p:sp>
+      <p:sp>
+        <p:nvSpPr>
+          <p:cNvPr id="15" name="TextBox 14"/>
+          <p:cNvSpPr/>
+          <p:nvPr>
+            <p:ph type="body" idx="13"/>
+          </p:nvPr>
+        </p:nvSpPr>
+        <p:spPr>
+          <a:xfrm>
+            <a:off x="6233160" y="3767328"/>
+            <a:ext cx="5501640" cy="621791"/>
+          </a:xfrm>
+          <a:prstGeom prst="rect">
+            <a:avLst/>
+          </a:prstGeom>
+          <a:noFill/>
+        </p:spPr>
+        <p:txBody>
+          <a:bodyPr wrap="none" lIns="0" rIns="0">
+            <a:noAutofit/>
+          </a:bodyPr>
+          <a:lstStyle/>
+          <a:p>
+            <a:pPr algn="l"/>
+            <a:r>
+              <a:rPr sz="3400" b="1" i="0">
+                <a:solidFill>
+                  <a:srgbClr val="0A2240"/>
+                </a:solidFill>
+                <a:latin typeface="Arial"/>
+              </a:rPr>
+              <a:t>Threats</a:t>
+            </a:r>
+          </a:p>
+        </p:txBody>
+      </p:sp>
+      <p:sp>
+        <p:nvSpPr>
+          <p:cNvPr id="16" name="Rectangle 15"/>
+          <p:cNvSpPr/>
+          <p:nvPr>
+            <p:ph type="body" idx="14"/>
+          </p:nvPr>
+        </p:nvSpPr>
+        <p:spPr>
+          <a:xfrm>
+            <a:off x="6233160" y="4443983"/>
+            <a:ext cx="1559793" cy="54864"/>
+          </a:xfrm>
+          <a:prstGeom prst="rect">
+            <a:avLst/>
+          </a:prstGeom>
+          <a:solidFill>
+            <a:srgbClr val="0A2240"/>
+          </a:solidFill>
+          <a:ln>
+            <a:noFill/>
+          </a:ln>
+          <a:effectLst/>
+        </p:spPr>
+        <p:txBody>
+          <a:bodyPr rtlCol="0" anchor="ctr"/>
+          <a:lstStyle/>
+          <a:p>
+            <a:pPr algn="ctr"/>
+          </a:p>
+        </p:txBody>
+      </p:sp>
+      <p:sp>
+        <p:nvSpPr>
+          <p:cNvPr id="17" name="TextBox 16"/>
+          <p:cNvSpPr/>
+          <p:nvPr>
+            <p:ph type="body" idx="15"/>
+          </p:nvPr>
+        </p:nvSpPr>
+        <p:spPr>
+          <a:xfrm>
+            <a:off x="6233160" y="4663439"/>
+            <a:ext cx="5958840" cy="609600"/>
+          </a:xfrm>
+          <a:prstGeom prst="rect">
+            <a:avLst/>
+          </a:prstGeom>
+          <a:noFill/>
+        </p:spPr>
+        <p:txBody>
+          <a:bodyPr wrap="none" lIns="0" rIns="0">
+            <a:noAutofit/>
+          </a:bodyPr>
+          <a:lstStyle/>
+          <a:p>
+            <a:pPr algn="l"/>
+            <a:r>
+              <a:rPr sz="3400" b="0" i="0">
+                <a:solidFill>
+                  <a:srgbClr val="0A2240"/>
+                </a:solidFill>
+                <a:latin typeface="Arial"/>
+              </a:rPr>
+              <a:t>New entrants cut prices</a:t>
             </a:r>
           </a:p>
         </p:txBody>
@@ -16909,533 +16778,6 @@
 </file>
 
 <file path=ppt/slideLayouts/slideLayout40.xml><?xml version="1.0" encoding="utf-8"?>
-<p:sldLayout xmlns:a="http://schemas.openxmlformats.org/drawingml/2006/main" xmlns:r="http://schemas.openxmlformats.org/officeDocument/2006/relationships" xmlns:p="http://schemas.openxmlformats.org/presentationml/2006/main" type="blank" preserve="1">
-  <p:cSld name="slidekit · SWOT">
-    <p:bg>
-      <p:bgPr>
-        <a:solidFill>
-          <a:srgbClr val="FFFFFF"/>
-        </a:solidFill>
-        <a:effectLst/>
-      </p:bgPr>
-    </p:bg>
-    <p:spTree>
-      <p:nvGrpSpPr>
-        <p:cNvPr id="1" name=""/>
-        <p:cNvGrpSpPr/>
-        <p:nvPr/>
-      </p:nvGrpSpPr>
-      <p:grpSpPr>
-        <a:xfrm>
-          <a:off x="0" y="0"/>
-          <a:ext cx="0" cy="0"/>
-          <a:chOff x="0" y="0"/>
-          <a:chExt cx="0" cy="0"/>
-        </a:xfrm>
-      </p:grpSpPr>
-      <p:sp>
-        <p:nvSpPr>
-          <p:cNvPr id="4" name="Slide Number Placeholder 3"/>
-          <p:cNvSpPr>
-            <a:spLocks noGrp="1"/>
-          </p:cNvSpPr>
-          <p:nvPr>
-            <p:ph type="sldNum" sz="quarter" idx="12"/>
-          </p:nvPr>
-        </p:nvSpPr>
-        <p:spPr>
-          <a:xfrm>
-            <a:off x="11186160" y="6035040"/>
-            <a:ext cx="548640" cy="365760"/>
-          </a:xfrm>
-        </p:spPr>
-        <p:txBody>
-          <a:bodyPr/>
-          <a:lstStyle/>
-          <a:p>
-            <a:fld id="{C1FF6DA9-008F-8B48-92A6-B652298478BF}" type="slidenum">
-              <a:rPr lang="en-US" smtClean="0"/>
-              <a:t>‹#›</a:t>
-            </a:fld>
-            <a:endParaRPr lang="en-US"/>
-          </a:p>
-        </p:txBody>
-      </p:sp>
-      <p:sp>
-        <p:nvSpPr>
-          <p:cNvPr id="5" name="TextBox 4"/>
-          <p:cNvSpPr/>
-          <p:nvPr>
-            <p:ph type="title"/>
-          </p:nvPr>
-        </p:nvSpPr>
-        <p:spPr>
-          <a:xfrm>
-            <a:off x="457200" y="457200"/>
-            <a:ext cx="11277600" cy="768096"/>
-          </a:xfrm>
-          <a:prstGeom prst="rect">
-            <a:avLst/>
-          </a:prstGeom>
-          <a:noFill/>
-        </p:spPr>
-        <p:txBody>
-          <a:bodyPr wrap="none" lIns="0" rIns="0">
-            <a:noAutofit/>
-          </a:bodyPr>
-          <a:lstStyle/>
-          <a:p>
-            <a:pPr algn="l"/>
-            <a:r>
-              <a:rPr sz="4200" b="1" i="0">
-                <a:solidFill>
-                  <a:srgbClr val="0072CE"/>
-                </a:solidFill>
-                <a:latin typeface="Arial"/>
-              </a:rPr>
-              <a:t>SWOT Analysis</a:t>
-            </a:r>
-          </a:p>
-        </p:txBody>
-      </p:sp>
-      <p:sp>
-        <p:nvSpPr>
-          <p:cNvPr id="6" name="TextBox 5"/>
-          <p:cNvSpPr/>
-          <p:nvPr>
-            <p:ph type="body" idx="1"/>
-          </p:nvPr>
-        </p:nvSpPr>
-        <p:spPr>
-          <a:xfrm>
-            <a:off x="457200" y="1499616"/>
-            <a:ext cx="5501640" cy="621791"/>
-          </a:xfrm>
-          <a:prstGeom prst="rect">
-            <a:avLst/>
-          </a:prstGeom>
-          <a:noFill/>
-        </p:spPr>
-        <p:txBody>
-          <a:bodyPr wrap="none" lIns="0" rIns="0">
-            <a:noAutofit/>
-          </a:bodyPr>
-          <a:lstStyle/>
-          <a:p>
-            <a:pPr algn="l"/>
-            <a:r>
-              <a:rPr sz="3400" b="1" i="0">
-                <a:solidFill>
-                  <a:srgbClr val="0072CE"/>
-                </a:solidFill>
-                <a:latin typeface="Arial"/>
-              </a:rPr>
-              <a:t>Strengths</a:t>
-            </a:r>
-          </a:p>
-        </p:txBody>
-      </p:sp>
-      <p:sp>
-        <p:nvSpPr>
-          <p:cNvPr id="7" name="Rectangle 6"/>
-          <p:cNvSpPr/>
-          <p:nvPr>
-            <p:ph type="body" idx="2"/>
-          </p:nvPr>
-        </p:nvSpPr>
-        <p:spPr>
-          <a:xfrm>
-            <a:off x="457200" y="2176271"/>
-            <a:ext cx="1650492" cy="54864"/>
-          </a:xfrm>
-          <a:prstGeom prst="rect">
-            <a:avLst/>
-          </a:prstGeom>
-          <a:solidFill>
-            <a:srgbClr val="0072CE"/>
-          </a:solidFill>
-          <a:ln>
-            <a:noFill/>
-          </a:ln>
-          <a:effectLst/>
-        </p:spPr>
-        <p:txBody>
-          <a:bodyPr rtlCol="0" anchor="ctr"/>
-          <a:lstStyle/>
-          <a:p>
-            <a:pPr algn="ctr"/>
-          </a:p>
-        </p:txBody>
-      </p:sp>
-      <p:sp>
-        <p:nvSpPr>
-          <p:cNvPr id="8" name="TextBox 7"/>
-          <p:cNvSpPr/>
-          <p:nvPr>
-            <p:ph type="body" idx="3"/>
-          </p:nvPr>
-        </p:nvSpPr>
-        <p:spPr>
-          <a:xfrm>
-            <a:off x="457200" y="2395727"/>
-            <a:ext cx="5501640" cy="1097281"/>
-          </a:xfrm>
-          <a:prstGeom prst="rect">
-            <a:avLst/>
-          </a:prstGeom>
-          <a:noFill/>
-        </p:spPr>
-        <p:txBody>
-          <a:bodyPr wrap="square" lIns="0" rIns="0">
-            <a:noAutofit/>
-          </a:bodyPr>
-          <a:lstStyle/>
-          <a:p>
-            <a:pPr algn="l"/>
-            <a:r>
-              <a:rPr sz="3400" b="0" i="0">
-                <a:solidFill>
-                  <a:srgbClr val="0A2240"/>
-                </a:solidFill>
-                <a:latin typeface="Arial"/>
-              </a:rPr>
-              <a:t>A strong brand with loyal users</a:t>
-            </a:r>
-          </a:p>
-        </p:txBody>
-      </p:sp>
-      <p:sp>
-        <p:nvSpPr>
-          <p:cNvPr id="9" name="TextBox 8"/>
-          <p:cNvSpPr/>
-          <p:nvPr>
-            <p:ph type="body" idx="4"/>
-          </p:nvPr>
-        </p:nvSpPr>
-        <p:spPr>
-          <a:xfrm>
-            <a:off x="6233160" y="1499616"/>
-            <a:ext cx="5501640" cy="621791"/>
-          </a:xfrm>
-          <a:prstGeom prst="rect">
-            <a:avLst/>
-          </a:prstGeom>
-          <a:noFill/>
-        </p:spPr>
-        <p:txBody>
-          <a:bodyPr wrap="none" lIns="0" rIns="0">
-            <a:noAutofit/>
-          </a:bodyPr>
-          <a:lstStyle/>
-          <a:p>
-            <a:pPr algn="l"/>
-            <a:r>
-              <a:rPr sz="3400" b="1" i="0">
-                <a:solidFill>
-                  <a:srgbClr val="5B6B82"/>
-                </a:solidFill>
-                <a:latin typeface="Arial"/>
-              </a:rPr>
-              <a:t>Weaknesses</a:t>
-            </a:r>
-          </a:p>
-        </p:txBody>
-      </p:sp>
-      <p:sp>
-        <p:nvSpPr>
-          <p:cNvPr id="10" name="Rectangle 9"/>
-          <p:cNvSpPr/>
-          <p:nvPr>
-            <p:ph type="body" idx="5"/>
-          </p:nvPr>
-        </p:nvSpPr>
-        <p:spPr>
-          <a:xfrm>
-            <a:off x="6233160" y="2176271"/>
-            <a:ext cx="1650492" cy="54864"/>
-          </a:xfrm>
-          <a:prstGeom prst="rect">
-            <a:avLst/>
-          </a:prstGeom>
-          <a:solidFill>
-            <a:srgbClr val="5B6B82"/>
-          </a:solidFill>
-          <a:ln>
-            <a:noFill/>
-          </a:ln>
-          <a:effectLst/>
-        </p:spPr>
-        <p:txBody>
-          <a:bodyPr rtlCol="0" anchor="ctr"/>
-          <a:lstStyle/>
-          <a:p>
-            <a:pPr algn="ctr"/>
-          </a:p>
-        </p:txBody>
-      </p:sp>
-      <p:sp>
-        <p:nvSpPr>
-          <p:cNvPr id="11" name="TextBox 10"/>
-          <p:cNvSpPr/>
-          <p:nvPr>
-            <p:ph type="body" idx="6"/>
-          </p:nvPr>
-        </p:nvSpPr>
-        <p:spPr>
-          <a:xfrm>
-            <a:off x="6233160" y="2395727"/>
-            <a:ext cx="5501640" cy="1097281"/>
-          </a:xfrm>
-          <a:prstGeom prst="rect">
-            <a:avLst/>
-          </a:prstGeom>
-          <a:noFill/>
-        </p:spPr>
-        <p:txBody>
-          <a:bodyPr wrap="square" lIns="0" rIns="0">
-            <a:noAutofit/>
-          </a:bodyPr>
-          <a:lstStyle/>
-          <a:p>
-            <a:pPr algn="l"/>
-            <a:r>
-              <a:rPr sz="3400" b="0" i="0">
-                <a:solidFill>
-                  <a:srgbClr val="0A2240"/>
-                </a:solidFill>
-                <a:latin typeface="Arial"/>
-              </a:rPr>
-              <a:t>Thin margins and a small team</a:t>
-            </a:r>
-          </a:p>
-        </p:txBody>
-      </p:sp>
-      <p:sp>
-        <p:nvSpPr>
-          <p:cNvPr id="12" name="TextBox 11"/>
-          <p:cNvSpPr/>
-          <p:nvPr>
-            <p:ph type="body" idx="7"/>
-          </p:nvPr>
-        </p:nvSpPr>
-        <p:spPr>
-          <a:xfrm>
-            <a:off x="457200" y="3767328"/>
-            <a:ext cx="5501640" cy="621791"/>
-          </a:xfrm>
-          <a:prstGeom prst="rect">
-            <a:avLst/>
-          </a:prstGeom>
-          <a:noFill/>
-        </p:spPr>
-        <p:txBody>
-          <a:bodyPr wrap="none" lIns="0" rIns="0">
-            <a:noAutofit/>
-          </a:bodyPr>
-          <a:lstStyle/>
-          <a:p>
-            <a:pPr algn="l"/>
-            <a:r>
-              <a:rPr sz="3400" b="1" i="0">
-                <a:solidFill>
-                  <a:srgbClr val="0072CE"/>
-                </a:solidFill>
-                <a:latin typeface="Arial"/>
-              </a:rPr>
-              <a:t>Opportunities</a:t>
-            </a:r>
-          </a:p>
-        </p:txBody>
-      </p:sp>
-      <p:sp>
-        <p:nvSpPr>
-          <p:cNvPr id="13" name="Rectangle 12"/>
-          <p:cNvSpPr/>
-          <p:nvPr>
-            <p:ph type="body" idx="8"/>
-          </p:nvPr>
-        </p:nvSpPr>
-        <p:spPr>
-          <a:xfrm>
-            <a:off x="457200" y="4443983"/>
-            <a:ext cx="1650492" cy="54864"/>
-          </a:xfrm>
-          <a:prstGeom prst="rect">
-            <a:avLst/>
-          </a:prstGeom>
-          <a:solidFill>
-            <a:srgbClr val="0072CE"/>
-          </a:solidFill>
-          <a:ln>
-            <a:noFill/>
-          </a:ln>
-          <a:effectLst/>
-        </p:spPr>
-        <p:txBody>
-          <a:bodyPr rtlCol="0" anchor="ctr"/>
-          <a:lstStyle/>
-          <a:p>
-            <a:pPr algn="ctr"/>
-          </a:p>
-        </p:txBody>
-      </p:sp>
-      <p:sp>
-        <p:nvSpPr>
-          <p:cNvPr id="14" name="TextBox 13"/>
-          <p:cNvSpPr/>
-          <p:nvPr>
-            <p:ph type="body" idx="9"/>
-          </p:nvPr>
-        </p:nvSpPr>
-        <p:spPr>
-          <a:xfrm>
-            <a:off x="457200" y="4663439"/>
-            <a:ext cx="5501640" cy="1097281"/>
-          </a:xfrm>
-          <a:prstGeom prst="rect">
-            <a:avLst/>
-          </a:prstGeom>
-          <a:noFill/>
-        </p:spPr>
-        <p:txBody>
-          <a:bodyPr wrap="square" lIns="0" rIns="0">
-            <a:noAutofit/>
-          </a:bodyPr>
-          <a:lstStyle/>
-          <a:p>
-            <a:pPr algn="l"/>
-            <a:r>
-              <a:rPr sz="3400" b="0" i="0">
-                <a:solidFill>
-                  <a:srgbClr val="0A2240"/>
-                </a:solidFill>
-                <a:latin typeface="Arial"/>
-              </a:rPr>
-              <a:t>New markets through partnerships</a:t>
-            </a:r>
-          </a:p>
-        </p:txBody>
-      </p:sp>
-      <p:sp>
-        <p:nvSpPr>
-          <p:cNvPr id="15" name="TextBox 14"/>
-          <p:cNvSpPr/>
-          <p:nvPr>
-            <p:ph type="body" idx="13"/>
-          </p:nvPr>
-        </p:nvSpPr>
-        <p:spPr>
-          <a:xfrm>
-            <a:off x="6233160" y="3767328"/>
-            <a:ext cx="5501640" cy="621791"/>
-          </a:xfrm>
-          <a:prstGeom prst="rect">
-            <a:avLst/>
-          </a:prstGeom>
-          <a:noFill/>
-        </p:spPr>
-        <p:txBody>
-          <a:bodyPr wrap="none" lIns="0" rIns="0">
-            <a:noAutofit/>
-          </a:bodyPr>
-          <a:lstStyle/>
-          <a:p>
-            <a:pPr algn="l"/>
-            <a:r>
-              <a:rPr sz="3400" b="1" i="0">
-                <a:solidFill>
-                  <a:srgbClr val="5B6B82"/>
-                </a:solidFill>
-                <a:latin typeface="Arial"/>
-              </a:rPr>
-              <a:t>Threats</a:t>
-            </a:r>
-          </a:p>
-        </p:txBody>
-      </p:sp>
-      <p:sp>
-        <p:nvSpPr>
-          <p:cNvPr id="16" name="Rectangle 15"/>
-          <p:cNvSpPr/>
-          <p:nvPr>
-            <p:ph type="body" idx="14"/>
-          </p:nvPr>
-        </p:nvSpPr>
-        <p:spPr>
-          <a:xfrm>
-            <a:off x="6233160" y="4443983"/>
-            <a:ext cx="1650492" cy="54864"/>
-          </a:xfrm>
-          <a:prstGeom prst="rect">
-            <a:avLst/>
-          </a:prstGeom>
-          <a:solidFill>
-            <a:srgbClr val="5B6B82"/>
-          </a:solidFill>
-          <a:ln>
-            <a:noFill/>
-          </a:ln>
-          <a:effectLst/>
-        </p:spPr>
-        <p:txBody>
-          <a:bodyPr rtlCol="0" anchor="ctr"/>
-          <a:lstStyle/>
-          <a:p>
-            <a:pPr algn="ctr"/>
-          </a:p>
-        </p:txBody>
-      </p:sp>
-      <p:sp>
-        <p:nvSpPr>
-          <p:cNvPr id="17" name="TextBox 16"/>
-          <p:cNvSpPr/>
-          <p:nvPr>
-            <p:ph type="body" idx="15"/>
-          </p:nvPr>
-        </p:nvSpPr>
-        <p:spPr>
-          <a:xfrm>
-            <a:off x="6233160" y="4663439"/>
-            <a:ext cx="5501640" cy="1097281"/>
-          </a:xfrm>
-          <a:prstGeom prst="rect">
-            <a:avLst/>
-          </a:prstGeom>
-          <a:noFill/>
-        </p:spPr>
-        <p:txBody>
-          <a:bodyPr wrap="square" lIns="0" rIns="0">
-            <a:noAutofit/>
-          </a:bodyPr>
-          <a:lstStyle/>
-          <a:p>
-            <a:pPr algn="l"/>
-            <a:r>
-              <a:rPr sz="3400" b="0" i="0">
-                <a:solidFill>
-                  <a:srgbClr val="0A2240"/>
-                </a:solidFill>
-                <a:latin typeface="Arial"/>
-              </a:rPr>
-              <a:t>New entrants driving price pressure</a:t>
-            </a:r>
-          </a:p>
-        </p:txBody>
-      </p:sp>
-    </p:spTree>
-    <p:extLst>
-      <p:ext uri="{BB962C8B-B14F-4D97-AF65-F5344CB8AC3E}">
-        <p14:creationId xmlns:p14="http://schemas.microsoft.com/office/powerpoint/2010/main" val="1212999818"/>
-      </p:ext>
-    </p:extLst>
-  </p:cSld>
-  <p:clrMapOvr>
-    <a:masterClrMapping/>
-  </p:clrMapOvr>
-</p:sldLayout>
-</file>
-
-<file path=ppt/slideLayouts/slideLayout41.xml><?xml version="1.0" encoding="utf-8"?>
 <p:sldLayout xmlns:a="http://schemas.openxmlformats.org/drawingml/2006/main" xmlns:r="http://schemas.openxmlformats.org/officeDocument/2006/relationships" xmlns:p="http://schemas.openxmlformats.org/presentationml/2006/main" type="blank" preserve="1">
   <p:cSld name="slidekit · Comparison Matrix">
     <p:bg>
@@ -19639,7 +18981,6 @@
     <p:sldLayoutId id="2147483738" r:id="rId39"/>
     <p:sldLayoutId id="2147483739" r:id="rId40"/>
     <p:sldLayoutId id="2147483740" r:id="rId41"/>
-    <p:sldLayoutId id="2147483741" r:id="rId42"/>
   </p:sldLayoutIdLst>
   <p:txStyles>
     <p:titleStyle>
@@ -20150,7 +19491,7 @@
             <a:fld id="{4B0E1F8A-6C1D-4E2A-9F3B-7A5C8D2E1F60}" type="slidenum">
               <a:rPr sz="1600" b="0" i="0">
                 <a:solidFill>
-                  <a:srgbClr val="5B6B82"/>
+                  <a:srgbClr val="0A2240"/>
                 </a:solidFill>
                 <a:latin typeface="Arial"/>
               </a:rPr>
@@ -20388,7 +19729,7 @@
             <a:fld id="{4B0E1F8A-6C1D-4E2A-9F3B-7A5C8D2E1F60}" type="slidenum">
               <a:rPr sz="1600" b="0" i="0">
                 <a:solidFill>
-                  <a:srgbClr val="5B6B82"/>
+                  <a:srgbClr val="0A2240"/>
                 </a:solidFill>
                 <a:latin typeface="Arial"/>
               </a:rPr>
@@ -20484,7 +19825,7 @@
             <a:r>
               <a:rPr sz="4200" b="1" i="0">
                 <a:solidFill>
-                  <a:srgbClr val="123A6B"/>
+                  <a:srgbClr val="0072CE"/>
                 </a:solidFill>
                 <a:latin typeface="Arial"/>
               </a:rPr>
@@ -20519,7 +19860,7 @@
             <a:r>
               <a:rPr sz="4200" b="1" i="0">
                 <a:solidFill>
-                  <a:srgbClr val="123A6B"/>
+                  <a:srgbClr val="0072CE"/>
                 </a:solidFill>
                 <a:latin typeface="Arial"/>
               </a:rPr>
@@ -20589,7 +19930,7 @@
             <a:r>
               <a:rPr sz="4200" b="1" i="0">
                 <a:solidFill>
-                  <a:srgbClr val="123A6B"/>
+                  <a:srgbClr val="0072CE"/>
                 </a:solidFill>
                 <a:latin typeface="Arial"/>
               </a:rPr>
@@ -20624,7 +19965,7 @@
             <a:r>
               <a:rPr sz="4200" b="1" i="0">
                 <a:solidFill>
-                  <a:srgbClr val="123A6B"/>
+                  <a:srgbClr val="0072CE"/>
                 </a:solidFill>
                 <a:latin typeface="Arial"/>
               </a:rPr>
@@ -20694,7 +20035,7 @@
             <a:r>
               <a:rPr sz="4200" b="1" i="0">
                 <a:solidFill>
-                  <a:srgbClr val="123A6B"/>
+                  <a:srgbClr val="0072CE"/>
                 </a:solidFill>
                 <a:latin typeface="Arial"/>
               </a:rPr>
@@ -20729,7 +20070,7 @@
             <a:r>
               <a:rPr sz="4200" b="1" i="0">
                 <a:solidFill>
-                  <a:srgbClr val="123A6B"/>
+                  <a:srgbClr val="0072CE"/>
                 </a:solidFill>
                 <a:latin typeface="Arial"/>
               </a:rPr>
@@ -20801,7 +20142,7 @@
             <a:fld id="{4B0E1F8A-6C1D-4E2A-9F3B-7A5C8D2E1F60}" type="slidenum">
               <a:rPr sz="1600" b="0" i="0">
                 <a:solidFill>
-                  <a:srgbClr val="5B6B82"/>
+                  <a:srgbClr val="0A2240"/>
                 </a:solidFill>
                 <a:latin typeface="Arial"/>
               </a:rPr>
@@ -21039,7 +20380,7 @@
             <a:fld id="{4B0E1F8A-6C1D-4E2A-9F3B-7A5C8D2E1F60}" type="slidenum">
               <a:rPr sz="1600" b="0" i="0">
                 <a:solidFill>
-                  <a:srgbClr val="5B6B82"/>
+                  <a:srgbClr val="0A2240"/>
                 </a:solidFill>
                 <a:latin typeface="Arial"/>
               </a:rPr>
@@ -21135,7 +20476,7 @@
             <a:r>
               <a:rPr sz="4200" b="1" i="0">
                 <a:solidFill>
-                  <a:srgbClr val="123A6B"/>
+                  <a:srgbClr val="0072CE"/>
                 </a:solidFill>
                 <a:latin typeface="Arial"/>
               </a:rPr>
@@ -21170,7 +20511,7 @@
             <a:r>
               <a:rPr sz="4200" b="1" i="0">
                 <a:solidFill>
-                  <a:srgbClr val="123A6B"/>
+                  <a:srgbClr val="0072CE"/>
                 </a:solidFill>
                 <a:latin typeface="Arial"/>
               </a:rPr>
@@ -21240,7 +20581,7 @@
             <a:r>
               <a:rPr sz="4200" b="1" i="0">
                 <a:solidFill>
-                  <a:srgbClr val="123A6B"/>
+                  <a:srgbClr val="0072CE"/>
                 </a:solidFill>
                 <a:latin typeface="Arial"/>
               </a:rPr>
@@ -21275,7 +20616,7 @@
             <a:r>
               <a:rPr sz="4200" b="1" i="0">
                 <a:solidFill>
-                  <a:srgbClr val="123A6B"/>
+                  <a:srgbClr val="0072CE"/>
                 </a:solidFill>
                 <a:latin typeface="Arial"/>
               </a:rPr>
@@ -21345,7 +20686,7 @@
             <a:r>
               <a:rPr sz="4200" b="1" i="0">
                 <a:solidFill>
-                  <a:srgbClr val="123A6B"/>
+                  <a:srgbClr val="0072CE"/>
                 </a:solidFill>
                 <a:latin typeface="Arial"/>
               </a:rPr>
@@ -21380,7 +20721,7 @@
             <a:r>
               <a:rPr sz="4200" b="1" i="0">
                 <a:solidFill>
-                  <a:srgbClr val="123A6B"/>
+                  <a:srgbClr val="0072CE"/>
                 </a:solidFill>
                 <a:latin typeface="Arial"/>
               </a:rPr>
@@ -21452,7 +20793,7 @@
             <a:fld id="{4B0E1F8A-6C1D-4E2A-9F3B-7A5C8D2E1F60}" type="slidenum">
               <a:rPr sz="1600" b="0" i="0">
                 <a:solidFill>
-                  <a:srgbClr val="5B6B82"/>
+                  <a:srgbClr val="0A2240"/>
                 </a:solidFill>
                 <a:latin typeface="Arial"/>
               </a:rPr>
@@ -21690,7 +21031,7 @@
             <a:fld id="{4B0E1F8A-6C1D-4E2A-9F3B-7A5C8D2E1F60}" type="slidenum">
               <a:rPr sz="1600" b="0" i="0">
                 <a:solidFill>
-                  <a:srgbClr val="5B6B82"/>
+                  <a:srgbClr val="0A2240"/>
                 </a:solidFill>
                 <a:latin typeface="Arial"/>
               </a:rPr>
@@ -22305,7 +21646,7 @@
             <a:fld id="{4B0E1F8A-6C1D-4E2A-9F3B-7A5C8D2E1F60}" type="slidenum">
               <a:rPr sz="1600" b="0" i="0">
                 <a:solidFill>
-                  <a:srgbClr val="5B6B82"/>
+                  <a:srgbClr val="0A2240"/>
                 </a:solidFill>
                 <a:latin typeface="Arial"/>
               </a:rPr>
@@ -22543,7 +21884,7 @@
             <a:fld id="{4B0E1F8A-6C1D-4E2A-9F3B-7A5C8D2E1F60}" type="slidenum">
               <a:rPr sz="1600" b="0" i="0">
                 <a:solidFill>
-                  <a:srgbClr val="5B6B82"/>
+                  <a:srgbClr val="0A2240"/>
                 </a:solidFill>
                 <a:latin typeface="Arial"/>
               </a:rPr>
@@ -22851,7 +22192,7 @@
             <a:fld id="{4B0E1F8A-6C1D-4E2A-9F3B-7A5C8D2E1F60}" type="slidenum">
               <a:rPr sz="1600" b="0" i="0">
                 <a:solidFill>
-                  <a:srgbClr val="5B6B82"/>
+                  <a:srgbClr val="0A2240"/>
                 </a:solidFill>
                 <a:latin typeface="Arial"/>
               </a:rPr>
@@ -22947,7 +22288,7 @@
             <a:r>
               <a:rPr sz="3400" b="1" i="0">
                 <a:solidFill>
-                  <a:srgbClr val="5B6B82"/>
+                  <a:srgbClr val="0A2240"/>
                 </a:solidFill>
                 <a:latin typeface="Arial"/>
               </a:rPr>
@@ -22964,14 +22305,14 @@
         </p:nvSpPr>
         <p:spPr>
           <a:xfrm>
-            <a:off x="548640" y="2176271"/>
-            <a:ext cx="1650492" cy="54864"/>
+            <a:off x="457200" y="2176271"/>
+            <a:ext cx="2110929" cy="54864"/>
           </a:xfrm>
           <a:prstGeom prst="rect">
             <a:avLst/>
           </a:prstGeom>
           <a:solidFill>
-            <a:srgbClr val="5B6B82"/>
+            <a:srgbClr val="0A2240"/>
           </a:solidFill>
           <a:ln>
             <a:noFill/>
@@ -23043,8 +22384,8 @@
         </p:nvSpPr>
         <p:spPr>
           <a:xfrm>
-            <a:off x="6324600" y="2176271"/>
-            <a:ext cx="1650492" cy="54864"/>
+            <a:off x="6233160" y="2176271"/>
+            <a:ext cx="1319647" cy="54864"/>
           </a:xfrm>
           <a:prstGeom prst="rect">
             <a:avLst/>
@@ -23317,7 +22658,7 @@
             <a:fld id="{4B0E1F8A-6C1D-4E2A-9F3B-7A5C8D2E1F60}" type="slidenum">
               <a:rPr sz="1600" b="0" i="0">
                 <a:solidFill>
-                  <a:srgbClr val="5B6B82"/>
+                  <a:srgbClr val="0A2240"/>
                 </a:solidFill>
                 <a:latin typeface="Arial"/>
               </a:rPr>
@@ -23492,7 +22833,7 @@
             <a:r>
               <a:rPr sz="3400" b="0" i="0">
                 <a:solidFill>
-                  <a:srgbClr val="5B6B82"/>
+                  <a:srgbClr val="0A2240"/>
                 </a:solidFill>
                 <a:latin typeface="Arial"/>
               </a:rPr>
@@ -23529,7 +22870,7 @@
             <a:fld id="{4B0E1F8A-6C1D-4E2A-9F3B-7A5C8D2E1F60}" type="slidenum">
               <a:rPr sz="1600" b="0" i="0">
                 <a:solidFill>
-                  <a:srgbClr val="5B6B82"/>
+                  <a:srgbClr val="0A2240"/>
                 </a:solidFill>
                 <a:latin typeface="Arial"/>
               </a:rPr>
@@ -23579,7 +22920,7 @@
             <a:avLst/>
           </a:prstGeom>
           <a:solidFill>
-            <a:srgbClr val="FF5F56"/>
+            <a:srgbClr val="FFFFFF"/>
           </a:solidFill>
           <a:ln>
             <a:noFill/>
@@ -23623,7 +22964,7 @@
             <a:avLst/>
           </a:prstGeom>
           <a:solidFill>
-            <a:srgbClr val="FFBD2E"/>
+            <a:srgbClr val="FFFFFF"/>
           </a:solidFill>
           <a:ln>
             <a:noFill/>
@@ -23667,7 +23008,7 @@
             <a:avLst/>
           </a:prstGeom>
           <a:solidFill>
-            <a:srgbClr val="27C93F"/>
+            <a:srgbClr val="FFFFFF"/>
           </a:solidFill>
           <a:ln>
             <a:noFill/>
@@ -23722,7 +23063,7 @@
             <a:r>
               <a:rPr sz="4200" b="0" i="0">
                 <a:solidFill>
-                  <a:srgbClr val="D4D4D4"/>
+                  <a:srgbClr val="FFFFFF"/>
                 </a:solidFill>
                 <a:latin typeface="Arial"/>
               </a:rPr>
@@ -23757,7 +23098,7 @@
             <a:r>
               <a:rPr sz="3400" b="0" i="0">
                 <a:solidFill>
-                  <a:srgbClr val="6A9955"/>
+                  <a:srgbClr val="FFFFFF"/>
                 </a:solidFill>
                 <a:latin typeface="Arial"/>
               </a:rPr>
@@ -23792,7 +23133,7 @@
             <a:r>
               <a:rPr sz="3400" b="0" i="0">
                 <a:solidFill>
-                  <a:srgbClr val="D4D4D4"/>
+                  <a:srgbClr val="FFFFFF"/>
                 </a:solidFill>
                 <a:latin typeface="Arial"/>
               </a:rPr>
@@ -23827,7 +23168,7 @@
             <a:r>
               <a:rPr sz="3400" b="0" i="0">
                 <a:solidFill>
-                  <a:srgbClr val="D4D4D4"/>
+                  <a:srgbClr val="FFFFFF"/>
                 </a:solidFill>
                 <a:latin typeface="Arial"/>
               </a:rPr>
@@ -23862,7 +23203,7 @@
             <a:r>
               <a:rPr sz="3400" b="0" i="0">
                 <a:solidFill>
-                  <a:srgbClr val="D4D4D4"/>
+                  <a:srgbClr val="FFFFFF"/>
                 </a:solidFill>
                 <a:latin typeface="Arial"/>
               </a:rPr>
@@ -23897,7 +23238,7 @@
             <a:r>
               <a:rPr sz="3400" b="0" i="0">
                 <a:solidFill>
-                  <a:srgbClr val="D4D4D4"/>
+                  <a:srgbClr val="FFFFFF"/>
                 </a:solidFill>
                 <a:latin typeface="Arial"/>
               </a:rPr>
@@ -23934,7 +23275,7 @@
             <a:fld id="{4B0E1F8A-6C1D-4E2A-9F3B-7A5C8D2E1F60}" type="slidenum">
               <a:rPr sz="1600" b="0" i="0">
                 <a:solidFill>
-                  <a:srgbClr val="5B6B82"/>
+                  <a:srgbClr val="0A2240"/>
                 </a:solidFill>
                 <a:latin typeface="Arial"/>
               </a:rPr>
@@ -24172,7 +23513,7 @@
             <a:fld id="{4B0E1F8A-6C1D-4E2A-9F3B-7A5C8D2E1F60}" type="slidenum">
               <a:rPr sz="1600" b="0" i="0">
                 <a:solidFill>
-                  <a:srgbClr val="5B6B82"/>
+                  <a:srgbClr val="0A2240"/>
                 </a:solidFill>
                 <a:latin typeface="Arial"/>
               </a:rPr>
@@ -24349,7 +23690,7 @@
             <a:fld id="{4B0E1F8A-6C1D-4E2A-9F3B-7A5C8D2E1F60}" type="slidenum">
               <a:rPr sz="1600" b="0" i="0">
                 <a:solidFill>
-                  <a:srgbClr val="5B6B82"/>
+                  <a:srgbClr val="0A2240"/>
                 </a:solidFill>
                 <a:latin typeface="Arial"/>
               </a:rPr>
@@ -24491,7 +23832,7 @@
             <a:fld id="{4B0E1F8A-6C1D-4E2A-9F3B-7A5C8D2E1F60}" type="slidenum">
               <a:rPr sz="1600" b="0" i="0">
                 <a:solidFill>
-                  <a:srgbClr val="5B6B82"/>
+                  <a:srgbClr val="0A2240"/>
                 </a:solidFill>
                 <a:latin typeface="Arial"/>
               </a:rPr>
@@ -24729,7 +24070,7 @@
             <a:fld id="{4B0E1F8A-6C1D-4E2A-9F3B-7A5C8D2E1F60}" type="slidenum">
               <a:rPr sz="1600" b="0" i="0">
                 <a:solidFill>
-                  <a:srgbClr val="5B6B82"/>
+                  <a:srgbClr val="0A2240"/>
                 </a:solidFill>
                 <a:latin typeface="Arial"/>
               </a:rPr>
@@ -24906,7 +24247,7 @@
             <a:fld id="{4B0E1F8A-6C1D-4E2A-9F3B-7A5C8D2E1F60}" type="slidenum">
               <a:rPr sz="1600" b="0" i="0">
                 <a:solidFill>
-                  <a:srgbClr val="5B6B82"/>
+                  <a:srgbClr val="0A2240"/>
                 </a:solidFill>
                 <a:latin typeface="Arial"/>
               </a:rPr>
@@ -25002,7 +24343,7 @@
             <a:r>
               <a:rPr sz="4200" b="1" i="0">
                 <a:solidFill>
-                  <a:srgbClr val="123A6B"/>
+                  <a:srgbClr val="0072CE"/>
                 </a:solidFill>
                 <a:latin typeface="Arial"/>
               </a:rPr>
@@ -25037,7 +24378,7 @@
             <a:r>
               <a:rPr sz="4200" b="1" i="0">
                 <a:solidFill>
-                  <a:srgbClr val="123A6B"/>
+                  <a:srgbClr val="0072CE"/>
                 </a:solidFill>
                 <a:latin typeface="Arial"/>
               </a:rPr>
@@ -25107,7 +24448,7 @@
             <a:r>
               <a:rPr sz="4200" b="1" i="0">
                 <a:solidFill>
-                  <a:srgbClr val="123A6B"/>
+                  <a:srgbClr val="0072CE"/>
                 </a:solidFill>
                 <a:latin typeface="Arial"/>
               </a:rPr>
@@ -25142,7 +24483,7 @@
             <a:r>
               <a:rPr sz="4200" b="1" i="0">
                 <a:solidFill>
-                  <a:srgbClr val="123A6B"/>
+                  <a:srgbClr val="0072CE"/>
                 </a:solidFill>
                 <a:latin typeface="Arial"/>
               </a:rPr>
@@ -25212,7 +24553,7 @@
             <a:r>
               <a:rPr sz="4200" b="1" i="0">
                 <a:solidFill>
-                  <a:srgbClr val="123A6B"/>
+                  <a:srgbClr val="0072CE"/>
                 </a:solidFill>
                 <a:latin typeface="Arial"/>
               </a:rPr>
@@ -25247,7 +24588,7 @@
             <a:r>
               <a:rPr sz="4200" b="1" i="0">
                 <a:solidFill>
-                  <a:srgbClr val="123A6B"/>
+                  <a:srgbClr val="0072CE"/>
                 </a:solidFill>
                 <a:latin typeface="Arial"/>
               </a:rPr>
@@ -25319,7 +24660,7 @@
             <a:fld id="{4B0E1F8A-6C1D-4E2A-9F3B-7A5C8D2E1F60}" type="slidenum">
               <a:rPr sz="1600" b="0" i="0">
                 <a:solidFill>
-                  <a:srgbClr val="5B6B82"/>
+                  <a:srgbClr val="0A2240"/>
                 </a:solidFill>
                 <a:latin typeface="Arial"/>
               </a:rPr>
@@ -25369,7 +24710,7 @@
             <a:avLst/>
           </a:prstGeom>
           <a:solidFill>
-            <a:srgbClr val="FF5F56"/>
+            <a:srgbClr val="FFFFFF"/>
           </a:solidFill>
           <a:ln>
             <a:noFill/>
@@ -25413,7 +24754,7 @@
             <a:avLst/>
           </a:prstGeom>
           <a:solidFill>
-            <a:srgbClr val="FFBD2E"/>
+            <a:srgbClr val="FFFFFF"/>
           </a:solidFill>
           <a:ln>
             <a:noFill/>
@@ -25457,7 +24798,7 @@
             <a:avLst/>
           </a:prstGeom>
           <a:solidFill>
-            <a:srgbClr val="27C93F"/>
+            <a:srgbClr val="FFFFFF"/>
           </a:solidFill>
           <a:ln>
             <a:noFill/>
@@ -25512,7 +24853,7 @@
             <a:r>
               <a:rPr sz="4200" b="0" i="0">
                 <a:solidFill>
-                  <a:srgbClr val="D4D4D4"/>
+                  <a:srgbClr val="FFFFFF"/>
                 </a:solidFill>
                 <a:latin typeface="Arial"/>
               </a:rPr>
@@ -25530,7 +24871,7 @@
         <p:spPr>
           <a:xfrm>
             <a:off x="457200" y="1837944"/>
-            <a:ext cx="2583080" cy="518159"/>
+            <a:ext cx="5156001" cy="518159"/>
           </a:xfrm>
           <a:prstGeom prst="rect">
             <a:avLst/>
@@ -25547,11 +24888,11 @@
             <a:r>
               <a:rPr sz="3400" b="0" i="0">
                 <a:solidFill>
-                  <a:srgbClr val="D4D4D4"/>
-                </a:solidFill>
-                <a:latin typeface="Arial"/>
-              </a:rPr>
-              <a:t>client = </a:t>
+                  <a:srgbClr val="FFFFFF"/>
+                </a:solidFill>
+                <a:latin typeface="Arial"/>
+              </a:rPr>
+              <a:t>client = OpenAI(</a:t>
             </a:r>
           </a:p>
         </p:txBody>
@@ -25564,8 +24905,8 @@
         </p:nvSpPr>
         <p:spPr>
           <a:xfrm>
-            <a:off x="1957325" y="1837944"/>
-            <a:ext cx="2525732" cy="518159"/>
+            <a:off x="457200" y="2356103"/>
+            <a:ext cx="11734800" cy="518159"/>
           </a:xfrm>
           <a:prstGeom prst="rect">
             <a:avLst/>
@@ -25582,11 +24923,11 @@
             <a:r>
               <a:rPr sz="3400" b="0" i="0">
                 <a:solidFill>
-                  <a:srgbClr val="DCDCAA"/>
-                </a:solidFill>
-                <a:latin typeface="Arial"/>
-              </a:rPr>
-              <a:t>OpenAI</a:t>
+                  <a:srgbClr val="FFFFFF"/>
+                </a:solidFill>
+                <a:latin typeface="Arial"/>
+              </a:rPr>
+              <a:t>  base_url="https://integrate.api.nvidia.com/v1",</a:t>
             </a:r>
           </a:p>
         </p:txBody>
@@ -25599,8 +24940,8 @@
         </p:nvSpPr>
         <p:spPr>
           <a:xfrm>
-            <a:off x="3421608" y="1837944"/>
-            <a:ext cx="412948" cy="518159"/>
+            <a:off x="457200" y="2874262"/>
+            <a:ext cx="11734800" cy="518159"/>
           </a:xfrm>
           <a:prstGeom prst="rect">
             <a:avLst/>
@@ -25617,11 +24958,11 @@
             <a:r>
               <a:rPr sz="3400" b="0" i="0">
                 <a:solidFill>
-                  <a:srgbClr val="D4D4D4"/>
-                </a:solidFill>
-                <a:latin typeface="Arial"/>
-              </a:rPr>
-              <a:t>(</a:t>
+                  <a:srgbClr val="FFFFFF"/>
+                </a:solidFill>
+                <a:latin typeface="Arial"/>
+              </a:rPr>
+              <a:t>  api_key=os.environ["NVIDIA_API_KEY"],</a:t>
             </a:r>
           </a:p>
         </p:txBody>
@@ -25634,8 +24975,8 @@
         </p:nvSpPr>
         <p:spPr>
           <a:xfrm>
-            <a:off x="457200" y="2356103"/>
-            <a:ext cx="3620412" cy="518159"/>
+            <a:off x="457200" y="3392421"/>
+            <a:ext cx="412948" cy="518159"/>
           </a:xfrm>
           <a:prstGeom prst="rect">
             <a:avLst/>
@@ -25652,11 +24993,11 @@
             <a:r>
               <a:rPr sz="3400" b="0" i="0">
                 <a:solidFill>
-                  <a:srgbClr val="D4D4D4"/>
-                </a:solidFill>
-                <a:latin typeface="Arial"/>
-              </a:rPr>
-              <a:t>  base_url=</a:t>
+                  <a:srgbClr val="FFFFFF"/>
+                </a:solidFill>
+                <a:latin typeface="Arial"/>
+              </a:rPr>
+              <a:t>)</a:t>
             </a:r>
           </a:p>
         </p:txBody>
@@ -25669,8 +25010,8 @@
         </p:nvSpPr>
         <p:spPr>
           <a:xfrm>
-            <a:off x="2605658" y="2356103"/>
-            <a:ext cx="9586342" cy="518159"/>
+            <a:off x="457200" y="3910580"/>
+            <a:ext cx="10052883" cy="518159"/>
           </a:xfrm>
           <a:prstGeom prst="rect">
             <a:avLst/>
@@ -25687,11 +25028,11 @@
             <a:r>
               <a:rPr sz="3400" b="0" i="0">
                 <a:solidFill>
-                  <a:srgbClr val="CE9178"/>
-                </a:solidFill>
-                <a:latin typeface="Arial"/>
-              </a:rPr>
-              <a:t>"https://integrate.api.nvidia.com/v1"</a:t>
+                  <a:srgbClr val="FFFFFF"/>
+                </a:solidFill>
+                <a:latin typeface="Arial"/>
+              </a:rPr>
+              <a:t># then loop: ask for 20 at a time,</a:t>
             </a:r>
           </a:p>
         </p:txBody>
@@ -25704,216 +25045,6 @@
         </p:nvSpPr>
         <p:spPr>
           <a:xfrm>
-            <a:off x="9344732" y="2356103"/>
-            <a:ext cx="374828" cy="518159"/>
-          </a:xfrm>
-          <a:prstGeom prst="rect">
-            <a:avLst/>
-          </a:prstGeom>
-          <a:noFill/>
-        </p:spPr>
-        <p:txBody>
-          <a:bodyPr wrap="none" lIns="0" rIns="0">
-            <a:noAutofit/>
-          </a:bodyPr>
-          <a:lstStyle/>
-          <a:p>
-            <a:pPr algn="l"/>
-            <a:r>
-              <a:rPr sz="3400" b="0" i="0">
-                <a:solidFill>
-                  <a:srgbClr val="D4D4D4"/>
-                </a:solidFill>
-                <a:latin typeface="Arial"/>
-              </a:rPr>
-              <a:t>,</a:t>
-            </a:r>
-          </a:p>
-        </p:txBody>
-      </p:sp>
-      <p:sp>
-        <p:nvSpPr>
-          <p:cNvPr id="12" name="TextBox 11"/>
-          <p:cNvSpPr txBox="1"/>
-          <p:nvPr/>
-        </p:nvSpPr>
-        <p:spPr>
-          <a:xfrm>
-            <a:off x="457200" y="2874262"/>
-            <a:ext cx="6731059" cy="518159"/>
-          </a:xfrm>
-          <a:prstGeom prst="rect">
-            <a:avLst/>
-          </a:prstGeom>
-          <a:noFill/>
-        </p:spPr>
-        <p:txBody>
-          <a:bodyPr wrap="none" lIns="0" rIns="0">
-            <a:noAutofit/>
-          </a:bodyPr>
-          <a:lstStyle/>
-          <a:p>
-            <a:pPr algn="l"/>
-            <a:r>
-              <a:rPr sz="3400" b="0" i="0">
-                <a:solidFill>
-                  <a:srgbClr val="D4D4D4"/>
-                </a:solidFill>
-                <a:latin typeface="Arial"/>
-              </a:rPr>
-              <a:t>  api_key=os.environ[</a:t>
-            </a:r>
-          </a:p>
-        </p:txBody>
-      </p:sp>
-      <p:sp>
-        <p:nvSpPr>
-          <p:cNvPr id="13" name="TextBox 12"/>
-          <p:cNvSpPr txBox="1"/>
-          <p:nvPr/>
-        </p:nvSpPr>
-        <p:spPr>
-          <a:xfrm>
-            <a:off x="4549812" y="2874262"/>
-            <a:ext cx="6241236" cy="518159"/>
-          </a:xfrm>
-          <a:prstGeom prst="rect">
-            <a:avLst/>
-          </a:prstGeom>
-          <a:noFill/>
-        </p:spPr>
-        <p:txBody>
-          <a:bodyPr wrap="none" lIns="0" rIns="0">
-            <a:noAutofit/>
-          </a:bodyPr>
-          <a:lstStyle/>
-          <a:p>
-            <a:pPr algn="l"/>
-            <a:r>
-              <a:rPr sz="3400" b="0" i="0">
-                <a:solidFill>
-                  <a:srgbClr val="CE9178"/>
-                </a:solidFill>
-                <a:latin typeface="Arial"/>
-              </a:rPr>
-              <a:t>"NVIDIA_API_KEY"</a:t>
-            </a:r>
-          </a:p>
-        </p:txBody>
-      </p:sp>
-      <p:sp>
-        <p:nvSpPr>
-          <p:cNvPr id="14" name="TextBox 13"/>
-          <p:cNvSpPr txBox="1"/>
-          <p:nvPr/>
-        </p:nvSpPr>
-        <p:spPr>
-          <a:xfrm>
-            <a:off x="8336285" y="2874262"/>
-            <a:ext cx="566777" cy="518159"/>
-          </a:xfrm>
-          <a:prstGeom prst="rect">
-            <a:avLst/>
-          </a:prstGeom>
-          <a:noFill/>
-        </p:spPr>
-        <p:txBody>
-          <a:bodyPr wrap="none" lIns="0" rIns="0">
-            <a:noAutofit/>
-          </a:bodyPr>
-          <a:lstStyle/>
-          <a:p>
-            <a:pPr algn="l"/>
-            <a:r>
-              <a:rPr sz="3400" b="0" i="0">
-                <a:solidFill>
-                  <a:srgbClr val="D4D4D4"/>
-                </a:solidFill>
-                <a:latin typeface="Arial"/>
-              </a:rPr>
-              <a:t>],</a:t>
-            </a:r>
-          </a:p>
-        </p:txBody>
-      </p:sp>
-      <p:sp>
-        <p:nvSpPr>
-          <p:cNvPr id="15" name="TextBox 14"/>
-          <p:cNvSpPr txBox="1"/>
-          <p:nvPr/>
-        </p:nvSpPr>
-        <p:spPr>
-          <a:xfrm>
-            <a:off x="457200" y="3392421"/>
-            <a:ext cx="412948" cy="518159"/>
-          </a:xfrm>
-          <a:prstGeom prst="rect">
-            <a:avLst/>
-          </a:prstGeom>
-          <a:noFill/>
-        </p:spPr>
-        <p:txBody>
-          <a:bodyPr wrap="none" lIns="0" rIns="0">
-            <a:noAutofit/>
-          </a:bodyPr>
-          <a:lstStyle/>
-          <a:p>
-            <a:pPr algn="l"/>
-            <a:r>
-              <a:rPr sz="3400" b="0" i="0">
-                <a:solidFill>
-                  <a:srgbClr val="D4D4D4"/>
-                </a:solidFill>
-                <a:latin typeface="Arial"/>
-              </a:rPr>
-              <a:t>)</a:t>
-            </a:r>
-          </a:p>
-        </p:txBody>
-      </p:sp>
-      <p:sp>
-        <p:nvSpPr>
-          <p:cNvPr id="16" name="TextBox 15"/>
-          <p:cNvSpPr txBox="1"/>
-          <p:nvPr/>
-        </p:nvSpPr>
-        <p:spPr>
-          <a:xfrm>
-            <a:off x="457200" y="3910580"/>
-            <a:ext cx="10052883" cy="518159"/>
-          </a:xfrm>
-          <a:prstGeom prst="rect">
-            <a:avLst/>
-          </a:prstGeom>
-          <a:noFill/>
-        </p:spPr>
-        <p:txBody>
-          <a:bodyPr wrap="none" lIns="0" rIns="0">
-            <a:noAutofit/>
-          </a:bodyPr>
-          <a:lstStyle/>
-          <a:p>
-            <a:pPr algn="l"/>
-            <a:r>
-              <a:rPr sz="3400" b="0" i="0">
-                <a:solidFill>
-                  <a:srgbClr val="6A9955"/>
-                </a:solidFill>
-                <a:latin typeface="Arial"/>
-              </a:rPr>
-              <a:t># then loop: ask for 20 at a time,</a:t>
-            </a:r>
-          </a:p>
-        </p:txBody>
-      </p:sp>
-      <p:sp>
-        <p:nvSpPr>
-          <p:cNvPr id="17" name="TextBox 16"/>
-          <p:cNvSpPr txBox="1"/>
-          <p:nvPr/>
-        </p:nvSpPr>
-        <p:spPr>
-          <a:xfrm>
             <a:off x="457200" y="4428739"/>
             <a:ext cx="9898380" cy="518159"/>
           </a:xfrm>
@@ -25932,7 +25063,7 @@
             <a:r>
               <a:rPr sz="3400" b="0" i="0">
                 <a:solidFill>
-                  <a:srgbClr val="6A9955"/>
+                  <a:srgbClr val="FFFFFF"/>
                 </a:solidFill>
                 <a:latin typeface="Arial"/>
               </a:rPr>
@@ -25943,7 +25074,7 @@
       </p:sp>
       <p:sp>
         <p:nvSpPr>
-          <p:cNvPr id="18" name="TextBox 17"/>
+          <p:cNvPr id="12" name="TextBox 11"/>
           <p:cNvSpPr/>
           <p:nvPr>
             <p:ph type="sldNum" idx="12"/>
@@ -25969,7 +25100,7 @@
             <a:fld id="{4B0E1F8A-6C1D-4E2A-9F3B-7A5C8D2E1F60}" type="slidenum">
               <a:rPr sz="1600" b="0" i="0">
                 <a:solidFill>
-                  <a:srgbClr val="5B6B82"/>
+                  <a:srgbClr val="0A2240"/>
                 </a:solidFill>
                 <a:latin typeface="Arial"/>
               </a:rPr>
@@ -26019,7 +25150,7 @@
             <a:avLst/>
           </a:prstGeom>
           <a:solidFill>
-            <a:srgbClr val="FF5F56"/>
+            <a:srgbClr val="FFFFFF"/>
           </a:solidFill>
           <a:ln>
             <a:noFill/>
@@ -26063,7 +25194,7 @@
             <a:avLst/>
           </a:prstGeom>
           <a:solidFill>
-            <a:srgbClr val="FFBD2E"/>
+            <a:srgbClr val="FFFFFF"/>
           </a:solidFill>
           <a:ln>
             <a:noFill/>
@@ -26107,7 +25238,7 @@
             <a:avLst/>
           </a:prstGeom>
           <a:solidFill>
-            <a:srgbClr val="27C93F"/>
+            <a:srgbClr val="FFFFFF"/>
           </a:solidFill>
           <a:ln>
             <a:noFill/>
@@ -26162,7 +25293,7 @@
             <a:r>
               <a:rPr sz="4200" b="0" i="0">
                 <a:solidFill>
-                  <a:srgbClr val="D4D4D4"/>
+                  <a:srgbClr val="FFFFFF"/>
                 </a:solidFill>
                 <a:latin typeface="Arial"/>
               </a:rPr>
@@ -26197,7 +25328,7 @@
             <a:r>
               <a:rPr sz="3400" b="0" i="0">
                 <a:solidFill>
-                  <a:srgbClr val="D4D4D4"/>
+                  <a:srgbClr val="FFFFFF"/>
                 </a:solidFill>
                 <a:latin typeface="Arial"/>
               </a:rPr>
@@ -26267,7 +25398,7 @@
             <a:r>
               <a:rPr sz="3400" b="0" i="0">
                 <a:solidFill>
-                  <a:srgbClr val="D4D4D4"/>
+                  <a:srgbClr val="FFFFFF"/>
                 </a:solidFill>
                 <a:latin typeface="Arial"/>
               </a:rPr>
@@ -26302,7 +25433,7 @@
             <a:r>
               <a:rPr sz="3400" b="0" i="0">
                 <a:solidFill>
-                  <a:srgbClr val="D4D4D4"/>
+                  <a:srgbClr val="FFFFFF"/>
                 </a:solidFill>
                 <a:latin typeface="Arial"/>
               </a:rPr>
@@ -26372,7 +25503,7 @@
             <a:r>
               <a:rPr sz="3400" b="0" i="0">
                 <a:solidFill>
-                  <a:srgbClr val="D4D4D4"/>
+                  <a:srgbClr val="FFFFFF"/>
                 </a:solidFill>
                 <a:latin typeface="Arial"/>
               </a:rPr>
@@ -26390,7 +25521,7 @@
         <p:spPr>
           <a:xfrm>
             <a:off x="457200" y="3392421"/>
-            <a:ext cx="2947075" cy="518159"/>
+            <a:ext cx="11734800" cy="518159"/>
           </a:xfrm>
           <a:prstGeom prst="rect">
             <a:avLst/>
@@ -26407,11 +25538,11 @@
             <a:r>
               <a:rPr sz="3400" b="0" i="0">
                 <a:solidFill>
-                  <a:srgbClr val="D4D4D4"/>
-                </a:solidFill>
-                <a:latin typeface="Arial"/>
-              </a:rPr>
-              <a:t>Give me </a:t>
+                  <a:srgbClr val="FFFFFF"/>
+                </a:solidFill>
+                <a:latin typeface="Arial"/>
+              </a:rPr>
+              <a:t>Give me 20 inputs that are MALFORMED.</a:t>
             </a:r>
           </a:p>
         </p:txBody>
@@ -26424,8 +25555,8 @@
         </p:nvSpPr>
         <p:spPr>
           <a:xfrm>
-            <a:off x="2184822" y="3392421"/>
-            <a:ext cx="951348" cy="518159"/>
+            <a:off x="457200" y="3910580"/>
+            <a:ext cx="7351772" cy="518159"/>
           </a:xfrm>
           <a:prstGeom prst="rect">
             <a:avLst/>
@@ -26442,11 +25573,11 @@
             <a:r>
               <a:rPr sz="3400" b="0" i="0">
                 <a:solidFill>
-                  <a:srgbClr val="B5CEA8"/>
-                </a:solidFill>
-                <a:latin typeface="Arial"/>
-              </a:rPr>
-              <a:t>20</a:t>
+                  <a:srgbClr val="FFFFFF"/>
+                </a:solidFill>
+                <a:latin typeface="Arial"/>
+              </a:rPr>
+              <a:t>Vary the way each one </a:t>
             </a:r>
           </a:p>
         </p:txBody>
@@ -26459,8 +25590,8 @@
         </p:nvSpPr>
         <p:spPr>
           <a:xfrm>
-            <a:off x="2665115" y="3392421"/>
-            <a:ext cx="9526885" cy="518159"/>
+            <a:off x="4937758" y="3910580"/>
+            <a:ext cx="681811" cy="518159"/>
           </a:xfrm>
           <a:prstGeom prst="rect">
             <a:avLst/>
@@ -26477,11 +25608,11 @@
             <a:r>
               <a:rPr sz="3400" b="0" i="0">
                 <a:solidFill>
-                  <a:srgbClr val="D4D4D4"/>
-                </a:solidFill>
-                <a:latin typeface="Arial"/>
-              </a:rPr>
-              <a:t> inputs that are MALFORMED.</a:t>
+                  <a:srgbClr val="569CD6"/>
+                </a:solidFill>
+                <a:latin typeface="Arial"/>
+              </a:rPr>
+              <a:t>is</a:t>
             </a:r>
           </a:p>
         </p:txBody>
@@ -26494,8 +25625,8 @@
         </p:nvSpPr>
         <p:spPr>
           <a:xfrm>
-            <a:off x="457200" y="3910580"/>
-            <a:ext cx="7351772" cy="518159"/>
+            <a:off x="5249590" y="3910580"/>
+            <a:ext cx="2679224" cy="518159"/>
           </a:xfrm>
           <a:prstGeom prst="rect">
             <a:avLst/>
@@ -26512,11 +25643,11 @@
             <a:r>
               <a:rPr sz="3400" b="0" i="0">
                 <a:solidFill>
-                  <a:srgbClr val="D4D4D4"/>
-                </a:solidFill>
-                <a:latin typeface="Arial"/>
-              </a:rPr>
-              <a:t>Vary the way each one </a:t>
+                  <a:srgbClr val="FFFFFF"/>
+                </a:solidFill>
+                <a:latin typeface="Arial"/>
+              </a:rPr>
+              <a:t> broken.</a:t>
             </a:r>
           </a:p>
         </p:txBody>
@@ -26529,76 +25660,6 @@
         </p:nvSpPr>
         <p:spPr>
           <a:xfrm>
-            <a:off x="4937758" y="3910580"/>
-            <a:ext cx="681811" cy="518159"/>
-          </a:xfrm>
-          <a:prstGeom prst="rect">
-            <a:avLst/>
-          </a:prstGeom>
-          <a:noFill/>
-        </p:spPr>
-        <p:txBody>
-          <a:bodyPr wrap="none" lIns="0" rIns="0">
-            <a:noAutofit/>
-          </a:bodyPr>
-          <a:lstStyle/>
-          <a:p>
-            <a:pPr algn="l"/>
-            <a:r>
-              <a:rPr sz="3400" b="0" i="0">
-                <a:solidFill>
-                  <a:srgbClr val="569CD6"/>
-                </a:solidFill>
-                <a:latin typeface="Arial"/>
-              </a:rPr>
-              <a:t>is</a:t>
-            </a:r>
-          </a:p>
-        </p:txBody>
-      </p:sp>
-      <p:sp>
-        <p:nvSpPr>
-          <p:cNvPr id="17" name="TextBox 16"/>
-          <p:cNvSpPr txBox="1"/>
-          <p:nvPr/>
-        </p:nvSpPr>
-        <p:spPr>
-          <a:xfrm>
-            <a:off x="5249590" y="3910580"/>
-            <a:ext cx="2679224" cy="518159"/>
-          </a:xfrm>
-          <a:prstGeom prst="rect">
-            <a:avLst/>
-          </a:prstGeom>
-          <a:noFill/>
-        </p:spPr>
-        <p:txBody>
-          <a:bodyPr wrap="none" lIns="0" rIns="0">
-            <a:noAutofit/>
-          </a:bodyPr>
-          <a:lstStyle/>
-          <a:p>
-            <a:pPr algn="l"/>
-            <a:r>
-              <a:rPr sz="3400" b="0" i="0">
-                <a:solidFill>
-                  <a:srgbClr val="D4D4D4"/>
-                </a:solidFill>
-                <a:latin typeface="Arial"/>
-              </a:rPr>
-              <a:t> broken.</a:t>
-            </a:r>
-          </a:p>
-        </p:txBody>
-      </p:sp>
-      <p:sp>
-        <p:nvSpPr>
-          <p:cNvPr id="18" name="TextBox 17"/>
-          <p:cNvSpPr txBox="1"/>
-          <p:nvPr/>
-        </p:nvSpPr>
-        <p:spPr>
-          <a:xfrm>
             <a:off x="457200" y="4428739"/>
             <a:ext cx="11090553" cy="518159"/>
           </a:xfrm>
@@ -26617,7 +25678,7 @@
             <a:r>
               <a:rPr sz="3400" b="0" i="0">
                 <a:solidFill>
-                  <a:srgbClr val="D4D4D4"/>
+                  <a:srgbClr val="FFFFFF"/>
                 </a:solidFill>
                 <a:latin typeface="Arial"/>
               </a:rPr>
@@ -26628,7 +25689,7 @@
       </p:sp>
       <p:sp>
         <p:nvSpPr>
-          <p:cNvPr id="19" name="TextBox 18"/>
+          <p:cNvPr id="17" name="TextBox 16"/>
           <p:cNvSpPr/>
           <p:nvPr>
             <p:ph type="sldNum" idx="12"/>
@@ -26654,7 +25715,7 @@
             <a:fld id="{4B0E1F8A-6C1D-4E2A-9F3B-7A5C8D2E1F60}" type="slidenum">
               <a:rPr sz="1600" b="0" i="0">
                 <a:solidFill>
-                  <a:srgbClr val="5B6B82"/>
+                  <a:srgbClr val="0A2240"/>
                 </a:solidFill>
                 <a:latin typeface="Arial"/>
               </a:rPr>
@@ -26892,7 +25953,7 @@
             <a:fld id="{4B0E1F8A-6C1D-4E2A-9F3B-7A5C8D2E1F60}" type="slidenum">
               <a:rPr sz="1600" b="0" i="0">
                 <a:solidFill>
-                  <a:srgbClr val="5B6B82"/>
+                  <a:srgbClr val="0A2240"/>
                 </a:solidFill>
                 <a:latin typeface="Arial"/>
               </a:rPr>
@@ -27314,7 +26375,7 @@
             <a:fld id="{4B0E1F8A-6C1D-4E2A-9F3B-7A5C8D2E1F60}" type="slidenum">
               <a:rPr sz="1600" b="0" i="0">
                 <a:solidFill>
-                  <a:srgbClr val="5B6B82"/>
+                  <a:srgbClr val="0A2240"/>
                 </a:solidFill>
                 <a:latin typeface="Arial"/>
               </a:rPr>
@@ -27552,7 +26613,7 @@
             <a:fld id="{4B0E1F8A-6C1D-4E2A-9F3B-7A5C8D2E1F60}" type="slidenum">
               <a:rPr sz="1600" b="0" i="0">
                 <a:solidFill>
-                  <a:srgbClr val="5B6B82"/>
+                  <a:srgbClr val="0A2240"/>
                 </a:solidFill>
                 <a:latin typeface="Arial"/>
               </a:rPr>
@@ -27648,7 +26709,7 @@
             <a:r>
               <a:rPr sz="3400" b="1" i="0">
                 <a:solidFill>
-                  <a:srgbClr val="123A6B"/>
+                  <a:srgbClr val="0072CE"/>
                 </a:solidFill>
                 <a:latin typeface="Arial"/>
               </a:rPr>
@@ -27683,7 +26744,7 @@
             <a:r>
               <a:rPr sz="3400" b="1" i="0">
                 <a:solidFill>
-                  <a:srgbClr val="123A6B"/>
+                  <a:srgbClr val="0072CE"/>
                 </a:solidFill>
                 <a:latin typeface="Arial"/>
               </a:rPr>
@@ -28114,7 +27175,7 @@
             <a:fld id="{4B0E1F8A-6C1D-4E2A-9F3B-7A5C8D2E1F60}" type="slidenum">
               <a:rPr sz="1600" b="0" i="0">
                 <a:solidFill>
-                  <a:srgbClr val="5B6B82"/>
+                  <a:srgbClr val="0A2240"/>
                 </a:solidFill>
                 <a:latin typeface="Arial"/>
               </a:rPr>
@@ -28210,7 +27271,7 @@
             <a:r>
               <a:rPr sz="4200" b="1" i="0">
                 <a:solidFill>
-                  <a:srgbClr val="123A6B"/>
+                  <a:srgbClr val="0072CE"/>
                 </a:solidFill>
                 <a:latin typeface="Arial"/>
               </a:rPr>
@@ -28245,7 +27306,7 @@
             <a:r>
               <a:rPr sz="4200" b="1" i="0">
                 <a:solidFill>
-                  <a:srgbClr val="123A6B"/>
+                  <a:srgbClr val="0072CE"/>
                 </a:solidFill>
                 <a:latin typeface="Arial"/>
               </a:rPr>
@@ -28315,7 +27376,7 @@
             <a:r>
               <a:rPr sz="4200" b="1" i="0">
                 <a:solidFill>
-                  <a:srgbClr val="123A6B"/>
+                  <a:srgbClr val="0072CE"/>
                 </a:solidFill>
                 <a:latin typeface="Arial"/>
               </a:rPr>
@@ -28350,7 +27411,7 @@
             <a:r>
               <a:rPr sz="4200" b="1" i="0">
                 <a:solidFill>
-                  <a:srgbClr val="123A6B"/>
+                  <a:srgbClr val="0072CE"/>
                 </a:solidFill>
                 <a:latin typeface="Arial"/>
               </a:rPr>
@@ -28420,7 +27481,7 @@
             <a:r>
               <a:rPr sz="4200" b="1" i="0">
                 <a:solidFill>
-                  <a:srgbClr val="123A6B"/>
+                  <a:srgbClr val="0072CE"/>
                 </a:solidFill>
                 <a:latin typeface="Arial"/>
               </a:rPr>
@@ -28455,7 +27516,7 @@
             <a:r>
               <a:rPr sz="4200" b="1" i="0">
                 <a:solidFill>
-                  <a:srgbClr val="123A6B"/>
+                  <a:srgbClr val="0072CE"/>
                 </a:solidFill>
                 <a:latin typeface="Arial"/>
               </a:rPr>
@@ -28527,7 +27588,7 @@
             <a:fld id="{4B0E1F8A-6C1D-4E2A-9F3B-7A5C8D2E1F60}" type="slidenum">
               <a:rPr sz="1600" b="0" i="0">
                 <a:solidFill>
-                  <a:srgbClr val="5B6B82"/>
+                  <a:srgbClr val="0A2240"/>
                 </a:solidFill>
                 <a:latin typeface="Arial"/>
               </a:rPr>
@@ -28765,7 +27826,7 @@
             <a:fld id="{4B0E1F8A-6C1D-4E2A-9F3B-7A5C8D2E1F60}" type="slidenum">
               <a:rPr sz="1600" b="0" i="0">
                 <a:solidFill>
-                  <a:srgbClr val="5B6B82"/>
+                  <a:srgbClr val="0A2240"/>
                 </a:solidFill>
                 <a:latin typeface="Arial"/>
               </a:rPr>
@@ -29073,7 +28134,7 @@
             <a:fld id="{4B0E1F8A-6C1D-4E2A-9F3B-7A5C8D2E1F60}" type="slidenum">
               <a:rPr sz="1600" b="0" i="0">
                 <a:solidFill>
-                  <a:srgbClr val="5B6B82"/>
+                  <a:srgbClr val="0A2240"/>
                 </a:solidFill>
                 <a:latin typeface="Arial"/>
               </a:rPr>
@@ -29311,7 +28372,7 @@
             <a:fld id="{4B0E1F8A-6C1D-4E2A-9F3B-7A5C8D2E1F60}" type="slidenum">
               <a:rPr sz="1600" b="0" i="0">
                 <a:solidFill>
-                  <a:srgbClr val="5B6B82"/>
+                  <a:srgbClr val="0A2240"/>
                 </a:solidFill>
                 <a:latin typeface="Arial"/>
               </a:rPr>
@@ -29451,7 +28512,7 @@
             <a:r>
               <a:rPr sz="3400" b="0" i="0">
                 <a:solidFill>
-                  <a:srgbClr val="5B6B82"/>
+                  <a:srgbClr val="0A2240"/>
                 </a:solidFill>
                 <a:latin typeface="Arial"/>
               </a:rPr>
@@ -29488,7 +28549,7 @@
             <a:fld id="{4B0E1F8A-6C1D-4E2A-9F3B-7A5C8D2E1F60}" type="slidenum">
               <a:rPr sz="1600" b="0" i="0">
                 <a:solidFill>
-                  <a:srgbClr val="5B6B82"/>
+                  <a:srgbClr val="0A2240"/>
                 </a:solidFill>
                 <a:latin typeface="Arial"/>
               </a:rPr>
@@ -29665,7 +28726,7 @@
             <a:fld id="{4B0E1F8A-6C1D-4E2A-9F3B-7A5C8D2E1F60}" type="slidenum">
               <a:rPr sz="1600" b="0" i="0">
                 <a:solidFill>
-                  <a:srgbClr val="5B6B82"/>
+                  <a:srgbClr val="0A2240"/>
                 </a:solidFill>
                 <a:latin typeface="Arial"/>
               </a:rPr>
@@ -29842,7 +28903,7 @@
             <a:fld id="{4B0E1F8A-6C1D-4E2A-9F3B-7A5C8D2E1F60}" type="slidenum">
               <a:rPr sz="1600" b="0" i="0">
                 <a:solidFill>
-                  <a:srgbClr val="5B6B82"/>
+                  <a:srgbClr val="0A2240"/>
                 </a:solidFill>
                 <a:latin typeface="Arial"/>
               </a:rPr>
@@ -29938,7 +28999,7 @@
             <a:r>
               <a:rPr sz="3400" b="1" i="0">
                 <a:solidFill>
-                  <a:srgbClr val="123A6B"/>
+                  <a:srgbClr val="0072CE"/>
                 </a:solidFill>
                 <a:latin typeface="Arial"/>
               </a:rPr>
@@ -29973,7 +29034,7 @@
             <a:r>
               <a:rPr sz="3400" b="1" i="0">
                 <a:solidFill>
-                  <a:srgbClr val="123A6B"/>
+                  <a:srgbClr val="0072CE"/>
                 </a:solidFill>
                 <a:latin typeface="Arial"/>
               </a:rPr>
@@ -30404,7 +29465,7 @@
             <a:fld id="{4B0E1F8A-6C1D-4E2A-9F3B-7A5C8D2E1F60}" type="slidenum">
               <a:rPr sz="1600" b="0" i="0">
                 <a:solidFill>
-                  <a:srgbClr val="5B6B82"/>
+                  <a:srgbClr val="0A2240"/>
                 </a:solidFill>
                 <a:latin typeface="Arial"/>
               </a:rPr>
@@ -30546,7 +29607,7 @@
             <a:fld id="{4B0E1F8A-6C1D-4E2A-9F3B-7A5C8D2E1F60}" type="slidenum">
               <a:rPr sz="1600" b="0" i="0">
                 <a:solidFill>
-                  <a:srgbClr val="5B6B82"/>
+                  <a:srgbClr val="0A2240"/>
                 </a:solidFill>
                 <a:latin typeface="Arial"/>
               </a:rPr>
@@ -30596,7 +29657,7 @@
             <a:avLst/>
           </a:prstGeom>
           <a:solidFill>
-            <a:srgbClr val="FF5F56"/>
+            <a:srgbClr val="FFFFFF"/>
           </a:solidFill>
           <a:ln>
             <a:noFill/>
@@ -30640,7 +29701,7 @@
             <a:avLst/>
           </a:prstGeom>
           <a:solidFill>
-            <a:srgbClr val="FFBD2E"/>
+            <a:srgbClr val="FFFFFF"/>
           </a:solidFill>
           <a:ln>
             <a:noFill/>
@@ -30684,7 +29745,7 @@
             <a:avLst/>
           </a:prstGeom>
           <a:solidFill>
-            <a:srgbClr val="27C93F"/>
+            <a:srgbClr val="FFFFFF"/>
           </a:solidFill>
           <a:ln>
             <a:noFill/>
@@ -30739,7 +29800,7 @@
             <a:r>
               <a:rPr sz="4200" b="0" i="0">
                 <a:solidFill>
-                  <a:srgbClr val="D4D4D4"/>
+                  <a:srgbClr val="FFFFFF"/>
                 </a:solidFill>
                 <a:latin typeface="Arial"/>
               </a:rPr>
@@ -30774,7 +29835,7 @@
             <a:r>
               <a:rPr sz="3400" b="0" i="0">
                 <a:solidFill>
-                  <a:srgbClr val="6A9955"/>
+                  <a:srgbClr val="FFFFFF"/>
                 </a:solidFill>
                 <a:latin typeface="Arial"/>
               </a:rPr>
@@ -30792,7 +29853,7 @@
         <p:spPr>
           <a:xfrm>
             <a:off x="457200" y="2356103"/>
-            <a:ext cx="4291388" cy="518159"/>
+            <a:ext cx="10359529" cy="518159"/>
           </a:xfrm>
           <a:prstGeom prst="rect">
             <a:avLst/>
@@ -30809,11 +29870,11 @@
             <a:r>
               <a:rPr sz="3400" b="0" i="0">
                 <a:solidFill>
-                  <a:srgbClr val="D4D4D4"/>
-                </a:solidFill>
-                <a:latin typeface="Arial"/>
-              </a:rPr>
-              <a:t>sent:   report-</a:t>
+                  <a:srgbClr val="FFFFFF"/>
+                </a:solidFill>
+                <a:latin typeface="Arial"/>
+              </a:rPr>
+              <a:t>sent:   report-2019.pdf (valid, old)</a:t>
             </a:r>
           </a:p>
         </p:txBody>
@@ -30826,8 +29887,8 @@
         </p:nvSpPr>
         <p:spPr>
           <a:xfrm>
-            <a:off x="3025018" y="2356103"/>
-            <a:ext cx="1719817" cy="518159"/>
+            <a:off x="457200" y="2874262"/>
+            <a:ext cx="11012627" cy="518159"/>
           </a:xfrm>
           <a:prstGeom prst="rect">
             <a:avLst/>
@@ -30844,11 +29905,11 @@
             <a:r>
               <a:rPr sz="3400" b="0" i="0">
                 <a:solidFill>
-                  <a:srgbClr val="B5CEA8"/>
-                </a:solidFill>
-                <a:latin typeface="Arial"/>
-              </a:rPr>
-              <a:t>2019</a:t>
+                  <a:srgbClr val="FFFFFF"/>
+                </a:solidFill>
+                <a:latin typeface="Arial"/>
+              </a:rPr>
+              <a:t>got:    a confident summary of 2024</a:t>
             </a:r>
           </a:p>
         </p:txBody>
@@ -30861,8 +29922,8 @@
         </p:nvSpPr>
         <p:spPr>
           <a:xfrm>
-            <a:off x="3985605" y="2356103"/>
-            <a:ext cx="4714081" cy="518159"/>
+            <a:off x="457200" y="3392421"/>
+            <a:ext cx="4906366" cy="518159"/>
           </a:xfrm>
           <a:prstGeom prst="rect">
             <a:avLst/>
@@ -30879,11 +29940,11 @@
             <a:r>
               <a:rPr sz="3400" b="0" i="0">
                 <a:solidFill>
-                  <a:srgbClr val="D4D4D4"/>
-                </a:solidFill>
-                <a:latin typeface="Arial"/>
-              </a:rPr>
-              <a:t>.pdf (valid, old)</a:t>
+                  <a:srgbClr val="FFFFFF"/>
+                </a:solidFill>
+                <a:latin typeface="Arial"/>
+              </a:rPr>
+              <a:t>expect: refuse, </a:t>
             </a:r>
           </a:p>
         </p:txBody>
@@ -30896,8 +29957,8 @@
         </p:nvSpPr>
         <p:spPr>
           <a:xfrm>
-            <a:off x="457200" y="2874262"/>
-            <a:ext cx="9475688" cy="518159"/>
+            <a:off x="3409379" y="3392421"/>
+            <a:ext cx="797182" cy="518159"/>
           </a:xfrm>
           <a:prstGeom prst="rect">
             <a:avLst/>
@@ -30914,11 +29975,11 @@
             <a:r>
               <a:rPr sz="3400" b="0" i="0">
                 <a:solidFill>
-                  <a:srgbClr val="D4D4D4"/>
-                </a:solidFill>
-                <a:latin typeface="Arial"/>
-              </a:rPr>
-              <a:t>got:    a confident summary of </a:t>
+                  <a:srgbClr val="569CD6"/>
+                </a:solidFill>
+                <a:latin typeface="Arial"/>
+              </a:rPr>
+              <a:t>or</a:t>
             </a:r>
           </a:p>
         </p:txBody>
@@ -30931,8 +29992,8 @@
         </p:nvSpPr>
         <p:spPr>
           <a:xfrm>
-            <a:off x="6265205" y="2874262"/>
-            <a:ext cx="1719817" cy="518159"/>
+            <a:off x="3793319" y="3392421"/>
+            <a:ext cx="4944150" cy="518159"/>
           </a:xfrm>
           <a:prstGeom prst="rect">
             <a:avLst/>
@@ -30949,11 +30010,11 @@
             <a:r>
               <a:rPr sz="3400" b="0" i="0">
                 <a:solidFill>
-                  <a:srgbClr val="B5CEA8"/>
-                </a:solidFill>
-                <a:latin typeface="Arial"/>
-              </a:rPr>
-              <a:t>2024</a:t>
+                  <a:srgbClr val="FFFFFF"/>
+                </a:solidFill>
+                <a:latin typeface="Arial"/>
+              </a:rPr>
+              <a:t> say which year</a:t>
             </a:r>
           </a:p>
         </p:txBody>
@@ -30966,111 +30027,6 @@
         </p:nvSpPr>
         <p:spPr>
           <a:xfrm>
-            <a:off x="457200" y="3392421"/>
-            <a:ext cx="4906366" cy="518159"/>
-          </a:xfrm>
-          <a:prstGeom prst="rect">
-            <a:avLst/>
-          </a:prstGeom>
-          <a:noFill/>
-        </p:spPr>
-        <p:txBody>
-          <a:bodyPr wrap="none" lIns="0" rIns="0">
-            <a:noAutofit/>
-          </a:bodyPr>
-          <a:lstStyle/>
-          <a:p>
-            <a:pPr algn="l"/>
-            <a:r>
-              <a:rPr sz="3400" b="0" i="0">
-                <a:solidFill>
-                  <a:srgbClr val="D4D4D4"/>
-                </a:solidFill>
-                <a:latin typeface="Arial"/>
-              </a:rPr>
-              <a:t>expect: refuse, </a:t>
-            </a:r>
-          </a:p>
-        </p:txBody>
-      </p:sp>
-      <p:sp>
-        <p:nvSpPr>
-          <p:cNvPr id="13" name="TextBox 12"/>
-          <p:cNvSpPr txBox="1"/>
-          <p:nvPr/>
-        </p:nvSpPr>
-        <p:spPr>
-          <a:xfrm>
-            <a:off x="3409379" y="3392421"/>
-            <a:ext cx="797182" cy="518159"/>
-          </a:xfrm>
-          <a:prstGeom prst="rect">
-            <a:avLst/>
-          </a:prstGeom>
-          <a:noFill/>
-        </p:spPr>
-        <p:txBody>
-          <a:bodyPr wrap="none" lIns="0" rIns="0">
-            <a:noAutofit/>
-          </a:bodyPr>
-          <a:lstStyle/>
-          <a:p>
-            <a:pPr algn="l"/>
-            <a:r>
-              <a:rPr sz="3400" b="0" i="0">
-                <a:solidFill>
-                  <a:srgbClr val="569CD6"/>
-                </a:solidFill>
-                <a:latin typeface="Arial"/>
-              </a:rPr>
-              <a:t>or</a:t>
-            </a:r>
-          </a:p>
-        </p:txBody>
-      </p:sp>
-      <p:sp>
-        <p:nvSpPr>
-          <p:cNvPr id="14" name="TextBox 13"/>
-          <p:cNvSpPr txBox="1"/>
-          <p:nvPr/>
-        </p:nvSpPr>
-        <p:spPr>
-          <a:xfrm>
-            <a:off x="3793319" y="3392421"/>
-            <a:ext cx="4944150" cy="518159"/>
-          </a:xfrm>
-          <a:prstGeom prst="rect">
-            <a:avLst/>
-          </a:prstGeom>
-          <a:noFill/>
-        </p:spPr>
-        <p:txBody>
-          <a:bodyPr wrap="none" lIns="0" rIns="0">
-            <a:noAutofit/>
-          </a:bodyPr>
-          <a:lstStyle/>
-          <a:p>
-            <a:pPr algn="l"/>
-            <a:r>
-              <a:rPr sz="3400" b="0" i="0">
-                <a:solidFill>
-                  <a:srgbClr val="D4D4D4"/>
-                </a:solidFill>
-                <a:latin typeface="Arial"/>
-              </a:rPr>
-              <a:t> say which year</a:t>
-            </a:r>
-          </a:p>
-        </p:txBody>
-      </p:sp>
-      <p:sp>
-        <p:nvSpPr>
-          <p:cNvPr id="15" name="TextBox 14"/>
-          <p:cNvSpPr txBox="1"/>
-          <p:nvPr/>
-        </p:nvSpPr>
-        <p:spPr>
-          <a:xfrm>
             <a:off x="457200" y="3910580"/>
             <a:ext cx="8170168" cy="518159"/>
           </a:xfrm>
@@ -31089,7 +30045,7 @@
             <a:r>
               <a:rPr sz="3400" b="0" i="0">
                 <a:solidFill>
-                  <a:srgbClr val="D4D4D4"/>
+                  <a:srgbClr val="FFFFFF"/>
                 </a:solidFill>
                 <a:latin typeface="Arial"/>
               </a:rPr>
@@ -31100,7 +30056,7 @@
       </p:sp>
       <p:sp>
         <p:nvSpPr>
-          <p:cNvPr id="16" name="TextBox 15"/>
+          <p:cNvPr id="13" name="TextBox 12"/>
           <p:cNvSpPr/>
           <p:nvPr>
             <p:ph type="sldNum" idx="12"/>
@@ -31126,7 +30082,7 @@
             <a:fld id="{4B0E1F8A-6C1D-4E2A-9F3B-7A5C8D2E1F60}" type="slidenum">
               <a:rPr sz="1600" b="0" i="0">
                 <a:solidFill>
-                  <a:srgbClr val="5B6B82"/>
+                  <a:srgbClr val="0A2240"/>
                 </a:solidFill>
                 <a:latin typeface="Arial"/>
               </a:rPr>
@@ -31364,7 +30320,7 @@
             <a:fld id="{4B0E1F8A-6C1D-4E2A-9F3B-7A5C8D2E1F60}" type="slidenum">
               <a:rPr sz="1600" b="0" i="0">
                 <a:solidFill>
-                  <a:srgbClr val="5B6B82"/>
+                  <a:srgbClr val="0A2240"/>
                 </a:solidFill>
                 <a:latin typeface="Arial"/>
               </a:rPr>
@@ -31602,7 +30558,7 @@
             <a:fld id="{4B0E1F8A-6C1D-4E2A-9F3B-7A5C8D2E1F60}" type="slidenum">
               <a:rPr sz="1600" b="0" i="0">
                 <a:solidFill>
-                  <a:srgbClr val="5B6B82"/>
+                  <a:srgbClr val="0A2240"/>
                 </a:solidFill>
                 <a:latin typeface="Arial"/>
               </a:rPr>
@@ -31840,7 +30796,7 @@
             <a:fld id="{4B0E1F8A-6C1D-4E2A-9F3B-7A5C8D2E1F60}" type="slidenum">
               <a:rPr sz="1600" b="0" i="0">
                 <a:solidFill>
-                  <a:srgbClr val="5B6B82"/>
+                  <a:srgbClr val="0A2240"/>
                 </a:solidFill>
                 <a:latin typeface="Arial"/>
               </a:rPr>
@@ -31936,7 +30892,7 @@
             <a:r>
               <a:rPr sz="4200" b="1" i="0">
                 <a:solidFill>
-                  <a:srgbClr val="123A6B"/>
+                  <a:srgbClr val="0072CE"/>
                 </a:solidFill>
                 <a:latin typeface="Arial"/>
               </a:rPr>
@@ -31971,7 +30927,7 @@
             <a:r>
               <a:rPr sz="4200" b="1" i="0">
                 <a:solidFill>
-                  <a:srgbClr val="123A6B"/>
+                  <a:srgbClr val="0072CE"/>
                 </a:solidFill>
                 <a:latin typeface="Arial"/>
               </a:rPr>
@@ -32041,7 +30997,7 @@
             <a:r>
               <a:rPr sz="4200" b="1" i="0">
                 <a:solidFill>
-                  <a:srgbClr val="123A6B"/>
+                  <a:srgbClr val="0072CE"/>
                 </a:solidFill>
                 <a:latin typeface="Arial"/>
               </a:rPr>
@@ -32076,7 +31032,7 @@
             <a:r>
               <a:rPr sz="4200" b="1" i="0">
                 <a:solidFill>
-                  <a:srgbClr val="123A6B"/>
+                  <a:srgbClr val="0072CE"/>
                 </a:solidFill>
                 <a:latin typeface="Arial"/>
               </a:rPr>
@@ -32146,7 +31102,7 @@
             <a:r>
               <a:rPr sz="4200" b="1" i="0">
                 <a:solidFill>
-                  <a:srgbClr val="123A6B"/>
+                  <a:srgbClr val="0072CE"/>
                 </a:solidFill>
                 <a:latin typeface="Arial"/>
               </a:rPr>
@@ -32181,7 +31137,7 @@
             <a:r>
               <a:rPr sz="4200" b="1" i="0">
                 <a:solidFill>
-                  <a:srgbClr val="123A6B"/>
+                  <a:srgbClr val="0072CE"/>
                 </a:solidFill>
                 <a:latin typeface="Arial"/>
               </a:rPr>
@@ -32253,7 +31209,7 @@
             <a:fld id="{4B0E1F8A-6C1D-4E2A-9F3B-7A5C8D2E1F60}" type="slidenum">
               <a:rPr sz="1600" b="0" i="0">
                 <a:solidFill>
-                  <a:srgbClr val="5B6B82"/>
+                  <a:srgbClr val="0A2240"/>
                 </a:solidFill>
                 <a:latin typeface="Arial"/>
               </a:rPr>
@@ -32430,7 +31386,7 @@
             <a:fld id="{4B0E1F8A-6C1D-4E2A-9F3B-7A5C8D2E1F60}" type="slidenum">
               <a:rPr sz="1600" b="0" i="0">
                 <a:solidFill>
-                  <a:srgbClr val="5B6B82"/>
+                  <a:srgbClr val="0A2240"/>
                 </a:solidFill>
                 <a:latin typeface="Arial"/>
               </a:rPr>
@@ -32526,7 +31482,7 @@
             <a:r>
               <a:rPr sz="3400" b="1" i="0">
                 <a:solidFill>
-                  <a:srgbClr val="5B6B82"/>
+                  <a:srgbClr val="0A2240"/>
                 </a:solidFill>
                 <a:latin typeface="Arial"/>
               </a:rPr>
@@ -32543,14 +31499,14 @@
         </p:nvSpPr>
         <p:spPr>
           <a:xfrm>
-            <a:off x="548640" y="2176271"/>
-            <a:ext cx="1650492" cy="54864"/>
+            <a:off x="457200" y="2176271"/>
+            <a:ext cx="2110929" cy="54864"/>
           </a:xfrm>
           <a:prstGeom prst="rect">
             <a:avLst/>
           </a:prstGeom>
           <a:solidFill>
-            <a:srgbClr val="5B6B82"/>
+            <a:srgbClr val="0A2240"/>
           </a:solidFill>
           <a:ln>
             <a:noFill/>
@@ -32622,8 +31578,8 @@
         </p:nvSpPr>
         <p:spPr>
           <a:xfrm>
-            <a:off x="6324600" y="2176271"/>
-            <a:ext cx="1650492" cy="54864"/>
+            <a:off x="6233160" y="2176271"/>
+            <a:ext cx="2039875" cy="54864"/>
           </a:xfrm>
           <a:prstGeom prst="rect">
             <a:avLst/>
@@ -32896,7 +31852,7 @@
             <a:fld id="{4B0E1F8A-6C1D-4E2A-9F3B-7A5C8D2E1F60}" type="slidenum">
               <a:rPr sz="1600" b="0" i="0">
                 <a:solidFill>
-                  <a:srgbClr val="5B6B82"/>
+                  <a:srgbClr val="0A2240"/>
                 </a:solidFill>
                 <a:latin typeface="Arial"/>
               </a:rPr>
@@ -33134,7 +32090,7 @@
             <a:fld id="{4B0E1F8A-6C1D-4E2A-9F3B-7A5C8D2E1F60}" type="slidenum">
               <a:rPr sz="1600" b="0" i="0">
                 <a:solidFill>
-                  <a:srgbClr val="5B6B82"/>
+                  <a:srgbClr val="0A2240"/>
                 </a:solidFill>
                 <a:latin typeface="Arial"/>
               </a:rPr>
@@ -33372,7 +32328,7 @@
             <a:fld id="{4B0E1F8A-6C1D-4E2A-9F3B-7A5C8D2E1F60}" type="slidenum">
               <a:rPr sz="1600" b="0" i="0">
                 <a:solidFill>
-                  <a:srgbClr val="5B6B82"/>
+                  <a:srgbClr val="0A2240"/>
                 </a:solidFill>
                 <a:latin typeface="Arial"/>
               </a:rPr>
@@ -33468,7 +32424,7 @@
             <a:r>
               <a:rPr sz="4200" b="1" i="0">
                 <a:solidFill>
-                  <a:srgbClr val="123A6B"/>
+                  <a:srgbClr val="0072CE"/>
                 </a:solidFill>
                 <a:latin typeface="Arial"/>
               </a:rPr>
@@ -33503,7 +32459,7 @@
             <a:r>
               <a:rPr sz="4200" b="1" i="0">
                 <a:solidFill>
-                  <a:srgbClr val="123A6B"/>
+                  <a:srgbClr val="0072CE"/>
                 </a:solidFill>
                 <a:latin typeface="Arial"/>
               </a:rPr>
@@ -33573,7 +32529,7 @@
             <a:r>
               <a:rPr sz="4200" b="1" i="0">
                 <a:solidFill>
-                  <a:srgbClr val="123A6B"/>
+                  <a:srgbClr val="0072CE"/>
                 </a:solidFill>
                 <a:latin typeface="Arial"/>
               </a:rPr>
@@ -33608,7 +32564,7 @@
             <a:r>
               <a:rPr sz="4200" b="1" i="0">
                 <a:solidFill>
-                  <a:srgbClr val="123A6B"/>
+                  <a:srgbClr val="0072CE"/>
                 </a:solidFill>
                 <a:latin typeface="Arial"/>
               </a:rPr>
@@ -33678,7 +32634,7 @@
             <a:r>
               <a:rPr sz="4200" b="1" i="0">
                 <a:solidFill>
-                  <a:srgbClr val="123A6B"/>
+                  <a:srgbClr val="0072CE"/>
                 </a:solidFill>
                 <a:latin typeface="Arial"/>
               </a:rPr>
@@ -33713,7 +32669,7 @@
             <a:r>
               <a:rPr sz="4200" b="1" i="0">
                 <a:solidFill>
-                  <a:srgbClr val="123A6B"/>
+                  <a:srgbClr val="0072CE"/>
                 </a:solidFill>
                 <a:latin typeface="Arial"/>
               </a:rPr>
@@ -33785,7 +32741,7 @@
             <a:fld id="{4B0E1F8A-6C1D-4E2A-9F3B-7A5C8D2E1F60}" type="slidenum">
               <a:rPr sz="1600" b="0" i="0">
                 <a:solidFill>
-                  <a:srgbClr val="5B6B82"/>
+                  <a:srgbClr val="0A2240"/>
                 </a:solidFill>
                 <a:latin typeface="Arial"/>
               </a:rPr>
@@ -34021,7 +32977,7 @@
             <a:r>
               <a:rPr sz="4200" b="1" i="0">
                 <a:solidFill>
-                  <a:srgbClr val="5B6B82"/>
+                  <a:srgbClr val="0A2240"/>
                 </a:solidFill>
                 <a:latin typeface="Arial"/>
               </a:rPr>
@@ -34058,7 +33014,7 @@
             <a:fld id="{4B0E1F8A-6C1D-4E2A-9F3B-7A5C8D2E1F60}" type="slidenum">
               <a:rPr sz="1600" b="0" i="0">
                 <a:solidFill>
-                  <a:srgbClr val="5B6B82"/>
+                  <a:srgbClr val="0A2240"/>
                 </a:solidFill>
                 <a:latin typeface="Arial"/>
               </a:rPr>
@@ -34296,7 +33252,7 @@
             <a:fld id="{4B0E1F8A-6C1D-4E2A-9F3B-7A5C8D2E1F60}" type="slidenum">
               <a:rPr sz="1600" b="0" i="0">
                 <a:solidFill>
-                  <a:srgbClr val="5B6B82"/>
+                  <a:srgbClr val="0A2240"/>
                 </a:solidFill>
                 <a:latin typeface="Arial"/>
               </a:rPr>
@@ -34392,7 +33348,7 @@
             <a:r>
               <a:rPr sz="3400" b="1" i="0">
                 <a:solidFill>
-                  <a:srgbClr val="123A6B"/>
+                  <a:srgbClr val="0072CE"/>
                 </a:solidFill>
                 <a:latin typeface="Arial"/>
               </a:rPr>
@@ -34427,7 +33383,7 @@
             <a:r>
               <a:rPr sz="3400" b="1" i="0">
                 <a:solidFill>
-                  <a:srgbClr val="123A6B"/>
+                  <a:srgbClr val="0072CE"/>
                 </a:solidFill>
                 <a:latin typeface="Arial"/>
               </a:rPr>
@@ -34788,7 +33744,7 @@
             <a:fld id="{4B0E1F8A-6C1D-4E2A-9F3B-7A5C8D2E1F60}" type="slidenum">
               <a:rPr sz="1600" b="0" i="0">
                 <a:solidFill>
-                  <a:srgbClr val="5B6B82"/>
+                  <a:srgbClr val="0A2240"/>
                 </a:solidFill>
                 <a:latin typeface="Arial"/>
               </a:rPr>
@@ -34930,7 +33886,7 @@
             <a:fld id="{4B0E1F8A-6C1D-4E2A-9F3B-7A5C8D2E1F60}" type="slidenum">
               <a:rPr sz="1600" b="0" i="0">
                 <a:solidFill>
-                  <a:srgbClr val="5B6B82"/>
+                  <a:srgbClr val="0A2240"/>
                 </a:solidFill>
                 <a:latin typeface="Arial"/>
               </a:rPr>
@@ -35168,7 +34124,7 @@
             <a:fld id="{4B0E1F8A-6C1D-4E2A-9F3B-7A5C8D2E1F60}" type="slidenum">
               <a:rPr sz="1600" b="0" i="0">
                 <a:solidFill>
-                  <a:srgbClr val="5B6B82"/>
+                  <a:srgbClr val="0A2240"/>
                 </a:solidFill>
                 <a:latin typeface="Arial"/>
               </a:rPr>
@@ -35264,7 +34220,7 @@
             <a:r>
               <a:rPr sz="4200" b="1" i="0">
                 <a:solidFill>
-                  <a:srgbClr val="123A6B"/>
+                  <a:srgbClr val="0072CE"/>
                 </a:solidFill>
                 <a:latin typeface="Arial"/>
               </a:rPr>
@@ -35282,13 +34238,13 @@
         <p:spPr>
           <a:xfrm>
             <a:off x="457200" y="2194560"/>
-            <a:ext cx="784098" cy="54864"/>
+            <a:ext cx="593303" cy="54864"/>
           </a:xfrm>
           <a:prstGeom prst="rect">
             <a:avLst/>
           </a:prstGeom>
           <a:solidFill>
-            <a:srgbClr val="123A6B"/>
+            <a:srgbClr val="0072CE"/>
           </a:solidFill>
           <a:ln>
             <a:noFill/>
@@ -35343,7 +34299,7 @@
             <a:r>
               <a:rPr sz="3400" b="1" i="0">
                 <a:solidFill>
-                  <a:srgbClr val="123A6B"/>
+                  <a:srgbClr val="0072CE"/>
                 </a:solidFill>
                 <a:latin typeface="Arial"/>
               </a:rPr>
@@ -35413,7 +34369,7 @@
             <a:r>
               <a:rPr sz="4200" b="1" i="0">
                 <a:solidFill>
-                  <a:srgbClr val="123A6B"/>
+                  <a:srgbClr val="0072CE"/>
                 </a:solidFill>
                 <a:latin typeface="Arial"/>
               </a:rPr>
@@ -35431,13 +34387,13 @@
         <p:spPr>
           <a:xfrm>
             <a:off x="3345180" y="2194560"/>
-            <a:ext cx="784098" cy="54864"/>
+            <a:ext cx="593303" cy="54864"/>
           </a:xfrm>
           <a:prstGeom prst="rect">
             <a:avLst/>
           </a:prstGeom>
           <a:solidFill>
-            <a:srgbClr val="123A6B"/>
+            <a:srgbClr val="0072CE"/>
           </a:solidFill>
           <a:ln>
             <a:noFill/>
@@ -35492,7 +34448,7 @@
             <a:r>
               <a:rPr sz="3400" b="1" i="0">
                 <a:solidFill>
-                  <a:srgbClr val="123A6B"/>
+                  <a:srgbClr val="0072CE"/>
                 </a:solidFill>
                 <a:latin typeface="Arial"/>
               </a:rPr>
@@ -35562,7 +34518,7 @@
             <a:r>
               <a:rPr sz="4200" b="1" i="0">
                 <a:solidFill>
-                  <a:srgbClr val="123A6B"/>
+                  <a:srgbClr val="0072CE"/>
                 </a:solidFill>
                 <a:latin typeface="Arial"/>
               </a:rPr>
@@ -35580,13 +34536,13 @@
         <p:spPr>
           <a:xfrm>
             <a:off x="6233160" y="2194560"/>
-            <a:ext cx="784098" cy="54864"/>
+            <a:ext cx="593303" cy="54864"/>
           </a:xfrm>
           <a:prstGeom prst="rect">
             <a:avLst/>
           </a:prstGeom>
           <a:solidFill>
-            <a:srgbClr val="123A6B"/>
+            <a:srgbClr val="0072CE"/>
           </a:solidFill>
           <a:ln>
             <a:noFill/>
@@ -35641,7 +34597,7 @@
             <a:r>
               <a:rPr sz="3400" b="1" i="0">
                 <a:solidFill>
-                  <a:srgbClr val="123A6B"/>
+                  <a:srgbClr val="0072CE"/>
                 </a:solidFill>
                 <a:latin typeface="Arial"/>
               </a:rPr>
@@ -35711,7 +34667,7 @@
             <a:r>
               <a:rPr sz="4200" b="1" i="0">
                 <a:solidFill>
-                  <a:srgbClr val="123A6B"/>
+                  <a:srgbClr val="0072CE"/>
                 </a:solidFill>
                 <a:latin typeface="Arial"/>
               </a:rPr>
@@ -35729,13 +34685,13 @@
         <p:spPr>
           <a:xfrm>
             <a:off x="9121140" y="2194560"/>
-            <a:ext cx="784098" cy="54864"/>
+            <a:ext cx="593303" cy="54864"/>
           </a:xfrm>
           <a:prstGeom prst="rect">
             <a:avLst/>
           </a:prstGeom>
           <a:solidFill>
-            <a:srgbClr val="123A6B"/>
+            <a:srgbClr val="0072CE"/>
           </a:solidFill>
           <a:ln>
             <a:noFill/>
@@ -35790,7 +34746,7 @@
             <a:r>
               <a:rPr sz="3400" b="1" i="0">
                 <a:solidFill>
-                  <a:srgbClr val="123A6B"/>
+                  <a:srgbClr val="0072CE"/>
                 </a:solidFill>
                 <a:latin typeface="Arial"/>
               </a:rPr>
@@ -35862,7 +34818,7 @@
             <a:fld id="{4B0E1F8A-6C1D-4E2A-9F3B-7A5C8D2E1F60}" type="slidenum">
               <a:rPr sz="1600" b="0" i="0">
                 <a:solidFill>
-                  <a:srgbClr val="5B6B82"/>
+                  <a:srgbClr val="0A2240"/>
                 </a:solidFill>
                 <a:latin typeface="Arial"/>
               </a:rPr>
@@ -36380,7 +35336,7 @@
             <a:fld id="{4B0E1F8A-6C1D-4E2A-9F3B-7A5C8D2E1F60}" type="slidenum">
               <a:rPr sz="1600" b="0" i="0">
                 <a:solidFill>
-                  <a:srgbClr val="5B6B82"/>
+                  <a:srgbClr val="0A2240"/>
                 </a:solidFill>
                 <a:latin typeface="Arial"/>
               </a:rPr>
@@ -36520,7 +35476,7 @@
             <a:r>
               <a:rPr sz="3400" b="0" i="0">
                 <a:solidFill>
-                  <a:srgbClr val="5B6B82"/>
+                  <a:srgbClr val="0A2240"/>
                 </a:solidFill>
                 <a:latin typeface="Arial"/>
               </a:rPr>
@@ -36557,7 +35513,7 @@
             <a:fld id="{4B0E1F8A-6C1D-4E2A-9F3B-7A5C8D2E1F60}" type="slidenum">
               <a:rPr sz="1600" b="0" i="0">
                 <a:solidFill>
-                  <a:srgbClr val="5B6B82"/>
+                  <a:srgbClr val="0A2240"/>
                 </a:solidFill>
                 <a:latin typeface="Arial"/>
               </a:rPr>
@@ -36734,7 +35690,7 @@
             <a:fld id="{4B0E1F8A-6C1D-4E2A-9F3B-7A5C8D2E1F60}" type="slidenum">
               <a:rPr sz="1600" b="0" i="0">
                 <a:solidFill>
-                  <a:srgbClr val="5B6B82"/>
+                  <a:srgbClr val="0A2240"/>
                 </a:solidFill>
                 <a:latin typeface="Arial"/>
               </a:rPr>
